--- a/Chernykh/Курсовая работа Черных Эля презентация.pptx
+++ b/Chernykh/Курсовая работа Черных Эля презентация.pptx
@@ -52,7 +52,7 @@
             <a:spLocks noGrp="1"/>
           </p:cNvSpPr>
           <p:nvPr>
-            <p:ph type="ftr" idx="2"/>
+            <p:ph type="ftr" idx="1"/>
           </p:nvPr>
         </p:nvSpPr>
         <p:spPr/>
@@ -72,14 +72,14 @@
             <a:spLocks noGrp="1"/>
           </p:cNvSpPr>
           <p:nvPr>
-            <p:ph type="sldNum" idx="3"/>
+            <p:ph type="sldNum" idx="2"/>
           </p:nvPr>
         </p:nvSpPr>
         <p:spPr/>
         <p:txBody>
           <a:bodyPr/>
           <a:p>
-            <a:fld id="{ED2DDCF1-EBD9-4BE7-8140-77F3D9A4721A}" type="slidenum">
+            <a:fld id="{35BB9821-9B17-436A-8974-D2E55805A840}" type="slidenum">
               <a:t>&lt;#&gt;</a:t>
             </a:fld>
           </a:p>
@@ -92,7 +92,7 @@
             <a:spLocks noGrp="1"/>
           </p:cNvSpPr>
           <p:nvPr>
-            <p:ph type="dt" idx="1"/>
+            <p:ph type="dt" idx="3"/>
           </p:nvPr>
         </p:nvSpPr>
         <p:spPr/>
@@ -140,8 +140,8 @@
         </p:nvSpPr>
         <p:spPr>
           <a:xfrm>
-            <a:off x="609480" y="273600"/>
-            <a:ext cx="10972440" cy="1144800"/>
+            <a:off x="609480" y="221040"/>
+            <a:ext cx="10972440" cy="1250280"/>
           </a:xfrm>
           <a:prstGeom prst="rect">
             <a:avLst/>
@@ -156,11 +156,11 @@
             <a:noAutofit/>
           </a:bodyPr>
           <a:p>
-            <a:endParaRPr b="0" lang="en-US" sz="1800" spc="-1" strike="noStrike">
-              <a:solidFill>
-                <a:srgbClr val="000000"/>
-              </a:solidFill>
-              <a:latin typeface="Century Schoolbook"/>
+            <a:pPr algn="ctr">
+              <a:buNone/>
+            </a:pPr>
+            <a:endParaRPr b="0" lang="ru-RU" sz="4400" spc="-1" strike="noStrike">
+              <a:latin typeface="Arial"/>
             </a:endParaRPr>
           </a:p>
         </p:txBody>
@@ -193,20 +193,8 @@
             <a:normAutofit/>
           </a:bodyPr>
           <a:p>
-            <a:pPr>
-              <a:lnSpc>
-                <a:spcPct val="95000"/>
-              </a:lnSpc>
-              <a:spcBef>
-                <a:spcPts val="1417"/>
-              </a:spcBef>
-              <a:buNone/>
-            </a:pPr>
-            <a:endParaRPr b="0" lang="en-US" sz="1800" spc="9" strike="noStrike">
-              <a:solidFill>
-                <a:srgbClr val="000000"/>
-              </a:solidFill>
-              <a:latin typeface="Century Schoolbook"/>
+            <a:endParaRPr b="0" lang="ru-RU" sz="3200" spc="-1" strike="noStrike">
+              <a:latin typeface="Arial"/>
             </a:endParaRPr>
           </a:p>
         </p:txBody>
@@ -239,20 +227,8 @@
             <a:normAutofit/>
           </a:bodyPr>
           <a:p>
-            <a:pPr>
-              <a:lnSpc>
-                <a:spcPct val="95000"/>
-              </a:lnSpc>
-              <a:spcBef>
-                <a:spcPts val="1417"/>
-              </a:spcBef>
-              <a:buNone/>
-            </a:pPr>
-            <a:endParaRPr b="0" lang="en-US" sz="1800" spc="9" strike="noStrike">
-              <a:solidFill>
-                <a:srgbClr val="000000"/>
-              </a:solidFill>
-              <a:latin typeface="Century Schoolbook"/>
+            <a:endParaRPr b="0" lang="ru-RU" sz="3200" spc="-1" strike="noStrike">
+              <a:latin typeface="Arial"/>
             </a:endParaRPr>
           </a:p>
         </p:txBody>
@@ -264,7 +240,7 @@
             <a:spLocks noGrp="1"/>
           </p:cNvSpPr>
           <p:nvPr>
-            <p:ph type="ftr" idx="2"/>
+            <p:ph type="ftr" idx="1"/>
           </p:nvPr>
         </p:nvSpPr>
         <p:spPr/>
@@ -284,14 +260,14 @@
             <a:spLocks noGrp="1"/>
           </p:cNvSpPr>
           <p:nvPr>
-            <p:ph type="sldNum" idx="3"/>
+            <p:ph type="sldNum" idx="2"/>
           </p:nvPr>
         </p:nvSpPr>
         <p:spPr/>
         <p:txBody>
           <a:bodyPr/>
           <a:p>
-            <a:fld id="{5CBD3304-95D2-4992-8FD8-2E95955147E2}" type="slidenum">
+            <a:fld id="{A7C6D4D4-6FF7-46CB-B0B6-59A3B1116624}" type="slidenum">
               <a:t>&lt;#&gt;</a:t>
             </a:fld>
           </a:p>
@@ -304,7 +280,7 @@
             <a:spLocks noGrp="1"/>
           </p:cNvSpPr>
           <p:nvPr>
-            <p:ph type="dt" idx="1"/>
+            <p:ph type="dt" idx="3"/>
           </p:nvPr>
         </p:nvSpPr>
         <p:spPr/>
@@ -352,8 +328,8 @@
         </p:nvSpPr>
         <p:spPr>
           <a:xfrm>
-            <a:off x="609480" y="273600"/>
-            <a:ext cx="10972440" cy="1144800"/>
+            <a:off x="609480" y="221040"/>
+            <a:ext cx="10972440" cy="1250280"/>
           </a:xfrm>
           <a:prstGeom prst="rect">
             <a:avLst/>
@@ -368,11 +344,11 @@
             <a:noAutofit/>
           </a:bodyPr>
           <a:p>
-            <a:endParaRPr b="0" lang="en-US" sz="1800" spc="-1" strike="noStrike">
-              <a:solidFill>
-                <a:srgbClr val="000000"/>
-              </a:solidFill>
-              <a:latin typeface="Century Schoolbook"/>
+            <a:pPr algn="ctr">
+              <a:buNone/>
+            </a:pPr>
+            <a:endParaRPr b="0" lang="ru-RU" sz="4400" spc="-1" strike="noStrike">
+              <a:latin typeface="Arial"/>
             </a:endParaRPr>
           </a:p>
         </p:txBody>
@@ -405,20 +381,8 @@
             <a:normAutofit/>
           </a:bodyPr>
           <a:p>
-            <a:pPr>
-              <a:lnSpc>
-                <a:spcPct val="95000"/>
-              </a:lnSpc>
-              <a:spcBef>
-                <a:spcPts val="1417"/>
-              </a:spcBef>
-              <a:buNone/>
-            </a:pPr>
-            <a:endParaRPr b="0" lang="en-US" sz="1800" spc="9" strike="noStrike">
-              <a:solidFill>
-                <a:srgbClr val="000000"/>
-              </a:solidFill>
-              <a:latin typeface="Century Schoolbook"/>
+            <a:endParaRPr b="0" lang="ru-RU" sz="3200" spc="-1" strike="noStrike">
+              <a:latin typeface="Arial"/>
             </a:endParaRPr>
           </a:p>
         </p:txBody>
@@ -451,20 +415,8 @@
             <a:normAutofit/>
           </a:bodyPr>
           <a:p>
-            <a:pPr>
-              <a:lnSpc>
-                <a:spcPct val="95000"/>
-              </a:lnSpc>
-              <a:spcBef>
-                <a:spcPts val="1417"/>
-              </a:spcBef>
-              <a:buNone/>
-            </a:pPr>
-            <a:endParaRPr b="0" lang="en-US" sz="1800" spc="9" strike="noStrike">
-              <a:solidFill>
-                <a:srgbClr val="000000"/>
-              </a:solidFill>
-              <a:latin typeface="Century Schoolbook"/>
+            <a:endParaRPr b="0" lang="ru-RU" sz="3200" spc="-1" strike="noStrike">
+              <a:latin typeface="Arial"/>
             </a:endParaRPr>
           </a:p>
         </p:txBody>
@@ -497,20 +449,8 @@
             <a:normAutofit/>
           </a:bodyPr>
           <a:p>
-            <a:pPr>
-              <a:lnSpc>
-                <a:spcPct val="95000"/>
-              </a:lnSpc>
-              <a:spcBef>
-                <a:spcPts val="1417"/>
-              </a:spcBef>
-              <a:buNone/>
-            </a:pPr>
-            <a:endParaRPr b="0" lang="en-US" sz="1800" spc="9" strike="noStrike">
-              <a:solidFill>
-                <a:srgbClr val="000000"/>
-              </a:solidFill>
-              <a:latin typeface="Century Schoolbook"/>
+            <a:endParaRPr b="0" lang="ru-RU" sz="3200" spc="-1" strike="noStrike">
+              <a:latin typeface="Arial"/>
             </a:endParaRPr>
           </a:p>
         </p:txBody>
@@ -543,20 +483,8 @@
             <a:normAutofit/>
           </a:bodyPr>
           <a:p>
-            <a:pPr>
-              <a:lnSpc>
-                <a:spcPct val="95000"/>
-              </a:lnSpc>
-              <a:spcBef>
-                <a:spcPts val="1417"/>
-              </a:spcBef>
-              <a:buNone/>
-            </a:pPr>
-            <a:endParaRPr b="0" lang="en-US" sz="1800" spc="9" strike="noStrike">
-              <a:solidFill>
-                <a:srgbClr val="000000"/>
-              </a:solidFill>
-              <a:latin typeface="Century Schoolbook"/>
+            <a:endParaRPr b="0" lang="ru-RU" sz="3200" spc="-1" strike="noStrike">
+              <a:latin typeface="Arial"/>
             </a:endParaRPr>
           </a:p>
         </p:txBody>
@@ -568,7 +496,7 @@
             <a:spLocks noGrp="1"/>
           </p:cNvSpPr>
           <p:nvPr>
-            <p:ph type="ftr" idx="2"/>
+            <p:ph type="ftr" idx="1"/>
           </p:nvPr>
         </p:nvSpPr>
         <p:spPr/>
@@ -588,14 +516,14 @@
             <a:spLocks noGrp="1"/>
           </p:cNvSpPr>
           <p:nvPr>
-            <p:ph type="sldNum" idx="3"/>
+            <p:ph type="sldNum" idx="2"/>
           </p:nvPr>
         </p:nvSpPr>
         <p:spPr/>
         <p:txBody>
           <a:bodyPr/>
           <a:p>
-            <a:fld id="{2E3FB46B-C546-4FC2-BF11-AFC6D64F5BD8}" type="slidenum">
+            <a:fld id="{348B03A9-F854-4679-B730-84285F0624AD}" type="slidenum">
               <a:t>&lt;#&gt;</a:t>
             </a:fld>
           </a:p>
@@ -608,7 +536,7 @@
             <a:spLocks noGrp="1"/>
           </p:cNvSpPr>
           <p:nvPr>
-            <p:ph type="dt" idx="1"/>
+            <p:ph type="dt" idx="3"/>
           </p:nvPr>
         </p:nvSpPr>
         <p:spPr/>
@@ -656,8 +584,8 @@
         </p:nvSpPr>
         <p:spPr>
           <a:xfrm>
-            <a:off x="609480" y="273600"/>
-            <a:ext cx="10972440" cy="1144800"/>
+            <a:off x="609480" y="221040"/>
+            <a:ext cx="10972440" cy="1250280"/>
           </a:xfrm>
           <a:prstGeom prst="rect">
             <a:avLst/>
@@ -672,11 +600,11 @@
             <a:noAutofit/>
           </a:bodyPr>
           <a:p>
-            <a:endParaRPr b="0" lang="en-US" sz="1800" spc="-1" strike="noStrike">
-              <a:solidFill>
-                <a:srgbClr val="000000"/>
-              </a:solidFill>
-              <a:latin typeface="Century Schoolbook"/>
+            <a:pPr algn="ctr">
+              <a:buNone/>
+            </a:pPr>
+            <a:endParaRPr b="0" lang="ru-RU" sz="4400" spc="-1" strike="noStrike">
+              <a:latin typeface="Arial"/>
             </a:endParaRPr>
           </a:p>
         </p:txBody>
@@ -706,23 +634,11 @@
         </p:spPr>
         <p:txBody>
           <a:bodyPr lIns="0" rIns="0" tIns="0" bIns="0" anchor="t">
-            <a:normAutofit/>
-          </a:bodyPr>
-          <a:p>
-            <a:pPr>
-              <a:lnSpc>
-                <a:spcPct val="95000"/>
-              </a:lnSpc>
-              <a:spcBef>
-                <a:spcPts val="1417"/>
-              </a:spcBef>
-              <a:buNone/>
-            </a:pPr>
-            <a:endParaRPr b="0" lang="en-US" sz="1800" spc="9" strike="noStrike">
-              <a:solidFill>
-                <a:srgbClr val="000000"/>
-              </a:solidFill>
-              <a:latin typeface="Century Schoolbook"/>
+            <a:normAutofit fontScale="91000"/>
+          </a:bodyPr>
+          <a:p>
+            <a:endParaRPr b="0" lang="ru-RU" sz="3200" spc="-1" strike="noStrike">
+              <a:latin typeface="Arial"/>
             </a:endParaRPr>
           </a:p>
         </p:txBody>
@@ -752,23 +668,11 @@
         </p:spPr>
         <p:txBody>
           <a:bodyPr lIns="0" rIns="0" tIns="0" bIns="0" anchor="t">
-            <a:normAutofit/>
-          </a:bodyPr>
-          <a:p>
-            <a:pPr>
-              <a:lnSpc>
-                <a:spcPct val="95000"/>
-              </a:lnSpc>
-              <a:spcBef>
-                <a:spcPts val="1417"/>
-              </a:spcBef>
-              <a:buNone/>
-            </a:pPr>
-            <a:endParaRPr b="0" lang="en-US" sz="1800" spc="9" strike="noStrike">
-              <a:solidFill>
-                <a:srgbClr val="000000"/>
-              </a:solidFill>
-              <a:latin typeface="Century Schoolbook"/>
+            <a:normAutofit fontScale="91000"/>
+          </a:bodyPr>
+          <a:p>
+            <a:endParaRPr b="0" lang="ru-RU" sz="3200" spc="-1" strike="noStrike">
+              <a:latin typeface="Arial"/>
             </a:endParaRPr>
           </a:p>
         </p:txBody>
@@ -798,23 +702,11 @@
         </p:spPr>
         <p:txBody>
           <a:bodyPr lIns="0" rIns="0" tIns="0" bIns="0" anchor="t">
-            <a:normAutofit/>
-          </a:bodyPr>
-          <a:p>
-            <a:pPr>
-              <a:lnSpc>
-                <a:spcPct val="95000"/>
-              </a:lnSpc>
-              <a:spcBef>
-                <a:spcPts val="1417"/>
-              </a:spcBef>
-              <a:buNone/>
-            </a:pPr>
-            <a:endParaRPr b="0" lang="en-US" sz="1800" spc="9" strike="noStrike">
-              <a:solidFill>
-                <a:srgbClr val="000000"/>
-              </a:solidFill>
-              <a:latin typeface="Century Schoolbook"/>
+            <a:normAutofit fontScale="91000"/>
+          </a:bodyPr>
+          <a:p>
+            <a:endParaRPr b="0" lang="ru-RU" sz="3200" spc="-1" strike="noStrike">
+              <a:latin typeface="Arial"/>
             </a:endParaRPr>
           </a:p>
         </p:txBody>
@@ -844,23 +736,11 @@
         </p:spPr>
         <p:txBody>
           <a:bodyPr lIns="0" rIns="0" tIns="0" bIns="0" anchor="t">
-            <a:normAutofit/>
-          </a:bodyPr>
-          <a:p>
-            <a:pPr>
-              <a:lnSpc>
-                <a:spcPct val="95000"/>
-              </a:lnSpc>
-              <a:spcBef>
-                <a:spcPts val="1417"/>
-              </a:spcBef>
-              <a:buNone/>
-            </a:pPr>
-            <a:endParaRPr b="0" lang="en-US" sz="1800" spc="9" strike="noStrike">
-              <a:solidFill>
-                <a:srgbClr val="000000"/>
-              </a:solidFill>
-              <a:latin typeface="Century Schoolbook"/>
+            <a:normAutofit fontScale="91000"/>
+          </a:bodyPr>
+          <a:p>
+            <a:endParaRPr b="0" lang="ru-RU" sz="3200" spc="-1" strike="noStrike">
+              <a:latin typeface="Arial"/>
             </a:endParaRPr>
           </a:p>
         </p:txBody>
@@ -890,23 +770,11 @@
         </p:spPr>
         <p:txBody>
           <a:bodyPr lIns="0" rIns="0" tIns="0" bIns="0" anchor="t">
-            <a:normAutofit/>
-          </a:bodyPr>
-          <a:p>
-            <a:pPr>
-              <a:lnSpc>
-                <a:spcPct val="95000"/>
-              </a:lnSpc>
-              <a:spcBef>
-                <a:spcPts val="1417"/>
-              </a:spcBef>
-              <a:buNone/>
-            </a:pPr>
-            <a:endParaRPr b="0" lang="en-US" sz="1800" spc="9" strike="noStrike">
-              <a:solidFill>
-                <a:srgbClr val="000000"/>
-              </a:solidFill>
-              <a:latin typeface="Century Schoolbook"/>
+            <a:normAutofit fontScale="91000"/>
+          </a:bodyPr>
+          <a:p>
+            <a:endParaRPr b="0" lang="ru-RU" sz="3200" spc="-1" strike="noStrike">
+              <a:latin typeface="Arial"/>
             </a:endParaRPr>
           </a:p>
         </p:txBody>
@@ -936,23 +804,11 @@
         </p:spPr>
         <p:txBody>
           <a:bodyPr lIns="0" rIns="0" tIns="0" bIns="0" anchor="t">
-            <a:normAutofit/>
-          </a:bodyPr>
-          <a:p>
-            <a:pPr>
-              <a:lnSpc>
-                <a:spcPct val="95000"/>
-              </a:lnSpc>
-              <a:spcBef>
-                <a:spcPts val="1417"/>
-              </a:spcBef>
-              <a:buNone/>
-            </a:pPr>
-            <a:endParaRPr b="0" lang="en-US" sz="1800" spc="9" strike="noStrike">
-              <a:solidFill>
-                <a:srgbClr val="000000"/>
-              </a:solidFill>
-              <a:latin typeface="Century Schoolbook"/>
+            <a:normAutofit fontScale="91000"/>
+          </a:bodyPr>
+          <a:p>
+            <a:endParaRPr b="0" lang="ru-RU" sz="3200" spc="-1" strike="noStrike">
+              <a:latin typeface="Arial"/>
             </a:endParaRPr>
           </a:p>
         </p:txBody>
@@ -964,7 +820,7 @@
             <a:spLocks noGrp="1"/>
           </p:cNvSpPr>
           <p:nvPr>
-            <p:ph type="ftr" idx="2"/>
+            <p:ph type="ftr" idx="1"/>
           </p:nvPr>
         </p:nvSpPr>
         <p:spPr/>
@@ -984,14 +840,14 @@
             <a:spLocks noGrp="1"/>
           </p:cNvSpPr>
           <p:nvPr>
-            <p:ph type="sldNum" idx="3"/>
+            <p:ph type="sldNum" idx="2"/>
           </p:nvPr>
         </p:nvSpPr>
         <p:spPr/>
         <p:txBody>
           <a:bodyPr/>
           <a:p>
-            <a:fld id="{C5A8DDE3-18DF-42F7-A00F-BEE953387D2B}" type="slidenum">
+            <a:fld id="{58C31259-DBF0-4046-9F6B-3C8BA0E39409}" type="slidenum">
               <a:t>&lt;#&gt;</a:t>
             </a:fld>
           </a:p>
@@ -1004,7 +860,7 @@
             <a:spLocks noGrp="1"/>
           </p:cNvSpPr>
           <p:nvPr>
-            <p:ph type="dt" idx="1"/>
+            <p:ph type="dt" idx="3"/>
           </p:nvPr>
         </p:nvSpPr>
         <p:spPr/>
@@ -1047,7 +903,7 @@
             <a:spLocks noGrp="1"/>
           </p:cNvSpPr>
           <p:nvPr>
-            <p:ph type="ftr" idx="5"/>
+            <p:ph type="ftr" idx="4"/>
           </p:nvPr>
         </p:nvSpPr>
         <p:spPr/>
@@ -1067,14 +923,14 @@
             <a:spLocks noGrp="1"/>
           </p:cNvSpPr>
           <p:nvPr>
-            <p:ph type="sldNum" idx="6"/>
+            <p:ph type="sldNum" idx="5"/>
           </p:nvPr>
         </p:nvSpPr>
         <p:spPr/>
         <p:txBody>
           <a:bodyPr/>
           <a:p>
-            <a:fld id="{C66E5297-33BF-4FD4-8D8F-90951A67F923}" type="slidenum">
+            <a:fld id="{68671FB2-6175-4D1B-83EC-B8F074126439}" type="slidenum">
               <a:t>&lt;#&gt;</a:t>
             </a:fld>
           </a:p>
@@ -1087,7 +943,7 @@
             <a:spLocks noGrp="1"/>
           </p:cNvSpPr>
           <p:nvPr>
-            <p:ph type="dt" idx="4"/>
+            <p:ph type="dt" idx="6"/>
           </p:nvPr>
         </p:nvSpPr>
         <p:spPr/>
@@ -1135,8 +991,8 @@
         </p:nvSpPr>
         <p:spPr>
           <a:xfrm>
-            <a:off x="609480" y="273600"/>
-            <a:ext cx="10972440" cy="1144800"/>
+            <a:off x="609480" y="221040"/>
+            <a:ext cx="10972440" cy="1250280"/>
           </a:xfrm>
           <a:prstGeom prst="rect">
             <a:avLst/>
@@ -1151,11 +1007,11 @@
             <a:noAutofit/>
           </a:bodyPr>
           <a:p>
-            <a:endParaRPr b="0" lang="en-US" sz="1800" spc="-1" strike="noStrike">
-              <a:solidFill>
-                <a:srgbClr val="000000"/>
-              </a:solidFill>
-              <a:latin typeface="Century Schoolbook"/>
+            <a:pPr algn="ctr">
+              <a:buNone/>
+            </a:pPr>
+            <a:endParaRPr b="0" lang="ru-RU" sz="4400" spc="-1" strike="noStrike">
+              <a:latin typeface="Arial"/>
             </a:endParaRPr>
           </a:p>
         </p:txBody>
@@ -1204,7 +1060,7 @@
             <a:spLocks noGrp="1"/>
           </p:cNvSpPr>
           <p:nvPr>
-            <p:ph type="ftr" idx="5"/>
+            <p:ph type="ftr" idx="4"/>
           </p:nvPr>
         </p:nvSpPr>
         <p:spPr/>
@@ -1224,14 +1080,14 @@
             <a:spLocks noGrp="1"/>
           </p:cNvSpPr>
           <p:nvPr>
-            <p:ph type="sldNum" idx="6"/>
+            <p:ph type="sldNum" idx="5"/>
           </p:nvPr>
         </p:nvSpPr>
         <p:spPr/>
         <p:txBody>
           <a:bodyPr/>
           <a:p>
-            <a:fld id="{9D9B2B8F-0EB4-401B-9BC1-0BBE319B4B7D}" type="slidenum">
+            <a:fld id="{B66BA5BD-73FF-4D6E-B384-9464EF04E42B}" type="slidenum">
               <a:t>&lt;#&gt;</a:t>
             </a:fld>
           </a:p>
@@ -1244,7 +1100,7 @@
             <a:spLocks noGrp="1"/>
           </p:cNvSpPr>
           <p:nvPr>
-            <p:ph type="dt" idx="4"/>
+            <p:ph type="dt" idx="6"/>
           </p:nvPr>
         </p:nvSpPr>
         <p:spPr/>
@@ -1292,8 +1148,8 @@
         </p:nvSpPr>
         <p:spPr>
           <a:xfrm>
-            <a:off x="609480" y="273600"/>
-            <a:ext cx="10972440" cy="1144800"/>
+            <a:off x="609480" y="221040"/>
+            <a:ext cx="10972440" cy="1250280"/>
           </a:xfrm>
           <a:prstGeom prst="rect">
             <a:avLst/>
@@ -1308,11 +1164,11 @@
             <a:noAutofit/>
           </a:bodyPr>
           <a:p>
-            <a:endParaRPr b="0" lang="en-US" sz="1800" spc="-1" strike="noStrike">
-              <a:solidFill>
-                <a:srgbClr val="000000"/>
-              </a:solidFill>
-              <a:latin typeface="Century Schoolbook"/>
+            <a:pPr algn="ctr">
+              <a:buNone/>
+            </a:pPr>
+            <a:endParaRPr b="0" lang="ru-RU" sz="4400" spc="-1" strike="noStrike">
+              <a:latin typeface="Arial"/>
             </a:endParaRPr>
           </a:p>
         </p:txBody>
@@ -1345,20 +1201,8 @@
             <a:normAutofit/>
           </a:bodyPr>
           <a:p>
-            <a:pPr>
-              <a:lnSpc>
-                <a:spcPct val="95000"/>
-              </a:lnSpc>
-              <a:spcBef>
-                <a:spcPts val="1417"/>
-              </a:spcBef>
-              <a:buNone/>
-            </a:pPr>
-            <a:endParaRPr b="0" lang="en-US" sz="1800" spc="9" strike="noStrike">
-              <a:solidFill>
-                <a:srgbClr val="000000"/>
-              </a:solidFill>
-              <a:latin typeface="Century Schoolbook"/>
+            <a:endParaRPr b="0" lang="ru-RU" sz="3200" spc="-1" strike="noStrike">
+              <a:latin typeface="Arial"/>
             </a:endParaRPr>
           </a:p>
         </p:txBody>
@@ -1370,7 +1214,7 @@
             <a:spLocks noGrp="1"/>
           </p:cNvSpPr>
           <p:nvPr>
-            <p:ph type="ftr" idx="5"/>
+            <p:ph type="ftr" idx="4"/>
           </p:nvPr>
         </p:nvSpPr>
         <p:spPr/>
@@ -1390,14 +1234,14 @@
             <a:spLocks noGrp="1"/>
           </p:cNvSpPr>
           <p:nvPr>
-            <p:ph type="sldNum" idx="6"/>
+            <p:ph type="sldNum" idx="5"/>
           </p:nvPr>
         </p:nvSpPr>
         <p:spPr/>
         <p:txBody>
           <a:bodyPr/>
           <a:p>
-            <a:fld id="{0F7DBA2F-6014-4B8C-AFED-91088FBD66F7}" type="slidenum">
+            <a:fld id="{1EB8E2B8-A001-4593-81D5-8EB3C4E7D46E}" type="slidenum">
               <a:t>&lt;#&gt;</a:t>
             </a:fld>
           </a:p>
@@ -1410,7 +1254,7 @@
             <a:spLocks noGrp="1"/>
           </p:cNvSpPr>
           <p:nvPr>
-            <p:ph type="dt" idx="4"/>
+            <p:ph type="dt" idx="6"/>
           </p:nvPr>
         </p:nvSpPr>
         <p:spPr/>
@@ -1458,8 +1302,8 @@
         </p:nvSpPr>
         <p:spPr>
           <a:xfrm>
-            <a:off x="609480" y="273600"/>
-            <a:ext cx="10972440" cy="1144800"/>
+            <a:off x="609480" y="221040"/>
+            <a:ext cx="10972440" cy="1250280"/>
           </a:xfrm>
           <a:prstGeom prst="rect">
             <a:avLst/>
@@ -1474,11 +1318,11 @@
             <a:noAutofit/>
           </a:bodyPr>
           <a:p>
-            <a:endParaRPr b="0" lang="en-US" sz="1800" spc="-1" strike="noStrike">
-              <a:solidFill>
-                <a:srgbClr val="000000"/>
-              </a:solidFill>
-              <a:latin typeface="Century Schoolbook"/>
+            <a:pPr algn="ctr">
+              <a:buNone/>
+            </a:pPr>
+            <a:endParaRPr b="0" lang="ru-RU" sz="4400" spc="-1" strike="noStrike">
+              <a:latin typeface="Arial"/>
             </a:endParaRPr>
           </a:p>
         </p:txBody>
@@ -1511,20 +1355,8 @@
             <a:normAutofit/>
           </a:bodyPr>
           <a:p>
-            <a:pPr>
-              <a:lnSpc>
-                <a:spcPct val="95000"/>
-              </a:lnSpc>
-              <a:spcBef>
-                <a:spcPts val="1417"/>
-              </a:spcBef>
-              <a:buNone/>
-            </a:pPr>
-            <a:endParaRPr b="0" lang="en-US" sz="1800" spc="9" strike="noStrike">
-              <a:solidFill>
-                <a:srgbClr val="000000"/>
-              </a:solidFill>
-              <a:latin typeface="Century Schoolbook"/>
+            <a:endParaRPr b="0" lang="ru-RU" sz="3200" spc="-1" strike="noStrike">
+              <a:latin typeface="Arial"/>
             </a:endParaRPr>
           </a:p>
         </p:txBody>
@@ -1557,20 +1389,8 @@
             <a:normAutofit/>
           </a:bodyPr>
           <a:p>
-            <a:pPr>
-              <a:lnSpc>
-                <a:spcPct val="95000"/>
-              </a:lnSpc>
-              <a:spcBef>
-                <a:spcPts val="1417"/>
-              </a:spcBef>
-              <a:buNone/>
-            </a:pPr>
-            <a:endParaRPr b="0" lang="en-US" sz="1800" spc="9" strike="noStrike">
-              <a:solidFill>
-                <a:srgbClr val="000000"/>
-              </a:solidFill>
-              <a:latin typeface="Century Schoolbook"/>
+            <a:endParaRPr b="0" lang="ru-RU" sz="3200" spc="-1" strike="noStrike">
+              <a:latin typeface="Arial"/>
             </a:endParaRPr>
           </a:p>
         </p:txBody>
@@ -1582,7 +1402,7 @@
             <a:spLocks noGrp="1"/>
           </p:cNvSpPr>
           <p:nvPr>
-            <p:ph type="ftr" idx="5"/>
+            <p:ph type="ftr" idx="4"/>
           </p:nvPr>
         </p:nvSpPr>
         <p:spPr/>
@@ -1602,14 +1422,14 @@
             <a:spLocks noGrp="1"/>
           </p:cNvSpPr>
           <p:nvPr>
-            <p:ph type="sldNum" idx="6"/>
+            <p:ph type="sldNum" idx="5"/>
           </p:nvPr>
         </p:nvSpPr>
         <p:spPr/>
         <p:txBody>
           <a:bodyPr/>
           <a:p>
-            <a:fld id="{B83FCA5F-4A01-4EDF-B31B-05924476D3B3}" type="slidenum">
+            <a:fld id="{952CB469-A425-404C-AB07-2297E2D9296E}" type="slidenum">
               <a:t>&lt;#&gt;</a:t>
             </a:fld>
           </a:p>
@@ -1622,7 +1442,7 @@
             <a:spLocks noGrp="1"/>
           </p:cNvSpPr>
           <p:nvPr>
-            <p:ph type="dt" idx="4"/>
+            <p:ph type="dt" idx="6"/>
           </p:nvPr>
         </p:nvSpPr>
         <p:spPr/>
@@ -1670,8 +1490,8 @@
         </p:nvSpPr>
         <p:spPr>
           <a:xfrm>
-            <a:off x="609480" y="273600"/>
-            <a:ext cx="10972440" cy="1144800"/>
+            <a:off x="609480" y="221040"/>
+            <a:ext cx="10972440" cy="1250280"/>
           </a:xfrm>
           <a:prstGeom prst="rect">
             <a:avLst/>
@@ -1686,11 +1506,11 @@
             <a:noAutofit/>
           </a:bodyPr>
           <a:p>
-            <a:endParaRPr b="0" lang="en-US" sz="1800" spc="-1" strike="noStrike">
-              <a:solidFill>
-                <a:srgbClr val="000000"/>
-              </a:solidFill>
-              <a:latin typeface="Century Schoolbook"/>
+            <a:pPr algn="ctr">
+              <a:buNone/>
+            </a:pPr>
+            <a:endParaRPr b="0" lang="ru-RU" sz="4400" spc="-1" strike="noStrike">
+              <a:latin typeface="Arial"/>
             </a:endParaRPr>
           </a:p>
         </p:txBody>
@@ -1702,7 +1522,7 @@
             <a:spLocks noGrp="1"/>
           </p:cNvSpPr>
           <p:nvPr>
-            <p:ph type="ftr" idx="5"/>
+            <p:ph type="ftr" idx="4"/>
           </p:nvPr>
         </p:nvSpPr>
         <p:spPr/>
@@ -1722,14 +1542,14 @@
             <a:spLocks noGrp="1"/>
           </p:cNvSpPr>
           <p:nvPr>
-            <p:ph type="sldNum" idx="6"/>
+            <p:ph type="sldNum" idx="5"/>
           </p:nvPr>
         </p:nvSpPr>
         <p:spPr/>
         <p:txBody>
           <a:bodyPr/>
           <a:p>
-            <a:fld id="{79768C45-B3E3-42D9-8813-DF21F1145C7C}" type="slidenum">
+            <a:fld id="{37591300-7F52-47AA-AC5F-06FB9FC985AC}" type="slidenum">
               <a:t>&lt;#&gt;</a:t>
             </a:fld>
           </a:p>
@@ -1742,7 +1562,7 @@
             <a:spLocks noGrp="1"/>
           </p:cNvSpPr>
           <p:nvPr>
-            <p:ph type="dt" idx="4"/>
+            <p:ph type="dt" idx="6"/>
           </p:nvPr>
         </p:nvSpPr>
         <p:spPr/>
@@ -1822,7 +1642,7 @@
             <a:spLocks noGrp="1"/>
           </p:cNvSpPr>
           <p:nvPr>
-            <p:ph type="ftr" idx="5"/>
+            <p:ph type="ftr" idx="4"/>
           </p:nvPr>
         </p:nvSpPr>
         <p:spPr/>
@@ -1842,14 +1662,14 @@
             <a:spLocks noGrp="1"/>
           </p:cNvSpPr>
           <p:nvPr>
-            <p:ph type="sldNum" idx="6"/>
+            <p:ph type="sldNum" idx="5"/>
           </p:nvPr>
         </p:nvSpPr>
         <p:spPr/>
         <p:txBody>
           <a:bodyPr/>
           <a:p>
-            <a:fld id="{6F89394B-235D-4CCE-A641-148A41DF9F70}" type="slidenum">
+            <a:fld id="{31FB64EB-431D-42C7-B1D4-F38D5E2ABBC9}" type="slidenum">
               <a:t>&lt;#&gt;</a:t>
             </a:fld>
           </a:p>
@@ -1862,7 +1682,7 @@
             <a:spLocks noGrp="1"/>
           </p:cNvSpPr>
           <p:nvPr>
-            <p:ph type="dt" idx="4"/>
+            <p:ph type="dt" idx="6"/>
           </p:nvPr>
         </p:nvSpPr>
         <p:spPr/>
@@ -1910,8 +1730,8 @@
         </p:nvSpPr>
         <p:spPr>
           <a:xfrm>
-            <a:off x="609480" y="273600"/>
-            <a:ext cx="10972440" cy="1144800"/>
+            <a:off x="609480" y="221040"/>
+            <a:ext cx="10972440" cy="1250280"/>
           </a:xfrm>
           <a:prstGeom prst="rect">
             <a:avLst/>
@@ -1926,11 +1746,11 @@
             <a:noAutofit/>
           </a:bodyPr>
           <a:p>
-            <a:endParaRPr b="0" lang="en-US" sz="1800" spc="-1" strike="noStrike">
-              <a:solidFill>
-                <a:srgbClr val="000000"/>
-              </a:solidFill>
-              <a:latin typeface="Century Schoolbook"/>
+            <a:pPr algn="ctr">
+              <a:buNone/>
+            </a:pPr>
+            <a:endParaRPr b="0" lang="ru-RU" sz="4400" spc="-1" strike="noStrike">
+              <a:latin typeface="Arial"/>
             </a:endParaRPr>
           </a:p>
         </p:txBody>
@@ -1963,20 +1783,8 @@
             <a:normAutofit/>
           </a:bodyPr>
           <a:p>
-            <a:pPr>
-              <a:lnSpc>
-                <a:spcPct val="95000"/>
-              </a:lnSpc>
-              <a:spcBef>
-                <a:spcPts val="1417"/>
-              </a:spcBef>
-              <a:buNone/>
-            </a:pPr>
-            <a:endParaRPr b="0" lang="en-US" sz="1800" spc="9" strike="noStrike">
-              <a:solidFill>
-                <a:srgbClr val="000000"/>
-              </a:solidFill>
-              <a:latin typeface="Century Schoolbook"/>
+            <a:endParaRPr b="0" lang="ru-RU" sz="3200" spc="-1" strike="noStrike">
+              <a:latin typeface="Arial"/>
             </a:endParaRPr>
           </a:p>
         </p:txBody>
@@ -2009,20 +1817,8 @@
             <a:normAutofit/>
           </a:bodyPr>
           <a:p>
-            <a:pPr>
-              <a:lnSpc>
-                <a:spcPct val="95000"/>
-              </a:lnSpc>
-              <a:spcBef>
-                <a:spcPts val="1417"/>
-              </a:spcBef>
-              <a:buNone/>
-            </a:pPr>
-            <a:endParaRPr b="0" lang="en-US" sz="1800" spc="9" strike="noStrike">
-              <a:solidFill>
-                <a:srgbClr val="000000"/>
-              </a:solidFill>
-              <a:latin typeface="Century Schoolbook"/>
+            <a:endParaRPr b="0" lang="ru-RU" sz="3200" spc="-1" strike="noStrike">
+              <a:latin typeface="Arial"/>
             </a:endParaRPr>
           </a:p>
         </p:txBody>
@@ -2055,20 +1851,8 @@
             <a:normAutofit/>
           </a:bodyPr>
           <a:p>
-            <a:pPr>
-              <a:lnSpc>
-                <a:spcPct val="95000"/>
-              </a:lnSpc>
-              <a:spcBef>
-                <a:spcPts val="1417"/>
-              </a:spcBef>
-              <a:buNone/>
-            </a:pPr>
-            <a:endParaRPr b="0" lang="en-US" sz="1800" spc="9" strike="noStrike">
-              <a:solidFill>
-                <a:srgbClr val="000000"/>
-              </a:solidFill>
-              <a:latin typeface="Century Schoolbook"/>
+            <a:endParaRPr b="0" lang="ru-RU" sz="3200" spc="-1" strike="noStrike">
+              <a:latin typeface="Arial"/>
             </a:endParaRPr>
           </a:p>
         </p:txBody>
@@ -2080,7 +1864,7 @@
             <a:spLocks noGrp="1"/>
           </p:cNvSpPr>
           <p:nvPr>
-            <p:ph type="ftr" idx="5"/>
+            <p:ph type="ftr" idx="4"/>
           </p:nvPr>
         </p:nvSpPr>
         <p:spPr/>
@@ -2100,14 +1884,14 @@
             <a:spLocks noGrp="1"/>
           </p:cNvSpPr>
           <p:nvPr>
-            <p:ph type="sldNum" idx="6"/>
+            <p:ph type="sldNum" idx="5"/>
           </p:nvPr>
         </p:nvSpPr>
         <p:spPr/>
         <p:txBody>
           <a:bodyPr/>
           <a:p>
-            <a:fld id="{CB3D3E6E-7E47-40FD-91CD-515BF00BC0C2}" type="slidenum">
+            <a:fld id="{EBF5F3C5-1A6D-4C3B-B70F-7D90E533C82A}" type="slidenum">
               <a:t>&lt;#&gt;</a:t>
             </a:fld>
           </a:p>
@@ -2120,7 +1904,7 @@
             <a:spLocks noGrp="1"/>
           </p:cNvSpPr>
           <p:nvPr>
-            <p:ph type="dt" idx="4"/>
+            <p:ph type="dt" idx="6"/>
           </p:nvPr>
         </p:nvSpPr>
         <p:spPr/>
@@ -2168,8 +1952,8 @@
         </p:nvSpPr>
         <p:spPr>
           <a:xfrm>
-            <a:off x="609480" y="273600"/>
-            <a:ext cx="10972440" cy="1144800"/>
+            <a:off x="609480" y="221040"/>
+            <a:ext cx="10972440" cy="1250280"/>
           </a:xfrm>
           <a:prstGeom prst="rect">
             <a:avLst/>
@@ -2184,11 +1968,11 @@
             <a:noAutofit/>
           </a:bodyPr>
           <a:p>
-            <a:endParaRPr b="0" lang="en-US" sz="1800" spc="-1" strike="noStrike">
-              <a:solidFill>
-                <a:srgbClr val="000000"/>
-              </a:solidFill>
-              <a:latin typeface="Century Schoolbook"/>
+            <a:pPr algn="ctr">
+              <a:buNone/>
+            </a:pPr>
+            <a:endParaRPr b="0" lang="ru-RU" sz="4400" spc="-1" strike="noStrike">
+              <a:latin typeface="Arial"/>
             </a:endParaRPr>
           </a:p>
         </p:txBody>
@@ -2237,7 +2021,7 @@
             <a:spLocks noGrp="1"/>
           </p:cNvSpPr>
           <p:nvPr>
-            <p:ph type="ftr" idx="2"/>
+            <p:ph type="ftr" idx="1"/>
           </p:nvPr>
         </p:nvSpPr>
         <p:spPr/>
@@ -2257,14 +2041,14 @@
             <a:spLocks noGrp="1"/>
           </p:cNvSpPr>
           <p:nvPr>
-            <p:ph type="sldNum" idx="3"/>
+            <p:ph type="sldNum" idx="2"/>
           </p:nvPr>
         </p:nvSpPr>
         <p:spPr/>
         <p:txBody>
           <a:bodyPr/>
           <a:p>
-            <a:fld id="{7DD64398-F271-4C25-A3D8-A690383AC091}" type="slidenum">
+            <a:fld id="{2A03F177-AC9C-4395-ABA6-022D78428BD8}" type="slidenum">
               <a:t>&lt;#&gt;</a:t>
             </a:fld>
           </a:p>
@@ -2277,7 +2061,7 @@
             <a:spLocks noGrp="1"/>
           </p:cNvSpPr>
           <p:nvPr>
-            <p:ph type="dt" idx="1"/>
+            <p:ph type="dt" idx="3"/>
           </p:nvPr>
         </p:nvSpPr>
         <p:spPr/>
@@ -2325,8 +2109,8 @@
         </p:nvSpPr>
         <p:spPr>
           <a:xfrm>
-            <a:off x="609480" y="273600"/>
-            <a:ext cx="10972440" cy="1144800"/>
+            <a:off x="609480" y="221040"/>
+            <a:ext cx="10972440" cy="1250280"/>
           </a:xfrm>
           <a:prstGeom prst="rect">
             <a:avLst/>
@@ -2341,11 +2125,11 @@
             <a:noAutofit/>
           </a:bodyPr>
           <a:p>
-            <a:endParaRPr b="0" lang="en-US" sz="1800" spc="-1" strike="noStrike">
-              <a:solidFill>
-                <a:srgbClr val="000000"/>
-              </a:solidFill>
-              <a:latin typeface="Century Schoolbook"/>
+            <a:pPr algn="ctr">
+              <a:buNone/>
+            </a:pPr>
+            <a:endParaRPr b="0" lang="ru-RU" sz="4400" spc="-1" strike="noStrike">
+              <a:latin typeface="Arial"/>
             </a:endParaRPr>
           </a:p>
         </p:txBody>
@@ -2378,20 +2162,8 @@
             <a:normAutofit/>
           </a:bodyPr>
           <a:p>
-            <a:pPr>
-              <a:lnSpc>
-                <a:spcPct val="95000"/>
-              </a:lnSpc>
-              <a:spcBef>
-                <a:spcPts val="1417"/>
-              </a:spcBef>
-              <a:buNone/>
-            </a:pPr>
-            <a:endParaRPr b="0" lang="en-US" sz="1800" spc="9" strike="noStrike">
-              <a:solidFill>
-                <a:srgbClr val="000000"/>
-              </a:solidFill>
-              <a:latin typeface="Century Schoolbook"/>
+            <a:endParaRPr b="0" lang="ru-RU" sz="3200" spc="-1" strike="noStrike">
+              <a:latin typeface="Arial"/>
             </a:endParaRPr>
           </a:p>
         </p:txBody>
@@ -2424,20 +2196,8 @@
             <a:normAutofit/>
           </a:bodyPr>
           <a:p>
-            <a:pPr>
-              <a:lnSpc>
-                <a:spcPct val="95000"/>
-              </a:lnSpc>
-              <a:spcBef>
-                <a:spcPts val="1417"/>
-              </a:spcBef>
-              <a:buNone/>
-            </a:pPr>
-            <a:endParaRPr b="0" lang="en-US" sz="1800" spc="9" strike="noStrike">
-              <a:solidFill>
-                <a:srgbClr val="000000"/>
-              </a:solidFill>
-              <a:latin typeface="Century Schoolbook"/>
+            <a:endParaRPr b="0" lang="ru-RU" sz="3200" spc="-1" strike="noStrike">
+              <a:latin typeface="Arial"/>
             </a:endParaRPr>
           </a:p>
         </p:txBody>
@@ -2470,20 +2230,8 @@
             <a:normAutofit/>
           </a:bodyPr>
           <a:p>
-            <a:pPr>
-              <a:lnSpc>
-                <a:spcPct val="95000"/>
-              </a:lnSpc>
-              <a:spcBef>
-                <a:spcPts val="1417"/>
-              </a:spcBef>
-              <a:buNone/>
-            </a:pPr>
-            <a:endParaRPr b="0" lang="en-US" sz="1800" spc="9" strike="noStrike">
-              <a:solidFill>
-                <a:srgbClr val="000000"/>
-              </a:solidFill>
-              <a:latin typeface="Century Schoolbook"/>
+            <a:endParaRPr b="0" lang="ru-RU" sz="3200" spc="-1" strike="noStrike">
+              <a:latin typeface="Arial"/>
             </a:endParaRPr>
           </a:p>
         </p:txBody>
@@ -2495,7 +2243,7 @@
             <a:spLocks noGrp="1"/>
           </p:cNvSpPr>
           <p:nvPr>
-            <p:ph type="ftr" idx="5"/>
+            <p:ph type="ftr" idx="4"/>
           </p:nvPr>
         </p:nvSpPr>
         <p:spPr/>
@@ -2515,14 +2263,14 @@
             <a:spLocks noGrp="1"/>
           </p:cNvSpPr>
           <p:nvPr>
-            <p:ph type="sldNum" idx="6"/>
+            <p:ph type="sldNum" idx="5"/>
           </p:nvPr>
         </p:nvSpPr>
         <p:spPr/>
         <p:txBody>
           <a:bodyPr/>
           <a:p>
-            <a:fld id="{5C4E8669-D9B8-41F0-B04B-67AD5F9E723A}" type="slidenum">
+            <a:fld id="{35CEC2B0-8DF7-49FC-9515-987903D7FE9E}" type="slidenum">
               <a:t>&lt;#&gt;</a:t>
             </a:fld>
           </a:p>
@@ -2535,7 +2283,7 @@
             <a:spLocks noGrp="1"/>
           </p:cNvSpPr>
           <p:nvPr>
-            <p:ph type="dt" idx="4"/>
+            <p:ph type="dt" idx="6"/>
           </p:nvPr>
         </p:nvSpPr>
         <p:spPr/>
@@ -2583,8 +2331,8 @@
         </p:nvSpPr>
         <p:spPr>
           <a:xfrm>
-            <a:off x="609480" y="273600"/>
-            <a:ext cx="10972440" cy="1144800"/>
+            <a:off x="609480" y="221040"/>
+            <a:ext cx="10972440" cy="1250280"/>
           </a:xfrm>
           <a:prstGeom prst="rect">
             <a:avLst/>
@@ -2599,11 +2347,11 @@
             <a:noAutofit/>
           </a:bodyPr>
           <a:p>
-            <a:endParaRPr b="0" lang="en-US" sz="1800" spc="-1" strike="noStrike">
-              <a:solidFill>
-                <a:srgbClr val="000000"/>
-              </a:solidFill>
-              <a:latin typeface="Century Schoolbook"/>
+            <a:pPr algn="ctr">
+              <a:buNone/>
+            </a:pPr>
+            <a:endParaRPr b="0" lang="ru-RU" sz="4400" spc="-1" strike="noStrike">
+              <a:latin typeface="Arial"/>
             </a:endParaRPr>
           </a:p>
         </p:txBody>
@@ -2636,20 +2384,8 @@
             <a:normAutofit/>
           </a:bodyPr>
           <a:p>
-            <a:pPr>
-              <a:lnSpc>
-                <a:spcPct val="95000"/>
-              </a:lnSpc>
-              <a:spcBef>
-                <a:spcPts val="1417"/>
-              </a:spcBef>
-              <a:buNone/>
-            </a:pPr>
-            <a:endParaRPr b="0" lang="en-US" sz="1800" spc="9" strike="noStrike">
-              <a:solidFill>
-                <a:srgbClr val="000000"/>
-              </a:solidFill>
-              <a:latin typeface="Century Schoolbook"/>
+            <a:endParaRPr b="0" lang="ru-RU" sz="3200" spc="-1" strike="noStrike">
+              <a:latin typeface="Arial"/>
             </a:endParaRPr>
           </a:p>
         </p:txBody>
@@ -2682,20 +2418,8 @@
             <a:normAutofit/>
           </a:bodyPr>
           <a:p>
-            <a:pPr>
-              <a:lnSpc>
-                <a:spcPct val="95000"/>
-              </a:lnSpc>
-              <a:spcBef>
-                <a:spcPts val="1417"/>
-              </a:spcBef>
-              <a:buNone/>
-            </a:pPr>
-            <a:endParaRPr b="0" lang="en-US" sz="1800" spc="9" strike="noStrike">
-              <a:solidFill>
-                <a:srgbClr val="000000"/>
-              </a:solidFill>
-              <a:latin typeface="Century Schoolbook"/>
+            <a:endParaRPr b="0" lang="ru-RU" sz="3200" spc="-1" strike="noStrike">
+              <a:latin typeface="Arial"/>
             </a:endParaRPr>
           </a:p>
         </p:txBody>
@@ -2728,20 +2452,8 @@
             <a:normAutofit/>
           </a:bodyPr>
           <a:p>
-            <a:pPr>
-              <a:lnSpc>
-                <a:spcPct val="95000"/>
-              </a:lnSpc>
-              <a:spcBef>
-                <a:spcPts val="1417"/>
-              </a:spcBef>
-              <a:buNone/>
-            </a:pPr>
-            <a:endParaRPr b="0" lang="en-US" sz="1800" spc="9" strike="noStrike">
-              <a:solidFill>
-                <a:srgbClr val="000000"/>
-              </a:solidFill>
-              <a:latin typeface="Century Schoolbook"/>
+            <a:endParaRPr b="0" lang="ru-RU" sz="3200" spc="-1" strike="noStrike">
+              <a:latin typeface="Arial"/>
             </a:endParaRPr>
           </a:p>
         </p:txBody>
@@ -2753,7 +2465,7 @@
             <a:spLocks noGrp="1"/>
           </p:cNvSpPr>
           <p:nvPr>
-            <p:ph type="ftr" idx="5"/>
+            <p:ph type="ftr" idx="4"/>
           </p:nvPr>
         </p:nvSpPr>
         <p:spPr/>
@@ -2773,14 +2485,14 @@
             <a:spLocks noGrp="1"/>
           </p:cNvSpPr>
           <p:nvPr>
-            <p:ph type="sldNum" idx="6"/>
+            <p:ph type="sldNum" idx="5"/>
           </p:nvPr>
         </p:nvSpPr>
         <p:spPr/>
         <p:txBody>
           <a:bodyPr/>
           <a:p>
-            <a:fld id="{C3A80DDC-4440-44A8-8D6C-D3A8855C9EC9}" type="slidenum">
+            <a:fld id="{151B7275-66FB-4002-9134-252863454B95}" type="slidenum">
               <a:t>&lt;#&gt;</a:t>
             </a:fld>
           </a:p>
@@ -2793,7 +2505,7 @@
             <a:spLocks noGrp="1"/>
           </p:cNvSpPr>
           <p:nvPr>
-            <p:ph type="dt" idx="4"/>
+            <p:ph type="dt" idx="6"/>
           </p:nvPr>
         </p:nvSpPr>
         <p:spPr/>
@@ -2841,8 +2553,8 @@
         </p:nvSpPr>
         <p:spPr>
           <a:xfrm>
-            <a:off x="609480" y="273600"/>
-            <a:ext cx="10972440" cy="1144800"/>
+            <a:off x="609480" y="221040"/>
+            <a:ext cx="10972440" cy="1250280"/>
           </a:xfrm>
           <a:prstGeom prst="rect">
             <a:avLst/>
@@ -2857,11 +2569,11 @@
             <a:noAutofit/>
           </a:bodyPr>
           <a:p>
-            <a:endParaRPr b="0" lang="en-US" sz="1800" spc="-1" strike="noStrike">
-              <a:solidFill>
-                <a:srgbClr val="000000"/>
-              </a:solidFill>
-              <a:latin typeface="Century Schoolbook"/>
+            <a:pPr algn="ctr">
+              <a:buNone/>
+            </a:pPr>
+            <a:endParaRPr b="0" lang="ru-RU" sz="4400" spc="-1" strike="noStrike">
+              <a:latin typeface="Arial"/>
             </a:endParaRPr>
           </a:p>
         </p:txBody>
@@ -2894,20 +2606,8 @@
             <a:normAutofit/>
           </a:bodyPr>
           <a:p>
-            <a:pPr>
-              <a:lnSpc>
-                <a:spcPct val="95000"/>
-              </a:lnSpc>
-              <a:spcBef>
-                <a:spcPts val="1417"/>
-              </a:spcBef>
-              <a:buNone/>
-            </a:pPr>
-            <a:endParaRPr b="0" lang="en-US" sz="1800" spc="9" strike="noStrike">
-              <a:solidFill>
-                <a:srgbClr val="000000"/>
-              </a:solidFill>
-              <a:latin typeface="Century Schoolbook"/>
+            <a:endParaRPr b="0" lang="ru-RU" sz="3200" spc="-1" strike="noStrike">
+              <a:latin typeface="Arial"/>
             </a:endParaRPr>
           </a:p>
         </p:txBody>
@@ -2940,20 +2640,8 @@
             <a:normAutofit/>
           </a:bodyPr>
           <a:p>
-            <a:pPr>
-              <a:lnSpc>
-                <a:spcPct val="95000"/>
-              </a:lnSpc>
-              <a:spcBef>
-                <a:spcPts val="1417"/>
-              </a:spcBef>
-              <a:buNone/>
-            </a:pPr>
-            <a:endParaRPr b="0" lang="en-US" sz="1800" spc="9" strike="noStrike">
-              <a:solidFill>
-                <a:srgbClr val="000000"/>
-              </a:solidFill>
-              <a:latin typeface="Century Schoolbook"/>
+            <a:endParaRPr b="0" lang="ru-RU" sz="3200" spc="-1" strike="noStrike">
+              <a:latin typeface="Arial"/>
             </a:endParaRPr>
           </a:p>
         </p:txBody>
@@ -2965,7 +2653,7 @@
             <a:spLocks noGrp="1"/>
           </p:cNvSpPr>
           <p:nvPr>
-            <p:ph type="ftr" idx="5"/>
+            <p:ph type="ftr" idx="4"/>
           </p:nvPr>
         </p:nvSpPr>
         <p:spPr/>
@@ -2985,14 +2673,14 @@
             <a:spLocks noGrp="1"/>
           </p:cNvSpPr>
           <p:nvPr>
-            <p:ph type="sldNum" idx="6"/>
+            <p:ph type="sldNum" idx="5"/>
           </p:nvPr>
         </p:nvSpPr>
         <p:spPr/>
         <p:txBody>
           <a:bodyPr/>
           <a:p>
-            <a:fld id="{84723074-F69B-4D9F-A059-EED1EB2CF261}" type="slidenum">
+            <a:fld id="{7C1BC096-7B9F-4B30-B4B1-615F130E9156}" type="slidenum">
               <a:t>&lt;#&gt;</a:t>
             </a:fld>
           </a:p>
@@ -3005,7 +2693,7 @@
             <a:spLocks noGrp="1"/>
           </p:cNvSpPr>
           <p:nvPr>
-            <p:ph type="dt" idx="4"/>
+            <p:ph type="dt" idx="6"/>
           </p:nvPr>
         </p:nvSpPr>
         <p:spPr/>
@@ -3053,8 +2741,8 @@
         </p:nvSpPr>
         <p:spPr>
           <a:xfrm>
-            <a:off x="609480" y="273600"/>
-            <a:ext cx="10972440" cy="1144800"/>
+            <a:off x="609480" y="221040"/>
+            <a:ext cx="10972440" cy="1250280"/>
           </a:xfrm>
           <a:prstGeom prst="rect">
             <a:avLst/>
@@ -3069,11 +2757,11 @@
             <a:noAutofit/>
           </a:bodyPr>
           <a:p>
-            <a:endParaRPr b="0" lang="en-US" sz="1800" spc="-1" strike="noStrike">
-              <a:solidFill>
-                <a:srgbClr val="000000"/>
-              </a:solidFill>
-              <a:latin typeface="Century Schoolbook"/>
+            <a:pPr algn="ctr">
+              <a:buNone/>
+            </a:pPr>
+            <a:endParaRPr b="0" lang="ru-RU" sz="4400" spc="-1" strike="noStrike">
+              <a:latin typeface="Arial"/>
             </a:endParaRPr>
           </a:p>
         </p:txBody>
@@ -3106,20 +2794,8 @@
             <a:normAutofit/>
           </a:bodyPr>
           <a:p>
-            <a:pPr>
-              <a:lnSpc>
-                <a:spcPct val="95000"/>
-              </a:lnSpc>
-              <a:spcBef>
-                <a:spcPts val="1417"/>
-              </a:spcBef>
-              <a:buNone/>
-            </a:pPr>
-            <a:endParaRPr b="0" lang="en-US" sz="1800" spc="9" strike="noStrike">
-              <a:solidFill>
-                <a:srgbClr val="000000"/>
-              </a:solidFill>
-              <a:latin typeface="Century Schoolbook"/>
+            <a:endParaRPr b="0" lang="ru-RU" sz="3200" spc="-1" strike="noStrike">
+              <a:latin typeface="Arial"/>
             </a:endParaRPr>
           </a:p>
         </p:txBody>
@@ -3152,20 +2828,8 @@
             <a:normAutofit/>
           </a:bodyPr>
           <a:p>
-            <a:pPr>
-              <a:lnSpc>
-                <a:spcPct val="95000"/>
-              </a:lnSpc>
-              <a:spcBef>
-                <a:spcPts val="1417"/>
-              </a:spcBef>
-              <a:buNone/>
-            </a:pPr>
-            <a:endParaRPr b="0" lang="en-US" sz="1800" spc="9" strike="noStrike">
-              <a:solidFill>
-                <a:srgbClr val="000000"/>
-              </a:solidFill>
-              <a:latin typeface="Century Schoolbook"/>
+            <a:endParaRPr b="0" lang="ru-RU" sz="3200" spc="-1" strike="noStrike">
+              <a:latin typeface="Arial"/>
             </a:endParaRPr>
           </a:p>
         </p:txBody>
@@ -3198,20 +2862,8 @@
             <a:normAutofit/>
           </a:bodyPr>
           <a:p>
-            <a:pPr>
-              <a:lnSpc>
-                <a:spcPct val="95000"/>
-              </a:lnSpc>
-              <a:spcBef>
-                <a:spcPts val="1417"/>
-              </a:spcBef>
-              <a:buNone/>
-            </a:pPr>
-            <a:endParaRPr b="0" lang="en-US" sz="1800" spc="9" strike="noStrike">
-              <a:solidFill>
-                <a:srgbClr val="000000"/>
-              </a:solidFill>
-              <a:latin typeface="Century Schoolbook"/>
+            <a:endParaRPr b="0" lang="ru-RU" sz="3200" spc="-1" strike="noStrike">
+              <a:latin typeface="Arial"/>
             </a:endParaRPr>
           </a:p>
         </p:txBody>
@@ -3244,20 +2896,8 @@
             <a:normAutofit/>
           </a:bodyPr>
           <a:p>
-            <a:pPr>
-              <a:lnSpc>
-                <a:spcPct val="95000"/>
-              </a:lnSpc>
-              <a:spcBef>
-                <a:spcPts val="1417"/>
-              </a:spcBef>
-              <a:buNone/>
-            </a:pPr>
-            <a:endParaRPr b="0" lang="en-US" sz="1800" spc="9" strike="noStrike">
-              <a:solidFill>
-                <a:srgbClr val="000000"/>
-              </a:solidFill>
-              <a:latin typeface="Century Schoolbook"/>
+            <a:endParaRPr b="0" lang="ru-RU" sz="3200" spc="-1" strike="noStrike">
+              <a:latin typeface="Arial"/>
             </a:endParaRPr>
           </a:p>
         </p:txBody>
@@ -3269,7 +2909,7 @@
             <a:spLocks noGrp="1"/>
           </p:cNvSpPr>
           <p:nvPr>
-            <p:ph type="ftr" idx="5"/>
+            <p:ph type="ftr" idx="4"/>
           </p:nvPr>
         </p:nvSpPr>
         <p:spPr/>
@@ -3289,14 +2929,14 @@
             <a:spLocks noGrp="1"/>
           </p:cNvSpPr>
           <p:nvPr>
-            <p:ph type="sldNum" idx="6"/>
+            <p:ph type="sldNum" idx="5"/>
           </p:nvPr>
         </p:nvSpPr>
         <p:spPr/>
         <p:txBody>
           <a:bodyPr/>
           <a:p>
-            <a:fld id="{495AFF09-4D94-4219-A57E-2B7F6394DEFF}" type="slidenum">
+            <a:fld id="{DB676EB0-4808-40F8-9C14-F6F82D041162}" type="slidenum">
               <a:t>&lt;#&gt;</a:t>
             </a:fld>
           </a:p>
@@ -3309,7 +2949,7 @@
             <a:spLocks noGrp="1"/>
           </p:cNvSpPr>
           <p:nvPr>
-            <p:ph type="dt" idx="4"/>
+            <p:ph type="dt" idx="6"/>
           </p:nvPr>
         </p:nvSpPr>
         <p:spPr/>
@@ -3357,8 +2997,8 @@
         </p:nvSpPr>
         <p:spPr>
           <a:xfrm>
-            <a:off x="609480" y="273600"/>
-            <a:ext cx="10972440" cy="1144800"/>
+            <a:off x="609480" y="221040"/>
+            <a:ext cx="10972440" cy="1250280"/>
           </a:xfrm>
           <a:prstGeom prst="rect">
             <a:avLst/>
@@ -3373,11 +3013,11 @@
             <a:noAutofit/>
           </a:bodyPr>
           <a:p>
-            <a:endParaRPr b="0" lang="en-US" sz="1800" spc="-1" strike="noStrike">
-              <a:solidFill>
-                <a:srgbClr val="000000"/>
-              </a:solidFill>
-              <a:latin typeface="Century Schoolbook"/>
+            <a:pPr algn="ctr">
+              <a:buNone/>
+            </a:pPr>
+            <a:endParaRPr b="0" lang="ru-RU" sz="4400" spc="-1" strike="noStrike">
+              <a:latin typeface="Arial"/>
             </a:endParaRPr>
           </a:p>
         </p:txBody>
@@ -3407,23 +3047,11 @@
         </p:spPr>
         <p:txBody>
           <a:bodyPr lIns="0" rIns="0" tIns="0" bIns="0" anchor="t">
-            <a:normAutofit/>
-          </a:bodyPr>
-          <a:p>
-            <a:pPr>
-              <a:lnSpc>
-                <a:spcPct val="95000"/>
-              </a:lnSpc>
-              <a:spcBef>
-                <a:spcPts val="1417"/>
-              </a:spcBef>
-              <a:buNone/>
-            </a:pPr>
-            <a:endParaRPr b="0" lang="en-US" sz="1800" spc="9" strike="noStrike">
-              <a:solidFill>
-                <a:srgbClr val="000000"/>
-              </a:solidFill>
-              <a:latin typeface="Century Schoolbook"/>
+            <a:normAutofit fontScale="91000"/>
+          </a:bodyPr>
+          <a:p>
+            <a:endParaRPr b="0" lang="ru-RU" sz="3200" spc="-1" strike="noStrike">
+              <a:latin typeface="Arial"/>
             </a:endParaRPr>
           </a:p>
         </p:txBody>
@@ -3453,23 +3081,11 @@
         </p:spPr>
         <p:txBody>
           <a:bodyPr lIns="0" rIns="0" tIns="0" bIns="0" anchor="t">
-            <a:normAutofit/>
-          </a:bodyPr>
-          <a:p>
-            <a:pPr>
-              <a:lnSpc>
-                <a:spcPct val="95000"/>
-              </a:lnSpc>
-              <a:spcBef>
-                <a:spcPts val="1417"/>
-              </a:spcBef>
-              <a:buNone/>
-            </a:pPr>
-            <a:endParaRPr b="0" lang="en-US" sz="1800" spc="9" strike="noStrike">
-              <a:solidFill>
-                <a:srgbClr val="000000"/>
-              </a:solidFill>
-              <a:latin typeface="Century Schoolbook"/>
+            <a:normAutofit fontScale="91000"/>
+          </a:bodyPr>
+          <a:p>
+            <a:endParaRPr b="0" lang="ru-RU" sz="3200" spc="-1" strike="noStrike">
+              <a:latin typeface="Arial"/>
             </a:endParaRPr>
           </a:p>
         </p:txBody>
@@ -3499,23 +3115,11 @@
         </p:spPr>
         <p:txBody>
           <a:bodyPr lIns="0" rIns="0" tIns="0" bIns="0" anchor="t">
-            <a:normAutofit/>
-          </a:bodyPr>
-          <a:p>
-            <a:pPr>
-              <a:lnSpc>
-                <a:spcPct val="95000"/>
-              </a:lnSpc>
-              <a:spcBef>
-                <a:spcPts val="1417"/>
-              </a:spcBef>
-              <a:buNone/>
-            </a:pPr>
-            <a:endParaRPr b="0" lang="en-US" sz="1800" spc="9" strike="noStrike">
-              <a:solidFill>
-                <a:srgbClr val="000000"/>
-              </a:solidFill>
-              <a:latin typeface="Century Schoolbook"/>
+            <a:normAutofit fontScale="91000"/>
+          </a:bodyPr>
+          <a:p>
+            <a:endParaRPr b="0" lang="ru-RU" sz="3200" spc="-1" strike="noStrike">
+              <a:latin typeface="Arial"/>
             </a:endParaRPr>
           </a:p>
         </p:txBody>
@@ -3545,23 +3149,11 @@
         </p:spPr>
         <p:txBody>
           <a:bodyPr lIns="0" rIns="0" tIns="0" bIns="0" anchor="t">
-            <a:normAutofit/>
-          </a:bodyPr>
-          <a:p>
-            <a:pPr>
-              <a:lnSpc>
-                <a:spcPct val="95000"/>
-              </a:lnSpc>
-              <a:spcBef>
-                <a:spcPts val="1417"/>
-              </a:spcBef>
-              <a:buNone/>
-            </a:pPr>
-            <a:endParaRPr b="0" lang="en-US" sz="1800" spc="9" strike="noStrike">
-              <a:solidFill>
-                <a:srgbClr val="000000"/>
-              </a:solidFill>
-              <a:latin typeface="Century Schoolbook"/>
+            <a:normAutofit fontScale="91000"/>
+          </a:bodyPr>
+          <a:p>
+            <a:endParaRPr b="0" lang="ru-RU" sz="3200" spc="-1" strike="noStrike">
+              <a:latin typeface="Arial"/>
             </a:endParaRPr>
           </a:p>
         </p:txBody>
@@ -3591,23 +3183,11 @@
         </p:spPr>
         <p:txBody>
           <a:bodyPr lIns="0" rIns="0" tIns="0" bIns="0" anchor="t">
-            <a:normAutofit/>
-          </a:bodyPr>
-          <a:p>
-            <a:pPr>
-              <a:lnSpc>
-                <a:spcPct val="95000"/>
-              </a:lnSpc>
-              <a:spcBef>
-                <a:spcPts val="1417"/>
-              </a:spcBef>
-              <a:buNone/>
-            </a:pPr>
-            <a:endParaRPr b="0" lang="en-US" sz="1800" spc="9" strike="noStrike">
-              <a:solidFill>
-                <a:srgbClr val="000000"/>
-              </a:solidFill>
-              <a:latin typeface="Century Schoolbook"/>
+            <a:normAutofit fontScale="91000"/>
+          </a:bodyPr>
+          <a:p>
+            <a:endParaRPr b="0" lang="ru-RU" sz="3200" spc="-1" strike="noStrike">
+              <a:latin typeface="Arial"/>
             </a:endParaRPr>
           </a:p>
         </p:txBody>
@@ -3637,23 +3217,11 @@
         </p:spPr>
         <p:txBody>
           <a:bodyPr lIns="0" rIns="0" tIns="0" bIns="0" anchor="t">
-            <a:normAutofit/>
-          </a:bodyPr>
-          <a:p>
-            <a:pPr>
-              <a:lnSpc>
-                <a:spcPct val="95000"/>
-              </a:lnSpc>
-              <a:spcBef>
-                <a:spcPts val="1417"/>
-              </a:spcBef>
-              <a:buNone/>
-            </a:pPr>
-            <a:endParaRPr b="0" lang="en-US" sz="1800" spc="9" strike="noStrike">
-              <a:solidFill>
-                <a:srgbClr val="000000"/>
-              </a:solidFill>
-              <a:latin typeface="Century Schoolbook"/>
+            <a:normAutofit fontScale="91000"/>
+          </a:bodyPr>
+          <a:p>
+            <a:endParaRPr b="0" lang="ru-RU" sz="3200" spc="-1" strike="noStrike">
+              <a:latin typeface="Arial"/>
             </a:endParaRPr>
           </a:p>
         </p:txBody>
@@ -3665,7 +3233,7 @@
             <a:spLocks noGrp="1"/>
           </p:cNvSpPr>
           <p:nvPr>
-            <p:ph type="ftr" idx="5"/>
+            <p:ph type="ftr" idx="4"/>
           </p:nvPr>
         </p:nvSpPr>
         <p:spPr/>
@@ -3685,14 +3253,14 @@
             <a:spLocks noGrp="1"/>
           </p:cNvSpPr>
           <p:nvPr>
-            <p:ph type="sldNum" idx="6"/>
+            <p:ph type="sldNum" idx="5"/>
           </p:nvPr>
         </p:nvSpPr>
         <p:spPr/>
         <p:txBody>
           <a:bodyPr/>
           <a:p>
-            <a:fld id="{529DB8E9-ECC2-4EF2-A4C2-F3E5B1348C8E}" type="slidenum">
+            <a:fld id="{0ABF4517-D013-4B2A-AE38-54A525C1B24B}" type="slidenum">
               <a:t>&lt;#&gt;</a:t>
             </a:fld>
           </a:p>
@@ -3705,7 +3273,7 @@
             <a:spLocks noGrp="1"/>
           </p:cNvSpPr>
           <p:nvPr>
-            <p:ph type="dt" idx="4"/>
+            <p:ph type="dt" idx="6"/>
           </p:nvPr>
         </p:nvSpPr>
         <p:spPr/>
@@ -3748,7 +3316,7 @@
             <a:spLocks noGrp="1"/>
           </p:cNvSpPr>
           <p:nvPr>
-            <p:ph type="ftr" idx="8"/>
+            <p:ph type="ftr" idx="7"/>
           </p:nvPr>
         </p:nvSpPr>
         <p:spPr/>
@@ -3768,14 +3336,14 @@
             <a:spLocks noGrp="1"/>
           </p:cNvSpPr>
           <p:nvPr>
-            <p:ph type="sldNum" idx="9"/>
+            <p:ph type="sldNum" idx="8"/>
           </p:nvPr>
         </p:nvSpPr>
         <p:spPr/>
         <p:txBody>
           <a:bodyPr/>
           <a:p>
-            <a:fld id="{BCA1DDAF-B9BA-4AF9-9A06-375142FF135A}" type="slidenum">
+            <a:fld id="{38DDAD9C-E943-4719-B98F-FD65761FE175}" type="slidenum">
               <a:t>&lt;#&gt;</a:t>
             </a:fld>
           </a:p>
@@ -3788,7 +3356,7 @@
             <a:spLocks noGrp="1"/>
           </p:cNvSpPr>
           <p:nvPr>
-            <p:ph type="dt" idx="7"/>
+            <p:ph type="dt" idx="9"/>
           </p:nvPr>
         </p:nvSpPr>
         <p:spPr/>
@@ -3836,8 +3404,8 @@
         </p:nvSpPr>
         <p:spPr>
           <a:xfrm>
-            <a:off x="609480" y="273600"/>
-            <a:ext cx="10972440" cy="1144800"/>
+            <a:off x="609480" y="221040"/>
+            <a:ext cx="10972440" cy="1250280"/>
           </a:xfrm>
           <a:prstGeom prst="rect">
             <a:avLst/>
@@ -3852,11 +3420,11 @@
             <a:noAutofit/>
           </a:bodyPr>
           <a:p>
-            <a:endParaRPr b="0" lang="en-US" sz="1800" spc="-1" strike="noStrike">
-              <a:solidFill>
-                <a:srgbClr val="000000"/>
-              </a:solidFill>
-              <a:latin typeface="Century Schoolbook"/>
+            <a:pPr algn="ctr">
+              <a:buNone/>
+            </a:pPr>
+            <a:endParaRPr b="0" lang="ru-RU" sz="4400" spc="-1" strike="noStrike">
+              <a:latin typeface="Arial"/>
             </a:endParaRPr>
           </a:p>
         </p:txBody>
@@ -3905,7 +3473,7 @@
             <a:spLocks noGrp="1"/>
           </p:cNvSpPr>
           <p:nvPr>
-            <p:ph type="ftr" idx="8"/>
+            <p:ph type="ftr" idx="7"/>
           </p:nvPr>
         </p:nvSpPr>
         <p:spPr/>
@@ -3925,14 +3493,14 @@
             <a:spLocks noGrp="1"/>
           </p:cNvSpPr>
           <p:nvPr>
-            <p:ph type="sldNum" idx="9"/>
+            <p:ph type="sldNum" idx="8"/>
           </p:nvPr>
         </p:nvSpPr>
         <p:spPr/>
         <p:txBody>
           <a:bodyPr/>
           <a:p>
-            <a:fld id="{F2787CF6-4E66-438B-A274-D61B0ECE9289}" type="slidenum">
+            <a:fld id="{B6A78826-B0D2-4D73-A43B-CFD439C013BF}" type="slidenum">
               <a:t>&lt;#&gt;</a:t>
             </a:fld>
           </a:p>
@@ -3945,7 +3513,7 @@
             <a:spLocks noGrp="1"/>
           </p:cNvSpPr>
           <p:nvPr>
-            <p:ph type="dt" idx="7"/>
+            <p:ph type="dt" idx="9"/>
           </p:nvPr>
         </p:nvSpPr>
         <p:spPr/>
@@ -3993,8 +3561,8 @@
         </p:nvSpPr>
         <p:spPr>
           <a:xfrm>
-            <a:off x="609480" y="273600"/>
-            <a:ext cx="10972440" cy="1144800"/>
+            <a:off x="609480" y="221040"/>
+            <a:ext cx="10972440" cy="1250280"/>
           </a:xfrm>
           <a:prstGeom prst="rect">
             <a:avLst/>
@@ -4009,11 +3577,11 @@
             <a:noAutofit/>
           </a:bodyPr>
           <a:p>
-            <a:endParaRPr b="0" lang="en-US" sz="1800" spc="-1" strike="noStrike">
-              <a:solidFill>
-                <a:srgbClr val="000000"/>
-              </a:solidFill>
-              <a:latin typeface="Century Schoolbook"/>
+            <a:pPr algn="ctr">
+              <a:buNone/>
+            </a:pPr>
+            <a:endParaRPr b="0" lang="ru-RU" sz="4400" spc="-1" strike="noStrike">
+              <a:latin typeface="Arial"/>
             </a:endParaRPr>
           </a:p>
         </p:txBody>
@@ -4046,20 +3614,8 @@
             <a:normAutofit/>
           </a:bodyPr>
           <a:p>
-            <a:pPr>
-              <a:lnSpc>
-                <a:spcPct val="95000"/>
-              </a:lnSpc>
-              <a:spcBef>
-                <a:spcPts val="1417"/>
-              </a:spcBef>
-              <a:buNone/>
-            </a:pPr>
-            <a:endParaRPr b="0" lang="en-US" sz="1800" spc="9" strike="noStrike">
-              <a:solidFill>
-                <a:srgbClr val="000000"/>
-              </a:solidFill>
-              <a:latin typeface="Century Schoolbook"/>
+            <a:endParaRPr b="0" lang="ru-RU" sz="3200" spc="-1" strike="noStrike">
+              <a:latin typeface="Arial"/>
             </a:endParaRPr>
           </a:p>
         </p:txBody>
@@ -4071,7 +3627,7 @@
             <a:spLocks noGrp="1"/>
           </p:cNvSpPr>
           <p:nvPr>
-            <p:ph type="ftr" idx="8"/>
+            <p:ph type="ftr" idx="7"/>
           </p:nvPr>
         </p:nvSpPr>
         <p:spPr/>
@@ -4091,14 +3647,14 @@
             <a:spLocks noGrp="1"/>
           </p:cNvSpPr>
           <p:nvPr>
-            <p:ph type="sldNum" idx="9"/>
+            <p:ph type="sldNum" idx="8"/>
           </p:nvPr>
         </p:nvSpPr>
         <p:spPr/>
         <p:txBody>
           <a:bodyPr/>
           <a:p>
-            <a:fld id="{1E5E9577-1D24-469B-8DA0-F15EA1926834}" type="slidenum">
+            <a:fld id="{0AEAE27D-3BB3-41F3-A0FD-9A09D2ECF383}" type="slidenum">
               <a:t>&lt;#&gt;</a:t>
             </a:fld>
           </a:p>
@@ -4111,7 +3667,7 @@
             <a:spLocks noGrp="1"/>
           </p:cNvSpPr>
           <p:nvPr>
-            <p:ph type="dt" idx="7"/>
+            <p:ph type="dt" idx="9"/>
           </p:nvPr>
         </p:nvSpPr>
         <p:spPr/>
@@ -4159,8 +3715,8 @@
         </p:nvSpPr>
         <p:spPr>
           <a:xfrm>
-            <a:off x="609480" y="273600"/>
-            <a:ext cx="10972440" cy="1144800"/>
+            <a:off x="609480" y="221040"/>
+            <a:ext cx="10972440" cy="1250280"/>
           </a:xfrm>
           <a:prstGeom prst="rect">
             <a:avLst/>
@@ -4175,11 +3731,11 @@
             <a:noAutofit/>
           </a:bodyPr>
           <a:p>
-            <a:endParaRPr b="0" lang="en-US" sz="1800" spc="-1" strike="noStrike">
-              <a:solidFill>
-                <a:srgbClr val="000000"/>
-              </a:solidFill>
-              <a:latin typeface="Century Schoolbook"/>
+            <a:pPr algn="ctr">
+              <a:buNone/>
+            </a:pPr>
+            <a:endParaRPr b="0" lang="ru-RU" sz="4400" spc="-1" strike="noStrike">
+              <a:latin typeface="Arial"/>
             </a:endParaRPr>
           </a:p>
         </p:txBody>
@@ -4212,20 +3768,8 @@
             <a:normAutofit/>
           </a:bodyPr>
           <a:p>
-            <a:pPr>
-              <a:lnSpc>
-                <a:spcPct val="95000"/>
-              </a:lnSpc>
-              <a:spcBef>
-                <a:spcPts val="1417"/>
-              </a:spcBef>
-              <a:buNone/>
-            </a:pPr>
-            <a:endParaRPr b="0" lang="en-US" sz="1800" spc="9" strike="noStrike">
-              <a:solidFill>
-                <a:srgbClr val="000000"/>
-              </a:solidFill>
-              <a:latin typeface="Century Schoolbook"/>
+            <a:endParaRPr b="0" lang="ru-RU" sz="3200" spc="-1" strike="noStrike">
+              <a:latin typeface="Arial"/>
             </a:endParaRPr>
           </a:p>
         </p:txBody>
@@ -4258,20 +3802,8 @@
             <a:normAutofit/>
           </a:bodyPr>
           <a:p>
-            <a:pPr>
-              <a:lnSpc>
-                <a:spcPct val="95000"/>
-              </a:lnSpc>
-              <a:spcBef>
-                <a:spcPts val="1417"/>
-              </a:spcBef>
-              <a:buNone/>
-            </a:pPr>
-            <a:endParaRPr b="0" lang="en-US" sz="1800" spc="9" strike="noStrike">
-              <a:solidFill>
-                <a:srgbClr val="000000"/>
-              </a:solidFill>
-              <a:latin typeface="Century Schoolbook"/>
+            <a:endParaRPr b="0" lang="ru-RU" sz="3200" spc="-1" strike="noStrike">
+              <a:latin typeface="Arial"/>
             </a:endParaRPr>
           </a:p>
         </p:txBody>
@@ -4283,7 +3815,7 @@
             <a:spLocks noGrp="1"/>
           </p:cNvSpPr>
           <p:nvPr>
-            <p:ph type="ftr" idx="8"/>
+            <p:ph type="ftr" idx="7"/>
           </p:nvPr>
         </p:nvSpPr>
         <p:spPr/>
@@ -4303,14 +3835,14 @@
             <a:spLocks noGrp="1"/>
           </p:cNvSpPr>
           <p:nvPr>
-            <p:ph type="sldNum" idx="9"/>
+            <p:ph type="sldNum" idx="8"/>
           </p:nvPr>
         </p:nvSpPr>
         <p:spPr/>
         <p:txBody>
           <a:bodyPr/>
           <a:p>
-            <a:fld id="{6FCA7A4F-08C3-43A8-9D1E-AF9A4C65AC99}" type="slidenum">
+            <a:fld id="{3B12CC36-802F-4A56-A30A-40E0F7607D6A}" type="slidenum">
               <a:t>&lt;#&gt;</a:t>
             </a:fld>
           </a:p>
@@ -4323,7 +3855,7 @@
             <a:spLocks noGrp="1"/>
           </p:cNvSpPr>
           <p:nvPr>
-            <p:ph type="dt" idx="7"/>
+            <p:ph type="dt" idx="9"/>
           </p:nvPr>
         </p:nvSpPr>
         <p:spPr/>
@@ -4371,8 +3903,8 @@
         </p:nvSpPr>
         <p:spPr>
           <a:xfrm>
-            <a:off x="609480" y="273600"/>
-            <a:ext cx="10972440" cy="1144800"/>
+            <a:off x="609480" y="221040"/>
+            <a:ext cx="10972440" cy="1250280"/>
           </a:xfrm>
           <a:prstGeom prst="rect">
             <a:avLst/>
@@ -4387,11 +3919,11 @@
             <a:noAutofit/>
           </a:bodyPr>
           <a:p>
-            <a:endParaRPr b="0" lang="en-US" sz="1800" spc="-1" strike="noStrike">
-              <a:solidFill>
-                <a:srgbClr val="000000"/>
-              </a:solidFill>
-              <a:latin typeface="Century Schoolbook"/>
+            <a:pPr algn="ctr">
+              <a:buNone/>
+            </a:pPr>
+            <a:endParaRPr b="0" lang="ru-RU" sz="4400" spc="-1" strike="noStrike">
+              <a:latin typeface="Arial"/>
             </a:endParaRPr>
           </a:p>
         </p:txBody>
@@ -4403,7 +3935,7 @@
             <a:spLocks noGrp="1"/>
           </p:cNvSpPr>
           <p:nvPr>
-            <p:ph type="ftr" idx="8"/>
+            <p:ph type="ftr" idx="7"/>
           </p:nvPr>
         </p:nvSpPr>
         <p:spPr/>
@@ -4423,14 +3955,14 @@
             <a:spLocks noGrp="1"/>
           </p:cNvSpPr>
           <p:nvPr>
-            <p:ph type="sldNum" idx="9"/>
+            <p:ph type="sldNum" idx="8"/>
           </p:nvPr>
         </p:nvSpPr>
         <p:spPr/>
         <p:txBody>
           <a:bodyPr/>
           <a:p>
-            <a:fld id="{570773E8-F77D-4863-AC04-CCA40CB23895}" type="slidenum">
+            <a:fld id="{61550687-BEB8-4358-B610-5958E4C46E63}" type="slidenum">
               <a:t>&lt;#&gt;</a:t>
             </a:fld>
           </a:p>
@@ -4443,7 +3975,7 @@
             <a:spLocks noGrp="1"/>
           </p:cNvSpPr>
           <p:nvPr>
-            <p:ph type="dt" idx="7"/>
+            <p:ph type="dt" idx="9"/>
           </p:nvPr>
         </p:nvSpPr>
         <p:spPr/>
@@ -4491,8 +4023,8 @@
         </p:nvSpPr>
         <p:spPr>
           <a:xfrm>
-            <a:off x="609480" y="273600"/>
-            <a:ext cx="10972440" cy="1144800"/>
+            <a:off x="609480" y="221040"/>
+            <a:ext cx="10972440" cy="1250280"/>
           </a:xfrm>
           <a:prstGeom prst="rect">
             <a:avLst/>
@@ -4507,11 +4039,11 @@
             <a:noAutofit/>
           </a:bodyPr>
           <a:p>
-            <a:endParaRPr b="0" lang="en-US" sz="1800" spc="-1" strike="noStrike">
-              <a:solidFill>
-                <a:srgbClr val="000000"/>
-              </a:solidFill>
-              <a:latin typeface="Century Schoolbook"/>
+            <a:pPr algn="ctr">
+              <a:buNone/>
+            </a:pPr>
+            <a:endParaRPr b="0" lang="ru-RU" sz="4400" spc="-1" strike="noStrike">
+              <a:latin typeface="Arial"/>
             </a:endParaRPr>
           </a:p>
         </p:txBody>
@@ -4544,20 +4076,8 @@
             <a:normAutofit/>
           </a:bodyPr>
           <a:p>
-            <a:pPr>
-              <a:lnSpc>
-                <a:spcPct val="95000"/>
-              </a:lnSpc>
-              <a:spcBef>
-                <a:spcPts val="1417"/>
-              </a:spcBef>
-              <a:buNone/>
-            </a:pPr>
-            <a:endParaRPr b="0" lang="en-US" sz="1800" spc="9" strike="noStrike">
-              <a:solidFill>
-                <a:srgbClr val="000000"/>
-              </a:solidFill>
-              <a:latin typeface="Century Schoolbook"/>
+            <a:endParaRPr b="0" lang="ru-RU" sz="3200" spc="-1" strike="noStrike">
+              <a:latin typeface="Arial"/>
             </a:endParaRPr>
           </a:p>
         </p:txBody>
@@ -4569,7 +4089,7 @@
             <a:spLocks noGrp="1"/>
           </p:cNvSpPr>
           <p:nvPr>
-            <p:ph type="ftr" idx="2"/>
+            <p:ph type="ftr" idx="1"/>
           </p:nvPr>
         </p:nvSpPr>
         <p:spPr/>
@@ -4589,14 +4109,14 @@
             <a:spLocks noGrp="1"/>
           </p:cNvSpPr>
           <p:nvPr>
-            <p:ph type="sldNum" idx="3"/>
+            <p:ph type="sldNum" idx="2"/>
           </p:nvPr>
         </p:nvSpPr>
         <p:spPr/>
         <p:txBody>
           <a:bodyPr/>
           <a:p>
-            <a:fld id="{1D001CBE-57A7-4086-BA54-955E7CE22F18}" type="slidenum">
+            <a:fld id="{B002A71F-A97A-4A78-AC70-FD6E64D6D3D8}" type="slidenum">
               <a:t>&lt;#&gt;</a:t>
             </a:fld>
           </a:p>
@@ -4609,7 +4129,7 @@
             <a:spLocks noGrp="1"/>
           </p:cNvSpPr>
           <p:nvPr>
-            <p:ph type="dt" idx="1"/>
+            <p:ph type="dt" idx="3"/>
           </p:nvPr>
         </p:nvSpPr>
         <p:spPr/>
@@ -4689,7 +4209,7 @@
             <a:spLocks noGrp="1"/>
           </p:cNvSpPr>
           <p:nvPr>
-            <p:ph type="ftr" idx="8"/>
+            <p:ph type="ftr" idx="7"/>
           </p:nvPr>
         </p:nvSpPr>
         <p:spPr/>
@@ -4709,14 +4229,14 @@
             <a:spLocks noGrp="1"/>
           </p:cNvSpPr>
           <p:nvPr>
-            <p:ph type="sldNum" idx="9"/>
+            <p:ph type="sldNum" idx="8"/>
           </p:nvPr>
         </p:nvSpPr>
         <p:spPr/>
         <p:txBody>
           <a:bodyPr/>
           <a:p>
-            <a:fld id="{3BDD0D6D-B073-41F8-A53F-46063F7B786C}" type="slidenum">
+            <a:fld id="{92654EAF-00B2-47B3-905F-A88A4A090043}" type="slidenum">
               <a:t>&lt;#&gt;</a:t>
             </a:fld>
           </a:p>
@@ -4729,7 +4249,7 @@
             <a:spLocks noGrp="1"/>
           </p:cNvSpPr>
           <p:nvPr>
-            <p:ph type="dt" idx="7"/>
+            <p:ph type="dt" idx="9"/>
           </p:nvPr>
         </p:nvSpPr>
         <p:spPr/>
@@ -4777,8 +4297,8 @@
         </p:nvSpPr>
         <p:spPr>
           <a:xfrm>
-            <a:off x="609480" y="273600"/>
-            <a:ext cx="10972440" cy="1144800"/>
+            <a:off x="609480" y="221040"/>
+            <a:ext cx="10972440" cy="1250280"/>
           </a:xfrm>
           <a:prstGeom prst="rect">
             <a:avLst/>
@@ -4793,11 +4313,11 @@
             <a:noAutofit/>
           </a:bodyPr>
           <a:p>
-            <a:endParaRPr b="0" lang="en-US" sz="1800" spc="-1" strike="noStrike">
-              <a:solidFill>
-                <a:srgbClr val="000000"/>
-              </a:solidFill>
-              <a:latin typeface="Century Schoolbook"/>
+            <a:pPr algn="ctr">
+              <a:buNone/>
+            </a:pPr>
+            <a:endParaRPr b="0" lang="ru-RU" sz="4400" spc="-1" strike="noStrike">
+              <a:latin typeface="Arial"/>
             </a:endParaRPr>
           </a:p>
         </p:txBody>
@@ -4830,20 +4350,8 @@
             <a:normAutofit/>
           </a:bodyPr>
           <a:p>
-            <a:pPr>
-              <a:lnSpc>
-                <a:spcPct val="95000"/>
-              </a:lnSpc>
-              <a:spcBef>
-                <a:spcPts val="1417"/>
-              </a:spcBef>
-              <a:buNone/>
-            </a:pPr>
-            <a:endParaRPr b="0" lang="en-US" sz="1800" spc="9" strike="noStrike">
-              <a:solidFill>
-                <a:srgbClr val="000000"/>
-              </a:solidFill>
-              <a:latin typeface="Century Schoolbook"/>
+            <a:endParaRPr b="0" lang="ru-RU" sz="3200" spc="-1" strike="noStrike">
+              <a:latin typeface="Arial"/>
             </a:endParaRPr>
           </a:p>
         </p:txBody>
@@ -4876,20 +4384,8 @@
             <a:normAutofit/>
           </a:bodyPr>
           <a:p>
-            <a:pPr>
-              <a:lnSpc>
-                <a:spcPct val="95000"/>
-              </a:lnSpc>
-              <a:spcBef>
-                <a:spcPts val="1417"/>
-              </a:spcBef>
-              <a:buNone/>
-            </a:pPr>
-            <a:endParaRPr b="0" lang="en-US" sz="1800" spc="9" strike="noStrike">
-              <a:solidFill>
-                <a:srgbClr val="000000"/>
-              </a:solidFill>
-              <a:latin typeface="Century Schoolbook"/>
+            <a:endParaRPr b="0" lang="ru-RU" sz="3200" spc="-1" strike="noStrike">
+              <a:latin typeface="Arial"/>
             </a:endParaRPr>
           </a:p>
         </p:txBody>
@@ -4922,20 +4418,8 @@
             <a:normAutofit/>
           </a:bodyPr>
           <a:p>
-            <a:pPr>
-              <a:lnSpc>
-                <a:spcPct val="95000"/>
-              </a:lnSpc>
-              <a:spcBef>
-                <a:spcPts val="1417"/>
-              </a:spcBef>
-              <a:buNone/>
-            </a:pPr>
-            <a:endParaRPr b="0" lang="en-US" sz="1800" spc="9" strike="noStrike">
-              <a:solidFill>
-                <a:srgbClr val="000000"/>
-              </a:solidFill>
-              <a:latin typeface="Century Schoolbook"/>
+            <a:endParaRPr b="0" lang="ru-RU" sz="3200" spc="-1" strike="noStrike">
+              <a:latin typeface="Arial"/>
             </a:endParaRPr>
           </a:p>
         </p:txBody>
@@ -4947,7 +4431,7 @@
             <a:spLocks noGrp="1"/>
           </p:cNvSpPr>
           <p:nvPr>
-            <p:ph type="ftr" idx="8"/>
+            <p:ph type="ftr" idx="7"/>
           </p:nvPr>
         </p:nvSpPr>
         <p:spPr/>
@@ -4967,14 +4451,14 @@
             <a:spLocks noGrp="1"/>
           </p:cNvSpPr>
           <p:nvPr>
-            <p:ph type="sldNum" idx="9"/>
+            <p:ph type="sldNum" idx="8"/>
           </p:nvPr>
         </p:nvSpPr>
         <p:spPr/>
         <p:txBody>
           <a:bodyPr/>
           <a:p>
-            <a:fld id="{E3E9E5E4-1F56-4CDA-B8D0-AC9BA2FD60ED}" type="slidenum">
+            <a:fld id="{35A283C3-047B-4104-A104-005AADCA5C0E}" type="slidenum">
               <a:t>&lt;#&gt;</a:t>
             </a:fld>
           </a:p>
@@ -4987,7 +4471,7 @@
             <a:spLocks noGrp="1"/>
           </p:cNvSpPr>
           <p:nvPr>
-            <p:ph type="dt" idx="7"/>
+            <p:ph type="dt" idx="9"/>
           </p:nvPr>
         </p:nvSpPr>
         <p:spPr/>
@@ -5035,8 +4519,8 @@
         </p:nvSpPr>
         <p:spPr>
           <a:xfrm>
-            <a:off x="609480" y="273600"/>
-            <a:ext cx="10972440" cy="1144800"/>
+            <a:off x="609480" y="221040"/>
+            <a:ext cx="10972440" cy="1250280"/>
           </a:xfrm>
           <a:prstGeom prst="rect">
             <a:avLst/>
@@ -5051,11 +4535,11 @@
             <a:noAutofit/>
           </a:bodyPr>
           <a:p>
-            <a:endParaRPr b="0" lang="en-US" sz="1800" spc="-1" strike="noStrike">
-              <a:solidFill>
-                <a:srgbClr val="000000"/>
-              </a:solidFill>
-              <a:latin typeface="Century Schoolbook"/>
+            <a:pPr algn="ctr">
+              <a:buNone/>
+            </a:pPr>
+            <a:endParaRPr b="0" lang="ru-RU" sz="4400" spc="-1" strike="noStrike">
+              <a:latin typeface="Arial"/>
             </a:endParaRPr>
           </a:p>
         </p:txBody>
@@ -5088,20 +4572,8 @@
             <a:normAutofit/>
           </a:bodyPr>
           <a:p>
-            <a:pPr>
-              <a:lnSpc>
-                <a:spcPct val="95000"/>
-              </a:lnSpc>
-              <a:spcBef>
-                <a:spcPts val="1417"/>
-              </a:spcBef>
-              <a:buNone/>
-            </a:pPr>
-            <a:endParaRPr b="0" lang="en-US" sz="1800" spc="9" strike="noStrike">
-              <a:solidFill>
-                <a:srgbClr val="000000"/>
-              </a:solidFill>
-              <a:latin typeface="Century Schoolbook"/>
+            <a:endParaRPr b="0" lang="ru-RU" sz="3200" spc="-1" strike="noStrike">
+              <a:latin typeface="Arial"/>
             </a:endParaRPr>
           </a:p>
         </p:txBody>
@@ -5134,20 +4606,8 @@
             <a:normAutofit/>
           </a:bodyPr>
           <a:p>
-            <a:pPr>
-              <a:lnSpc>
-                <a:spcPct val="95000"/>
-              </a:lnSpc>
-              <a:spcBef>
-                <a:spcPts val="1417"/>
-              </a:spcBef>
-              <a:buNone/>
-            </a:pPr>
-            <a:endParaRPr b="0" lang="en-US" sz="1800" spc="9" strike="noStrike">
-              <a:solidFill>
-                <a:srgbClr val="000000"/>
-              </a:solidFill>
-              <a:latin typeface="Century Schoolbook"/>
+            <a:endParaRPr b="0" lang="ru-RU" sz="3200" spc="-1" strike="noStrike">
+              <a:latin typeface="Arial"/>
             </a:endParaRPr>
           </a:p>
         </p:txBody>
@@ -5180,20 +4640,8 @@
             <a:normAutofit/>
           </a:bodyPr>
           <a:p>
-            <a:pPr>
-              <a:lnSpc>
-                <a:spcPct val="95000"/>
-              </a:lnSpc>
-              <a:spcBef>
-                <a:spcPts val="1417"/>
-              </a:spcBef>
-              <a:buNone/>
-            </a:pPr>
-            <a:endParaRPr b="0" lang="en-US" sz="1800" spc="9" strike="noStrike">
-              <a:solidFill>
-                <a:srgbClr val="000000"/>
-              </a:solidFill>
-              <a:latin typeface="Century Schoolbook"/>
+            <a:endParaRPr b="0" lang="ru-RU" sz="3200" spc="-1" strike="noStrike">
+              <a:latin typeface="Arial"/>
             </a:endParaRPr>
           </a:p>
         </p:txBody>
@@ -5205,7 +4653,7 @@
             <a:spLocks noGrp="1"/>
           </p:cNvSpPr>
           <p:nvPr>
-            <p:ph type="ftr" idx="8"/>
+            <p:ph type="ftr" idx="7"/>
           </p:nvPr>
         </p:nvSpPr>
         <p:spPr/>
@@ -5225,14 +4673,14 @@
             <a:spLocks noGrp="1"/>
           </p:cNvSpPr>
           <p:nvPr>
-            <p:ph type="sldNum" idx="9"/>
+            <p:ph type="sldNum" idx="8"/>
           </p:nvPr>
         </p:nvSpPr>
         <p:spPr/>
         <p:txBody>
           <a:bodyPr/>
           <a:p>
-            <a:fld id="{86A64BDB-F2BA-48CC-B6CF-E44AB1FE706E}" type="slidenum">
+            <a:fld id="{B5173387-386F-49C9-A71D-A7228041860C}" type="slidenum">
               <a:t>&lt;#&gt;</a:t>
             </a:fld>
           </a:p>
@@ -5245,7 +4693,7 @@
             <a:spLocks noGrp="1"/>
           </p:cNvSpPr>
           <p:nvPr>
-            <p:ph type="dt" idx="7"/>
+            <p:ph type="dt" idx="9"/>
           </p:nvPr>
         </p:nvSpPr>
         <p:spPr/>
@@ -5293,8 +4741,8 @@
         </p:nvSpPr>
         <p:spPr>
           <a:xfrm>
-            <a:off x="609480" y="273600"/>
-            <a:ext cx="10972440" cy="1144800"/>
+            <a:off x="609480" y="221040"/>
+            <a:ext cx="10972440" cy="1250280"/>
           </a:xfrm>
           <a:prstGeom prst="rect">
             <a:avLst/>
@@ -5309,11 +4757,11 @@
             <a:noAutofit/>
           </a:bodyPr>
           <a:p>
-            <a:endParaRPr b="0" lang="en-US" sz="1800" spc="-1" strike="noStrike">
-              <a:solidFill>
-                <a:srgbClr val="000000"/>
-              </a:solidFill>
-              <a:latin typeface="Century Schoolbook"/>
+            <a:pPr algn="ctr">
+              <a:buNone/>
+            </a:pPr>
+            <a:endParaRPr b="0" lang="ru-RU" sz="4400" spc="-1" strike="noStrike">
+              <a:latin typeface="Arial"/>
             </a:endParaRPr>
           </a:p>
         </p:txBody>
@@ -5346,20 +4794,8 @@
             <a:normAutofit/>
           </a:bodyPr>
           <a:p>
-            <a:pPr>
-              <a:lnSpc>
-                <a:spcPct val="95000"/>
-              </a:lnSpc>
-              <a:spcBef>
-                <a:spcPts val="1417"/>
-              </a:spcBef>
-              <a:buNone/>
-            </a:pPr>
-            <a:endParaRPr b="0" lang="en-US" sz="1800" spc="9" strike="noStrike">
-              <a:solidFill>
-                <a:srgbClr val="000000"/>
-              </a:solidFill>
-              <a:latin typeface="Century Schoolbook"/>
+            <a:endParaRPr b="0" lang="ru-RU" sz="3200" spc="-1" strike="noStrike">
+              <a:latin typeface="Arial"/>
             </a:endParaRPr>
           </a:p>
         </p:txBody>
@@ -5392,20 +4828,8 @@
             <a:normAutofit/>
           </a:bodyPr>
           <a:p>
-            <a:pPr>
-              <a:lnSpc>
-                <a:spcPct val="95000"/>
-              </a:lnSpc>
-              <a:spcBef>
-                <a:spcPts val="1417"/>
-              </a:spcBef>
-              <a:buNone/>
-            </a:pPr>
-            <a:endParaRPr b="0" lang="en-US" sz="1800" spc="9" strike="noStrike">
-              <a:solidFill>
-                <a:srgbClr val="000000"/>
-              </a:solidFill>
-              <a:latin typeface="Century Schoolbook"/>
+            <a:endParaRPr b="0" lang="ru-RU" sz="3200" spc="-1" strike="noStrike">
+              <a:latin typeface="Arial"/>
             </a:endParaRPr>
           </a:p>
         </p:txBody>
@@ -5438,20 +4862,8 @@
             <a:normAutofit/>
           </a:bodyPr>
           <a:p>
-            <a:pPr>
-              <a:lnSpc>
-                <a:spcPct val="95000"/>
-              </a:lnSpc>
-              <a:spcBef>
-                <a:spcPts val="1417"/>
-              </a:spcBef>
-              <a:buNone/>
-            </a:pPr>
-            <a:endParaRPr b="0" lang="en-US" sz="1800" spc="9" strike="noStrike">
-              <a:solidFill>
-                <a:srgbClr val="000000"/>
-              </a:solidFill>
-              <a:latin typeface="Century Schoolbook"/>
+            <a:endParaRPr b="0" lang="ru-RU" sz="3200" spc="-1" strike="noStrike">
+              <a:latin typeface="Arial"/>
             </a:endParaRPr>
           </a:p>
         </p:txBody>
@@ -5463,7 +4875,7 @@
             <a:spLocks noGrp="1"/>
           </p:cNvSpPr>
           <p:nvPr>
-            <p:ph type="ftr" idx="8"/>
+            <p:ph type="ftr" idx="7"/>
           </p:nvPr>
         </p:nvSpPr>
         <p:spPr/>
@@ -5483,14 +4895,14 @@
             <a:spLocks noGrp="1"/>
           </p:cNvSpPr>
           <p:nvPr>
-            <p:ph type="sldNum" idx="9"/>
+            <p:ph type="sldNum" idx="8"/>
           </p:nvPr>
         </p:nvSpPr>
         <p:spPr/>
         <p:txBody>
           <a:bodyPr/>
           <a:p>
-            <a:fld id="{CD05E3C0-9C05-4ECC-A1E9-AA42777C6469}" type="slidenum">
+            <a:fld id="{C95C3C46-60F9-411E-8D0A-71A6FB9D119F}" type="slidenum">
               <a:t>&lt;#&gt;</a:t>
             </a:fld>
           </a:p>
@@ -5503,7 +4915,7 @@
             <a:spLocks noGrp="1"/>
           </p:cNvSpPr>
           <p:nvPr>
-            <p:ph type="dt" idx="7"/>
+            <p:ph type="dt" idx="9"/>
           </p:nvPr>
         </p:nvSpPr>
         <p:spPr/>
@@ -5551,8 +4963,8 @@
         </p:nvSpPr>
         <p:spPr>
           <a:xfrm>
-            <a:off x="609480" y="273600"/>
-            <a:ext cx="10972440" cy="1144800"/>
+            <a:off x="609480" y="221040"/>
+            <a:ext cx="10972440" cy="1250280"/>
           </a:xfrm>
           <a:prstGeom prst="rect">
             <a:avLst/>
@@ -5567,11 +4979,11 @@
             <a:noAutofit/>
           </a:bodyPr>
           <a:p>
-            <a:endParaRPr b="0" lang="en-US" sz="1800" spc="-1" strike="noStrike">
-              <a:solidFill>
-                <a:srgbClr val="000000"/>
-              </a:solidFill>
-              <a:latin typeface="Century Schoolbook"/>
+            <a:pPr algn="ctr">
+              <a:buNone/>
+            </a:pPr>
+            <a:endParaRPr b="0" lang="ru-RU" sz="4400" spc="-1" strike="noStrike">
+              <a:latin typeface="Arial"/>
             </a:endParaRPr>
           </a:p>
         </p:txBody>
@@ -5604,20 +5016,8 @@
             <a:normAutofit/>
           </a:bodyPr>
           <a:p>
-            <a:pPr>
-              <a:lnSpc>
-                <a:spcPct val="95000"/>
-              </a:lnSpc>
-              <a:spcBef>
-                <a:spcPts val="1417"/>
-              </a:spcBef>
-              <a:buNone/>
-            </a:pPr>
-            <a:endParaRPr b="0" lang="en-US" sz="1800" spc="9" strike="noStrike">
-              <a:solidFill>
-                <a:srgbClr val="000000"/>
-              </a:solidFill>
-              <a:latin typeface="Century Schoolbook"/>
+            <a:endParaRPr b="0" lang="ru-RU" sz="3200" spc="-1" strike="noStrike">
+              <a:latin typeface="Arial"/>
             </a:endParaRPr>
           </a:p>
         </p:txBody>
@@ -5650,20 +5050,8 @@
             <a:normAutofit/>
           </a:bodyPr>
           <a:p>
-            <a:pPr>
-              <a:lnSpc>
-                <a:spcPct val="95000"/>
-              </a:lnSpc>
-              <a:spcBef>
-                <a:spcPts val="1417"/>
-              </a:spcBef>
-              <a:buNone/>
-            </a:pPr>
-            <a:endParaRPr b="0" lang="en-US" sz="1800" spc="9" strike="noStrike">
-              <a:solidFill>
-                <a:srgbClr val="000000"/>
-              </a:solidFill>
-              <a:latin typeface="Century Schoolbook"/>
+            <a:endParaRPr b="0" lang="ru-RU" sz="3200" spc="-1" strike="noStrike">
+              <a:latin typeface="Arial"/>
             </a:endParaRPr>
           </a:p>
         </p:txBody>
@@ -5675,7 +5063,7 @@
             <a:spLocks noGrp="1"/>
           </p:cNvSpPr>
           <p:nvPr>
-            <p:ph type="ftr" idx="8"/>
+            <p:ph type="ftr" idx="7"/>
           </p:nvPr>
         </p:nvSpPr>
         <p:spPr/>
@@ -5695,14 +5083,14 @@
             <a:spLocks noGrp="1"/>
           </p:cNvSpPr>
           <p:nvPr>
-            <p:ph type="sldNum" idx="9"/>
+            <p:ph type="sldNum" idx="8"/>
           </p:nvPr>
         </p:nvSpPr>
         <p:spPr/>
         <p:txBody>
           <a:bodyPr/>
           <a:p>
-            <a:fld id="{CD0F1686-A066-4C5A-99E5-9BA0B80B6CF4}" type="slidenum">
+            <a:fld id="{9FCEC24F-2B63-4ECD-8DC3-FA833C70F238}" type="slidenum">
               <a:t>&lt;#&gt;</a:t>
             </a:fld>
           </a:p>
@@ -5715,7 +5103,7 @@
             <a:spLocks noGrp="1"/>
           </p:cNvSpPr>
           <p:nvPr>
-            <p:ph type="dt" idx="7"/>
+            <p:ph type="dt" idx="9"/>
           </p:nvPr>
         </p:nvSpPr>
         <p:spPr/>
@@ -5763,8 +5151,8 @@
         </p:nvSpPr>
         <p:spPr>
           <a:xfrm>
-            <a:off x="609480" y="273600"/>
-            <a:ext cx="10972440" cy="1144800"/>
+            <a:off x="609480" y="221040"/>
+            <a:ext cx="10972440" cy="1250280"/>
           </a:xfrm>
           <a:prstGeom prst="rect">
             <a:avLst/>
@@ -5779,11 +5167,11 @@
             <a:noAutofit/>
           </a:bodyPr>
           <a:p>
-            <a:endParaRPr b="0" lang="en-US" sz="1800" spc="-1" strike="noStrike">
-              <a:solidFill>
-                <a:srgbClr val="000000"/>
-              </a:solidFill>
-              <a:latin typeface="Century Schoolbook"/>
+            <a:pPr algn="ctr">
+              <a:buNone/>
+            </a:pPr>
+            <a:endParaRPr b="0" lang="ru-RU" sz="4400" spc="-1" strike="noStrike">
+              <a:latin typeface="Arial"/>
             </a:endParaRPr>
           </a:p>
         </p:txBody>
@@ -5816,20 +5204,8 @@
             <a:normAutofit/>
           </a:bodyPr>
           <a:p>
-            <a:pPr>
-              <a:lnSpc>
-                <a:spcPct val="95000"/>
-              </a:lnSpc>
-              <a:spcBef>
-                <a:spcPts val="1417"/>
-              </a:spcBef>
-              <a:buNone/>
-            </a:pPr>
-            <a:endParaRPr b="0" lang="en-US" sz="1800" spc="9" strike="noStrike">
-              <a:solidFill>
-                <a:srgbClr val="000000"/>
-              </a:solidFill>
-              <a:latin typeface="Century Schoolbook"/>
+            <a:endParaRPr b="0" lang="ru-RU" sz="3200" spc="-1" strike="noStrike">
+              <a:latin typeface="Arial"/>
             </a:endParaRPr>
           </a:p>
         </p:txBody>
@@ -5862,20 +5238,8 @@
             <a:normAutofit/>
           </a:bodyPr>
           <a:p>
-            <a:pPr>
-              <a:lnSpc>
-                <a:spcPct val="95000"/>
-              </a:lnSpc>
-              <a:spcBef>
-                <a:spcPts val="1417"/>
-              </a:spcBef>
-              <a:buNone/>
-            </a:pPr>
-            <a:endParaRPr b="0" lang="en-US" sz="1800" spc="9" strike="noStrike">
-              <a:solidFill>
-                <a:srgbClr val="000000"/>
-              </a:solidFill>
-              <a:latin typeface="Century Schoolbook"/>
+            <a:endParaRPr b="0" lang="ru-RU" sz="3200" spc="-1" strike="noStrike">
+              <a:latin typeface="Arial"/>
             </a:endParaRPr>
           </a:p>
         </p:txBody>
@@ -5908,20 +5272,8 @@
             <a:normAutofit/>
           </a:bodyPr>
           <a:p>
-            <a:pPr>
-              <a:lnSpc>
-                <a:spcPct val="95000"/>
-              </a:lnSpc>
-              <a:spcBef>
-                <a:spcPts val="1417"/>
-              </a:spcBef>
-              <a:buNone/>
-            </a:pPr>
-            <a:endParaRPr b="0" lang="en-US" sz="1800" spc="9" strike="noStrike">
-              <a:solidFill>
-                <a:srgbClr val="000000"/>
-              </a:solidFill>
-              <a:latin typeface="Century Schoolbook"/>
+            <a:endParaRPr b="0" lang="ru-RU" sz="3200" spc="-1" strike="noStrike">
+              <a:latin typeface="Arial"/>
             </a:endParaRPr>
           </a:p>
         </p:txBody>
@@ -5954,20 +5306,8 @@
             <a:normAutofit/>
           </a:bodyPr>
           <a:p>
-            <a:pPr>
-              <a:lnSpc>
-                <a:spcPct val="95000"/>
-              </a:lnSpc>
-              <a:spcBef>
-                <a:spcPts val="1417"/>
-              </a:spcBef>
-              <a:buNone/>
-            </a:pPr>
-            <a:endParaRPr b="0" lang="en-US" sz="1800" spc="9" strike="noStrike">
-              <a:solidFill>
-                <a:srgbClr val="000000"/>
-              </a:solidFill>
-              <a:latin typeface="Century Schoolbook"/>
+            <a:endParaRPr b="0" lang="ru-RU" sz="3200" spc="-1" strike="noStrike">
+              <a:latin typeface="Arial"/>
             </a:endParaRPr>
           </a:p>
         </p:txBody>
@@ -5979,7 +5319,7 @@
             <a:spLocks noGrp="1"/>
           </p:cNvSpPr>
           <p:nvPr>
-            <p:ph type="ftr" idx="8"/>
+            <p:ph type="ftr" idx="7"/>
           </p:nvPr>
         </p:nvSpPr>
         <p:spPr/>
@@ -5999,14 +5339,14 @@
             <a:spLocks noGrp="1"/>
           </p:cNvSpPr>
           <p:nvPr>
-            <p:ph type="sldNum" idx="9"/>
+            <p:ph type="sldNum" idx="8"/>
           </p:nvPr>
         </p:nvSpPr>
         <p:spPr/>
         <p:txBody>
           <a:bodyPr/>
           <a:p>
-            <a:fld id="{7D6FC244-2F7C-43ED-BD09-769844264432}" type="slidenum">
+            <a:fld id="{709D9166-0A74-4B46-A4D7-FC3D62466F99}" type="slidenum">
               <a:t>&lt;#&gt;</a:t>
             </a:fld>
           </a:p>
@@ -6019,7 +5359,7 @@
             <a:spLocks noGrp="1"/>
           </p:cNvSpPr>
           <p:nvPr>
-            <p:ph type="dt" idx="7"/>
+            <p:ph type="dt" idx="9"/>
           </p:nvPr>
         </p:nvSpPr>
         <p:spPr/>
@@ -6067,8 +5407,8 @@
         </p:nvSpPr>
         <p:spPr>
           <a:xfrm>
-            <a:off x="609480" y="273600"/>
-            <a:ext cx="10972440" cy="1144800"/>
+            <a:off x="609480" y="221040"/>
+            <a:ext cx="10972440" cy="1250280"/>
           </a:xfrm>
           <a:prstGeom prst="rect">
             <a:avLst/>
@@ -6083,11 +5423,11 @@
             <a:noAutofit/>
           </a:bodyPr>
           <a:p>
-            <a:endParaRPr b="0" lang="en-US" sz="1800" spc="-1" strike="noStrike">
-              <a:solidFill>
-                <a:srgbClr val="000000"/>
-              </a:solidFill>
-              <a:latin typeface="Century Schoolbook"/>
+            <a:pPr algn="ctr">
+              <a:buNone/>
+            </a:pPr>
+            <a:endParaRPr b="0" lang="ru-RU" sz="4400" spc="-1" strike="noStrike">
+              <a:latin typeface="Arial"/>
             </a:endParaRPr>
           </a:p>
         </p:txBody>
@@ -6117,23 +5457,11 @@
         </p:spPr>
         <p:txBody>
           <a:bodyPr lIns="0" rIns="0" tIns="0" bIns="0" anchor="t">
-            <a:normAutofit/>
-          </a:bodyPr>
-          <a:p>
-            <a:pPr>
-              <a:lnSpc>
-                <a:spcPct val="95000"/>
-              </a:lnSpc>
-              <a:spcBef>
-                <a:spcPts val="1417"/>
-              </a:spcBef>
-              <a:buNone/>
-            </a:pPr>
-            <a:endParaRPr b="0" lang="en-US" sz="1800" spc="9" strike="noStrike">
-              <a:solidFill>
-                <a:srgbClr val="000000"/>
-              </a:solidFill>
-              <a:latin typeface="Century Schoolbook"/>
+            <a:normAutofit fontScale="91000"/>
+          </a:bodyPr>
+          <a:p>
+            <a:endParaRPr b="0" lang="ru-RU" sz="3200" spc="-1" strike="noStrike">
+              <a:latin typeface="Arial"/>
             </a:endParaRPr>
           </a:p>
         </p:txBody>
@@ -6163,23 +5491,11 @@
         </p:spPr>
         <p:txBody>
           <a:bodyPr lIns="0" rIns="0" tIns="0" bIns="0" anchor="t">
-            <a:normAutofit/>
-          </a:bodyPr>
-          <a:p>
-            <a:pPr>
-              <a:lnSpc>
-                <a:spcPct val="95000"/>
-              </a:lnSpc>
-              <a:spcBef>
-                <a:spcPts val="1417"/>
-              </a:spcBef>
-              <a:buNone/>
-            </a:pPr>
-            <a:endParaRPr b="0" lang="en-US" sz="1800" spc="9" strike="noStrike">
-              <a:solidFill>
-                <a:srgbClr val="000000"/>
-              </a:solidFill>
-              <a:latin typeface="Century Schoolbook"/>
+            <a:normAutofit fontScale="91000"/>
+          </a:bodyPr>
+          <a:p>
+            <a:endParaRPr b="0" lang="ru-RU" sz="3200" spc="-1" strike="noStrike">
+              <a:latin typeface="Arial"/>
             </a:endParaRPr>
           </a:p>
         </p:txBody>
@@ -6209,23 +5525,11 @@
         </p:spPr>
         <p:txBody>
           <a:bodyPr lIns="0" rIns="0" tIns="0" bIns="0" anchor="t">
-            <a:normAutofit/>
-          </a:bodyPr>
-          <a:p>
-            <a:pPr>
-              <a:lnSpc>
-                <a:spcPct val="95000"/>
-              </a:lnSpc>
-              <a:spcBef>
-                <a:spcPts val="1417"/>
-              </a:spcBef>
-              <a:buNone/>
-            </a:pPr>
-            <a:endParaRPr b="0" lang="en-US" sz="1800" spc="9" strike="noStrike">
-              <a:solidFill>
-                <a:srgbClr val="000000"/>
-              </a:solidFill>
-              <a:latin typeface="Century Schoolbook"/>
+            <a:normAutofit fontScale="91000"/>
+          </a:bodyPr>
+          <a:p>
+            <a:endParaRPr b="0" lang="ru-RU" sz="3200" spc="-1" strike="noStrike">
+              <a:latin typeface="Arial"/>
             </a:endParaRPr>
           </a:p>
         </p:txBody>
@@ -6255,23 +5559,11 @@
         </p:spPr>
         <p:txBody>
           <a:bodyPr lIns="0" rIns="0" tIns="0" bIns="0" anchor="t">
-            <a:normAutofit/>
-          </a:bodyPr>
-          <a:p>
-            <a:pPr>
-              <a:lnSpc>
-                <a:spcPct val="95000"/>
-              </a:lnSpc>
-              <a:spcBef>
-                <a:spcPts val="1417"/>
-              </a:spcBef>
-              <a:buNone/>
-            </a:pPr>
-            <a:endParaRPr b="0" lang="en-US" sz="1800" spc="9" strike="noStrike">
-              <a:solidFill>
-                <a:srgbClr val="000000"/>
-              </a:solidFill>
-              <a:latin typeface="Century Schoolbook"/>
+            <a:normAutofit fontScale="91000"/>
+          </a:bodyPr>
+          <a:p>
+            <a:endParaRPr b="0" lang="ru-RU" sz="3200" spc="-1" strike="noStrike">
+              <a:latin typeface="Arial"/>
             </a:endParaRPr>
           </a:p>
         </p:txBody>
@@ -6301,23 +5593,11 @@
         </p:spPr>
         <p:txBody>
           <a:bodyPr lIns="0" rIns="0" tIns="0" bIns="0" anchor="t">
-            <a:normAutofit/>
-          </a:bodyPr>
-          <a:p>
-            <a:pPr>
-              <a:lnSpc>
-                <a:spcPct val="95000"/>
-              </a:lnSpc>
-              <a:spcBef>
-                <a:spcPts val="1417"/>
-              </a:spcBef>
-              <a:buNone/>
-            </a:pPr>
-            <a:endParaRPr b="0" lang="en-US" sz="1800" spc="9" strike="noStrike">
-              <a:solidFill>
-                <a:srgbClr val="000000"/>
-              </a:solidFill>
-              <a:latin typeface="Century Schoolbook"/>
+            <a:normAutofit fontScale="91000"/>
+          </a:bodyPr>
+          <a:p>
+            <a:endParaRPr b="0" lang="ru-RU" sz="3200" spc="-1" strike="noStrike">
+              <a:latin typeface="Arial"/>
             </a:endParaRPr>
           </a:p>
         </p:txBody>
@@ -6347,23 +5627,11 @@
         </p:spPr>
         <p:txBody>
           <a:bodyPr lIns="0" rIns="0" tIns="0" bIns="0" anchor="t">
-            <a:normAutofit/>
-          </a:bodyPr>
-          <a:p>
-            <a:pPr>
-              <a:lnSpc>
-                <a:spcPct val="95000"/>
-              </a:lnSpc>
-              <a:spcBef>
-                <a:spcPts val="1417"/>
-              </a:spcBef>
-              <a:buNone/>
-            </a:pPr>
-            <a:endParaRPr b="0" lang="en-US" sz="1800" spc="9" strike="noStrike">
-              <a:solidFill>
-                <a:srgbClr val="000000"/>
-              </a:solidFill>
-              <a:latin typeface="Century Schoolbook"/>
+            <a:normAutofit fontScale="91000"/>
+          </a:bodyPr>
+          <a:p>
+            <a:endParaRPr b="0" lang="ru-RU" sz="3200" spc="-1" strike="noStrike">
+              <a:latin typeface="Arial"/>
             </a:endParaRPr>
           </a:p>
         </p:txBody>
@@ -6375,7 +5643,7 @@
             <a:spLocks noGrp="1"/>
           </p:cNvSpPr>
           <p:nvPr>
-            <p:ph type="ftr" idx="8"/>
+            <p:ph type="ftr" idx="7"/>
           </p:nvPr>
         </p:nvSpPr>
         <p:spPr/>
@@ -6395,14 +5663,14 @@
             <a:spLocks noGrp="1"/>
           </p:cNvSpPr>
           <p:nvPr>
-            <p:ph type="sldNum" idx="9"/>
+            <p:ph type="sldNum" idx="8"/>
           </p:nvPr>
         </p:nvSpPr>
         <p:spPr/>
         <p:txBody>
           <a:bodyPr/>
           <a:p>
-            <a:fld id="{99161B28-0862-4D42-A10B-1BCA9053DC02}" type="slidenum">
+            <a:fld id="{CB2C8C30-D0DC-4DF4-A1D6-60BC737993E4}" type="slidenum">
               <a:t>&lt;#&gt;</a:t>
             </a:fld>
           </a:p>
@@ -6415,7 +5683,7 @@
             <a:spLocks noGrp="1"/>
           </p:cNvSpPr>
           <p:nvPr>
-            <p:ph type="dt" idx="7"/>
+            <p:ph type="dt" idx="9"/>
           </p:nvPr>
         </p:nvSpPr>
         <p:spPr/>
@@ -6463,8 +5731,8 @@
         </p:nvSpPr>
         <p:spPr>
           <a:xfrm>
-            <a:off x="609480" y="273600"/>
-            <a:ext cx="10972440" cy="1144800"/>
+            <a:off x="609480" y="221040"/>
+            <a:ext cx="10972440" cy="1250280"/>
           </a:xfrm>
           <a:prstGeom prst="rect">
             <a:avLst/>
@@ -6479,11 +5747,11 @@
             <a:noAutofit/>
           </a:bodyPr>
           <a:p>
-            <a:endParaRPr b="0" lang="en-US" sz="1800" spc="-1" strike="noStrike">
-              <a:solidFill>
-                <a:srgbClr val="000000"/>
-              </a:solidFill>
-              <a:latin typeface="Century Schoolbook"/>
+            <a:pPr algn="ctr">
+              <a:buNone/>
+            </a:pPr>
+            <a:endParaRPr b="0" lang="ru-RU" sz="4400" spc="-1" strike="noStrike">
+              <a:latin typeface="Arial"/>
             </a:endParaRPr>
           </a:p>
         </p:txBody>
@@ -6516,20 +5784,8 @@
             <a:normAutofit/>
           </a:bodyPr>
           <a:p>
-            <a:pPr>
-              <a:lnSpc>
-                <a:spcPct val="95000"/>
-              </a:lnSpc>
-              <a:spcBef>
-                <a:spcPts val="1417"/>
-              </a:spcBef>
-              <a:buNone/>
-            </a:pPr>
-            <a:endParaRPr b="0" lang="en-US" sz="1800" spc="9" strike="noStrike">
-              <a:solidFill>
-                <a:srgbClr val="000000"/>
-              </a:solidFill>
-              <a:latin typeface="Century Schoolbook"/>
+            <a:endParaRPr b="0" lang="ru-RU" sz="3200" spc="-1" strike="noStrike">
+              <a:latin typeface="Arial"/>
             </a:endParaRPr>
           </a:p>
         </p:txBody>
@@ -6562,20 +5818,8 @@
             <a:normAutofit/>
           </a:bodyPr>
           <a:p>
-            <a:pPr>
-              <a:lnSpc>
-                <a:spcPct val="95000"/>
-              </a:lnSpc>
-              <a:spcBef>
-                <a:spcPts val="1417"/>
-              </a:spcBef>
-              <a:buNone/>
-            </a:pPr>
-            <a:endParaRPr b="0" lang="en-US" sz="1800" spc="9" strike="noStrike">
-              <a:solidFill>
-                <a:srgbClr val="000000"/>
-              </a:solidFill>
-              <a:latin typeface="Century Schoolbook"/>
+            <a:endParaRPr b="0" lang="ru-RU" sz="3200" spc="-1" strike="noStrike">
+              <a:latin typeface="Arial"/>
             </a:endParaRPr>
           </a:p>
         </p:txBody>
@@ -6587,7 +5831,7 @@
             <a:spLocks noGrp="1"/>
           </p:cNvSpPr>
           <p:nvPr>
-            <p:ph type="ftr" idx="2"/>
+            <p:ph type="ftr" idx="1"/>
           </p:nvPr>
         </p:nvSpPr>
         <p:spPr/>
@@ -6607,14 +5851,14 @@
             <a:spLocks noGrp="1"/>
           </p:cNvSpPr>
           <p:nvPr>
-            <p:ph type="sldNum" idx="3"/>
+            <p:ph type="sldNum" idx="2"/>
           </p:nvPr>
         </p:nvSpPr>
         <p:spPr/>
         <p:txBody>
           <a:bodyPr/>
           <a:p>
-            <a:fld id="{AFC00FF6-8331-4606-9D6E-05BB14175325}" type="slidenum">
+            <a:fld id="{7D865A8F-5A4A-4417-B1EA-94D4FB6FD00D}" type="slidenum">
               <a:t>&lt;#&gt;</a:t>
             </a:fld>
           </a:p>
@@ -6627,7 +5871,7 @@
             <a:spLocks noGrp="1"/>
           </p:cNvSpPr>
           <p:nvPr>
-            <p:ph type="dt" idx="1"/>
+            <p:ph type="dt" idx="3"/>
           </p:nvPr>
         </p:nvSpPr>
         <p:spPr/>
@@ -6675,8 +5919,8 @@
         </p:nvSpPr>
         <p:spPr>
           <a:xfrm>
-            <a:off x="609480" y="273600"/>
-            <a:ext cx="10972440" cy="1144800"/>
+            <a:off x="609480" y="221040"/>
+            <a:ext cx="10972440" cy="1250280"/>
           </a:xfrm>
           <a:prstGeom prst="rect">
             <a:avLst/>
@@ -6691,11 +5935,11 @@
             <a:noAutofit/>
           </a:bodyPr>
           <a:p>
-            <a:endParaRPr b="0" lang="en-US" sz="1800" spc="-1" strike="noStrike">
-              <a:solidFill>
-                <a:srgbClr val="000000"/>
-              </a:solidFill>
-              <a:latin typeface="Century Schoolbook"/>
+            <a:pPr algn="ctr">
+              <a:buNone/>
+            </a:pPr>
+            <a:endParaRPr b="0" lang="ru-RU" sz="4400" spc="-1" strike="noStrike">
+              <a:latin typeface="Arial"/>
             </a:endParaRPr>
           </a:p>
         </p:txBody>
@@ -6707,7 +5951,7 @@
             <a:spLocks noGrp="1"/>
           </p:cNvSpPr>
           <p:nvPr>
-            <p:ph type="ftr" idx="2"/>
+            <p:ph type="ftr" idx="1"/>
           </p:nvPr>
         </p:nvSpPr>
         <p:spPr/>
@@ -6727,14 +5971,14 @@
             <a:spLocks noGrp="1"/>
           </p:cNvSpPr>
           <p:nvPr>
-            <p:ph type="sldNum" idx="3"/>
+            <p:ph type="sldNum" idx="2"/>
           </p:nvPr>
         </p:nvSpPr>
         <p:spPr/>
         <p:txBody>
           <a:bodyPr/>
           <a:p>
-            <a:fld id="{694BC89C-6595-438F-9D66-4AB96004CAE2}" type="slidenum">
+            <a:fld id="{D1E5D2F2-B84A-444B-AA5B-3EB0900D195F}" type="slidenum">
               <a:t>&lt;#&gt;</a:t>
             </a:fld>
           </a:p>
@@ -6747,7 +5991,7 @@
             <a:spLocks noGrp="1"/>
           </p:cNvSpPr>
           <p:nvPr>
-            <p:ph type="dt" idx="1"/>
+            <p:ph type="dt" idx="3"/>
           </p:nvPr>
         </p:nvSpPr>
         <p:spPr/>
@@ -6827,7 +6071,7 @@
             <a:spLocks noGrp="1"/>
           </p:cNvSpPr>
           <p:nvPr>
-            <p:ph type="ftr" idx="2"/>
+            <p:ph type="ftr" idx="1"/>
           </p:nvPr>
         </p:nvSpPr>
         <p:spPr/>
@@ -6847,14 +6091,14 @@
             <a:spLocks noGrp="1"/>
           </p:cNvSpPr>
           <p:nvPr>
-            <p:ph type="sldNum" idx="3"/>
+            <p:ph type="sldNum" idx="2"/>
           </p:nvPr>
         </p:nvSpPr>
         <p:spPr/>
         <p:txBody>
           <a:bodyPr/>
           <a:p>
-            <a:fld id="{C965AC02-B94B-4F8C-B8E7-B989E6666BFF}" type="slidenum">
+            <a:fld id="{59C98976-B053-430C-AA6D-B8B21EA65FC4}" type="slidenum">
               <a:t>&lt;#&gt;</a:t>
             </a:fld>
           </a:p>
@@ -6867,7 +6111,7 @@
             <a:spLocks noGrp="1"/>
           </p:cNvSpPr>
           <p:nvPr>
-            <p:ph type="dt" idx="1"/>
+            <p:ph type="dt" idx="3"/>
           </p:nvPr>
         </p:nvSpPr>
         <p:spPr/>
@@ -6915,8 +6159,8 @@
         </p:nvSpPr>
         <p:spPr>
           <a:xfrm>
-            <a:off x="609480" y="273600"/>
-            <a:ext cx="10972440" cy="1144800"/>
+            <a:off x="609480" y="221040"/>
+            <a:ext cx="10972440" cy="1250280"/>
           </a:xfrm>
           <a:prstGeom prst="rect">
             <a:avLst/>
@@ -6931,11 +6175,11 @@
             <a:noAutofit/>
           </a:bodyPr>
           <a:p>
-            <a:endParaRPr b="0" lang="en-US" sz="1800" spc="-1" strike="noStrike">
-              <a:solidFill>
-                <a:srgbClr val="000000"/>
-              </a:solidFill>
-              <a:latin typeface="Century Schoolbook"/>
+            <a:pPr algn="ctr">
+              <a:buNone/>
+            </a:pPr>
+            <a:endParaRPr b="0" lang="ru-RU" sz="4400" spc="-1" strike="noStrike">
+              <a:latin typeface="Arial"/>
             </a:endParaRPr>
           </a:p>
         </p:txBody>
@@ -6968,20 +6212,8 @@
             <a:normAutofit/>
           </a:bodyPr>
           <a:p>
-            <a:pPr>
-              <a:lnSpc>
-                <a:spcPct val="95000"/>
-              </a:lnSpc>
-              <a:spcBef>
-                <a:spcPts val="1417"/>
-              </a:spcBef>
-              <a:buNone/>
-            </a:pPr>
-            <a:endParaRPr b="0" lang="en-US" sz="1800" spc="9" strike="noStrike">
-              <a:solidFill>
-                <a:srgbClr val="000000"/>
-              </a:solidFill>
-              <a:latin typeface="Century Schoolbook"/>
+            <a:endParaRPr b="0" lang="ru-RU" sz="3200" spc="-1" strike="noStrike">
+              <a:latin typeface="Arial"/>
             </a:endParaRPr>
           </a:p>
         </p:txBody>
@@ -7014,20 +6246,8 @@
             <a:normAutofit/>
           </a:bodyPr>
           <a:p>
-            <a:pPr>
-              <a:lnSpc>
-                <a:spcPct val="95000"/>
-              </a:lnSpc>
-              <a:spcBef>
-                <a:spcPts val="1417"/>
-              </a:spcBef>
-              <a:buNone/>
-            </a:pPr>
-            <a:endParaRPr b="0" lang="en-US" sz="1800" spc="9" strike="noStrike">
-              <a:solidFill>
-                <a:srgbClr val="000000"/>
-              </a:solidFill>
-              <a:latin typeface="Century Schoolbook"/>
+            <a:endParaRPr b="0" lang="ru-RU" sz="3200" spc="-1" strike="noStrike">
+              <a:latin typeface="Arial"/>
             </a:endParaRPr>
           </a:p>
         </p:txBody>
@@ -7060,20 +6280,8 @@
             <a:normAutofit/>
           </a:bodyPr>
           <a:p>
-            <a:pPr>
-              <a:lnSpc>
-                <a:spcPct val="95000"/>
-              </a:lnSpc>
-              <a:spcBef>
-                <a:spcPts val="1417"/>
-              </a:spcBef>
-              <a:buNone/>
-            </a:pPr>
-            <a:endParaRPr b="0" lang="en-US" sz="1800" spc="9" strike="noStrike">
-              <a:solidFill>
-                <a:srgbClr val="000000"/>
-              </a:solidFill>
-              <a:latin typeface="Century Schoolbook"/>
+            <a:endParaRPr b="0" lang="ru-RU" sz="3200" spc="-1" strike="noStrike">
+              <a:latin typeface="Arial"/>
             </a:endParaRPr>
           </a:p>
         </p:txBody>
@@ -7085,7 +6293,7 @@
             <a:spLocks noGrp="1"/>
           </p:cNvSpPr>
           <p:nvPr>
-            <p:ph type="ftr" idx="2"/>
+            <p:ph type="ftr" idx="1"/>
           </p:nvPr>
         </p:nvSpPr>
         <p:spPr/>
@@ -7105,14 +6313,14 @@
             <a:spLocks noGrp="1"/>
           </p:cNvSpPr>
           <p:nvPr>
-            <p:ph type="sldNum" idx="3"/>
+            <p:ph type="sldNum" idx="2"/>
           </p:nvPr>
         </p:nvSpPr>
         <p:spPr/>
         <p:txBody>
           <a:bodyPr/>
           <a:p>
-            <a:fld id="{B2C442AC-57ED-453A-8B69-EF588E63E9FB}" type="slidenum">
+            <a:fld id="{ABD3C25E-3A3C-4D6B-BA06-76712A0F73DA}" type="slidenum">
               <a:t>&lt;#&gt;</a:t>
             </a:fld>
           </a:p>
@@ -7125,7 +6333,7 @@
             <a:spLocks noGrp="1"/>
           </p:cNvSpPr>
           <p:nvPr>
-            <p:ph type="dt" idx="1"/>
+            <p:ph type="dt" idx="3"/>
           </p:nvPr>
         </p:nvSpPr>
         <p:spPr/>
@@ -7173,8 +6381,8 @@
         </p:nvSpPr>
         <p:spPr>
           <a:xfrm>
-            <a:off x="609480" y="273600"/>
-            <a:ext cx="10972440" cy="1144800"/>
+            <a:off x="609480" y="221040"/>
+            <a:ext cx="10972440" cy="1250280"/>
           </a:xfrm>
           <a:prstGeom prst="rect">
             <a:avLst/>
@@ -7189,11 +6397,11 @@
             <a:noAutofit/>
           </a:bodyPr>
           <a:p>
-            <a:endParaRPr b="0" lang="en-US" sz="1800" spc="-1" strike="noStrike">
-              <a:solidFill>
-                <a:srgbClr val="000000"/>
-              </a:solidFill>
-              <a:latin typeface="Century Schoolbook"/>
+            <a:pPr algn="ctr">
+              <a:buNone/>
+            </a:pPr>
+            <a:endParaRPr b="0" lang="ru-RU" sz="4400" spc="-1" strike="noStrike">
+              <a:latin typeface="Arial"/>
             </a:endParaRPr>
           </a:p>
         </p:txBody>
@@ -7226,20 +6434,8 @@
             <a:normAutofit/>
           </a:bodyPr>
           <a:p>
-            <a:pPr>
-              <a:lnSpc>
-                <a:spcPct val="95000"/>
-              </a:lnSpc>
-              <a:spcBef>
-                <a:spcPts val="1417"/>
-              </a:spcBef>
-              <a:buNone/>
-            </a:pPr>
-            <a:endParaRPr b="0" lang="en-US" sz="1800" spc="9" strike="noStrike">
-              <a:solidFill>
-                <a:srgbClr val="000000"/>
-              </a:solidFill>
-              <a:latin typeface="Century Schoolbook"/>
+            <a:endParaRPr b="0" lang="ru-RU" sz="3200" spc="-1" strike="noStrike">
+              <a:latin typeface="Arial"/>
             </a:endParaRPr>
           </a:p>
         </p:txBody>
@@ -7272,20 +6468,8 @@
             <a:normAutofit/>
           </a:bodyPr>
           <a:p>
-            <a:pPr>
-              <a:lnSpc>
-                <a:spcPct val="95000"/>
-              </a:lnSpc>
-              <a:spcBef>
-                <a:spcPts val="1417"/>
-              </a:spcBef>
-              <a:buNone/>
-            </a:pPr>
-            <a:endParaRPr b="0" lang="en-US" sz="1800" spc="9" strike="noStrike">
-              <a:solidFill>
-                <a:srgbClr val="000000"/>
-              </a:solidFill>
-              <a:latin typeface="Century Schoolbook"/>
+            <a:endParaRPr b="0" lang="ru-RU" sz="3200" spc="-1" strike="noStrike">
+              <a:latin typeface="Arial"/>
             </a:endParaRPr>
           </a:p>
         </p:txBody>
@@ -7318,20 +6502,8 @@
             <a:normAutofit/>
           </a:bodyPr>
           <a:p>
-            <a:pPr>
-              <a:lnSpc>
-                <a:spcPct val="95000"/>
-              </a:lnSpc>
-              <a:spcBef>
-                <a:spcPts val="1417"/>
-              </a:spcBef>
-              <a:buNone/>
-            </a:pPr>
-            <a:endParaRPr b="0" lang="en-US" sz="1800" spc="9" strike="noStrike">
-              <a:solidFill>
-                <a:srgbClr val="000000"/>
-              </a:solidFill>
-              <a:latin typeface="Century Schoolbook"/>
+            <a:endParaRPr b="0" lang="ru-RU" sz="3200" spc="-1" strike="noStrike">
+              <a:latin typeface="Arial"/>
             </a:endParaRPr>
           </a:p>
         </p:txBody>
@@ -7343,7 +6515,7 @@
             <a:spLocks noGrp="1"/>
           </p:cNvSpPr>
           <p:nvPr>
-            <p:ph type="ftr" idx="2"/>
+            <p:ph type="ftr" idx="1"/>
           </p:nvPr>
         </p:nvSpPr>
         <p:spPr/>
@@ -7363,14 +6535,14 @@
             <a:spLocks noGrp="1"/>
           </p:cNvSpPr>
           <p:nvPr>
-            <p:ph type="sldNum" idx="3"/>
+            <p:ph type="sldNum" idx="2"/>
           </p:nvPr>
         </p:nvSpPr>
         <p:spPr/>
         <p:txBody>
           <a:bodyPr/>
           <a:p>
-            <a:fld id="{19B04D55-EA85-4C32-917A-1251AB388F89}" type="slidenum">
+            <a:fld id="{7A3AE871-A509-4685-8B4B-03B1F7984AE4}" type="slidenum">
               <a:t>&lt;#&gt;</a:t>
             </a:fld>
           </a:p>
@@ -7383,7 +6555,7 @@
             <a:spLocks noGrp="1"/>
           </p:cNvSpPr>
           <p:nvPr>
-            <p:ph type="dt" idx="1"/>
+            <p:ph type="dt" idx="3"/>
           </p:nvPr>
         </p:nvSpPr>
         <p:spPr/>
@@ -7431,8 +6603,8 @@
         </p:nvSpPr>
         <p:spPr>
           <a:xfrm>
-            <a:off x="609480" y="273600"/>
-            <a:ext cx="10972440" cy="1144800"/>
+            <a:off x="609480" y="221040"/>
+            <a:ext cx="10972440" cy="1250280"/>
           </a:xfrm>
           <a:prstGeom prst="rect">
             <a:avLst/>
@@ -7447,11 +6619,11 @@
             <a:noAutofit/>
           </a:bodyPr>
           <a:p>
-            <a:endParaRPr b="0" lang="en-US" sz="1800" spc="-1" strike="noStrike">
-              <a:solidFill>
-                <a:srgbClr val="000000"/>
-              </a:solidFill>
-              <a:latin typeface="Century Schoolbook"/>
+            <a:pPr algn="ctr">
+              <a:buNone/>
+            </a:pPr>
+            <a:endParaRPr b="0" lang="ru-RU" sz="4400" spc="-1" strike="noStrike">
+              <a:latin typeface="Arial"/>
             </a:endParaRPr>
           </a:p>
         </p:txBody>
@@ -7484,20 +6656,8 @@
             <a:normAutofit/>
           </a:bodyPr>
           <a:p>
-            <a:pPr>
-              <a:lnSpc>
-                <a:spcPct val="95000"/>
-              </a:lnSpc>
-              <a:spcBef>
-                <a:spcPts val="1417"/>
-              </a:spcBef>
-              <a:buNone/>
-            </a:pPr>
-            <a:endParaRPr b="0" lang="en-US" sz="1800" spc="9" strike="noStrike">
-              <a:solidFill>
-                <a:srgbClr val="000000"/>
-              </a:solidFill>
-              <a:latin typeface="Century Schoolbook"/>
+            <a:endParaRPr b="0" lang="ru-RU" sz="3200" spc="-1" strike="noStrike">
+              <a:latin typeface="Arial"/>
             </a:endParaRPr>
           </a:p>
         </p:txBody>
@@ -7530,20 +6690,8 @@
             <a:normAutofit/>
           </a:bodyPr>
           <a:p>
-            <a:pPr>
-              <a:lnSpc>
-                <a:spcPct val="95000"/>
-              </a:lnSpc>
-              <a:spcBef>
-                <a:spcPts val="1417"/>
-              </a:spcBef>
-              <a:buNone/>
-            </a:pPr>
-            <a:endParaRPr b="0" lang="en-US" sz="1800" spc="9" strike="noStrike">
-              <a:solidFill>
-                <a:srgbClr val="000000"/>
-              </a:solidFill>
-              <a:latin typeface="Century Schoolbook"/>
+            <a:endParaRPr b="0" lang="ru-RU" sz="3200" spc="-1" strike="noStrike">
+              <a:latin typeface="Arial"/>
             </a:endParaRPr>
           </a:p>
         </p:txBody>
@@ -7576,20 +6724,8 @@
             <a:normAutofit/>
           </a:bodyPr>
           <a:p>
-            <a:pPr>
-              <a:lnSpc>
-                <a:spcPct val="95000"/>
-              </a:lnSpc>
-              <a:spcBef>
-                <a:spcPts val="1417"/>
-              </a:spcBef>
-              <a:buNone/>
-            </a:pPr>
-            <a:endParaRPr b="0" lang="en-US" sz="1800" spc="9" strike="noStrike">
-              <a:solidFill>
-                <a:srgbClr val="000000"/>
-              </a:solidFill>
-              <a:latin typeface="Century Schoolbook"/>
+            <a:endParaRPr b="0" lang="ru-RU" sz="3200" spc="-1" strike="noStrike">
+              <a:latin typeface="Arial"/>
             </a:endParaRPr>
           </a:p>
         </p:txBody>
@@ -7601,7 +6737,7 @@
             <a:spLocks noGrp="1"/>
           </p:cNvSpPr>
           <p:nvPr>
-            <p:ph type="ftr" idx="2"/>
+            <p:ph type="ftr" idx="1"/>
           </p:nvPr>
         </p:nvSpPr>
         <p:spPr/>
@@ -7621,14 +6757,14 @@
             <a:spLocks noGrp="1"/>
           </p:cNvSpPr>
           <p:nvPr>
-            <p:ph type="sldNum" idx="3"/>
+            <p:ph type="sldNum" idx="2"/>
           </p:nvPr>
         </p:nvSpPr>
         <p:spPr/>
         <p:txBody>
           <a:bodyPr/>
           <a:p>
-            <a:fld id="{654E6DDD-6642-4FC9-99E9-F18A4CA7D3EC}" type="slidenum">
+            <a:fld id="{452AAE78-F005-477C-A9EA-070C73B47C08}" type="slidenum">
               <a:t>&lt;#&gt;</a:t>
             </a:fld>
           </a:p>
@@ -7641,7 +6777,7 @@
             <a:spLocks noGrp="1"/>
           </p:cNvSpPr>
           <p:nvPr>
-            <p:ph type="dt" idx="1"/>
+            <p:ph type="dt" idx="3"/>
           </p:nvPr>
         </p:nvSpPr>
         <p:spPr/>
@@ -7693,7 +6829,7 @@
         <p:spPr>
           <a:xfrm>
             <a:off x="11292840" y="0"/>
-            <a:ext cx="914040" cy="6857640"/>
+            <a:ext cx="913680" cy="6857280"/>
           </a:xfrm>
           <a:prstGeom prst="rect">
             <a:avLst/>
@@ -7724,7 +6860,43 @@
       </p:sp>
       <p:sp>
         <p:nvSpPr>
-          <p:cNvPr id="1" name="PlaceHolder 1"/>
+          <p:cNvPr id="1" name="Rectangle 6"/>
+          <p:cNvSpPr/>
+          <p:nvPr/>
+        </p:nvSpPr>
+        <p:spPr>
+          <a:xfrm>
+            <a:off x="0" y="0"/>
+            <a:ext cx="456480" cy="6857280"/>
+          </a:xfrm>
+          <a:prstGeom prst="rect">
+            <a:avLst/>
+          </a:prstGeom>
+          <a:solidFill>
+            <a:schemeClr val="accent1"/>
+          </a:solidFill>
+          <a:ln>
+            <a:noFill/>
+          </a:ln>
+        </p:spPr>
+        <p:style>
+          <a:lnRef idx="2">
+            <a:schemeClr val="accent1">
+              <a:shade val="50000"/>
+            </a:schemeClr>
+          </a:lnRef>
+          <a:fillRef idx="1">
+            <a:schemeClr val="accent1"/>
+          </a:fillRef>
+          <a:effectRef idx="0">
+            <a:schemeClr val="accent1"/>
+          </a:effectRef>
+          <a:fontRef idx="minor"/>
+        </p:style>
+      </p:sp>
+      <p:sp>
+        <p:nvSpPr>
+          <p:cNvPr id="2" name="PlaceHolder 1"/>
           <p:cNvSpPr>
             <a:spLocks noGrp="1"/>
           </p:cNvSpPr>
@@ -7734,138 +6906,66 @@
         </p:nvSpPr>
         <p:spPr>
           <a:xfrm>
-            <a:off x="1261800" y="758880"/>
-            <a:ext cx="9417960" cy="4041360"/>
-          </a:xfrm>
-          <a:prstGeom prst="rect">
-            <a:avLst/>
-          </a:prstGeom>
-          <a:noFill/>
-          <a:ln w="0">
-            <a:noFill/>
-          </a:ln>
-        </p:spPr>
-        <p:txBody>
-          <a:bodyPr anchor="b">
-            <a:normAutofit/>
-          </a:bodyPr>
-          <a:p>
-            <a:pPr>
-              <a:lnSpc>
-                <a:spcPct val="85000"/>
-              </a:lnSpc>
-              <a:buNone/>
-            </a:pPr>
-            <a:r>
-              <a:rPr b="0" lang="ru-RU" sz="7200" spc="-52" strike="noStrike">
-                <a:solidFill>
-                  <a:srgbClr val="ffffff"/>
-                </a:solidFill>
-                <a:latin typeface="Century Schoolbook"/>
+            <a:off x="609480" y="273600"/>
+            <a:ext cx="10972080" cy="1144440"/>
+          </a:xfrm>
+          <a:prstGeom prst="rect">
+            <a:avLst/>
+          </a:prstGeom>
+          <a:noFill/>
+          <a:ln w="0">
+            <a:noFill/>
+          </a:ln>
+        </p:spPr>
+        <p:txBody>
+          <a:bodyPr lIns="0" rIns="0" tIns="0" bIns="0" anchor="ctr">
+            <a:noAutofit/>
+          </a:bodyPr>
+          <a:p>
+            <a:r>
+              <a:rPr b="0" lang="ru-RU" sz="1800" spc="-1" strike="noStrike">
+                <a:latin typeface="Arial"/>
               </a:rPr>
-              <a:t>Образец заголовка</a:t>
-            </a:r>
-            <a:endParaRPr b="0" lang="en-US" sz="7200" spc="-1" strike="noStrike">
-              <a:solidFill>
-                <a:srgbClr val="ffffff"/>
-              </a:solidFill>
-              <a:latin typeface="Century Schoolbook"/>
-            </a:endParaRPr>
-          </a:p>
-        </p:txBody>
-      </p:sp>
-      <p:sp>
-        <p:nvSpPr>
-          <p:cNvPr id="2" name="PlaceHolder 2"/>
-          <p:cNvSpPr>
-            <a:spLocks noGrp="1"/>
-          </p:cNvSpPr>
-          <p:nvPr>
-            <p:ph type="dt" idx="1"/>
+              <a:t>Для правки текста заглавия щёлкните мышью</a:t>
+            </a:r>
+            <a:endParaRPr b="0" lang="ru-RU" sz="1800" spc="-1" strike="noStrike">
+              <a:latin typeface="Arial"/>
+            </a:endParaRPr>
+          </a:p>
+        </p:txBody>
+      </p:sp>
+      <p:sp>
+        <p:nvSpPr>
+          <p:cNvPr id="3" name="PlaceHolder 2"/>
+          <p:cNvSpPr>
+            <a:spLocks noGrp="1"/>
+          </p:cNvSpPr>
+          <p:nvPr>
+            <p:ph type="ftr" idx="1"/>
           </p:nvPr>
         </p:nvSpPr>
         <p:spPr>
           <a:xfrm rot="16200000">
-            <a:off x="10797480" y="999000"/>
-            <a:ext cx="1904760" cy="364680"/>
-          </a:xfrm>
-          <a:prstGeom prst="rect">
-            <a:avLst/>
-          </a:prstGeom>
-          <a:noFill/>
-          <a:ln w="0">
-            <a:noFill/>
-          </a:ln>
-        </p:spPr>
-        <p:txBody>
-          <a:bodyPr anchor="ctr">
+            <a:off x="9959400" y="4047480"/>
+            <a:ext cx="3580560" cy="364320"/>
+          </a:xfrm>
+          <a:prstGeom prst="rect">
+            <a:avLst/>
+          </a:prstGeom>
+          <a:noFill/>
+          <a:ln w="0">
+            <a:noFill/>
+          </a:ln>
+        </p:spPr>
+        <p:txBody>
+          <a:bodyPr lIns="90000" rIns="90000" tIns="45000" bIns="45000" anchor="ctr">
             <a:noAutofit/>
           </a:bodyPr>
           <a:lstStyle>
-            <a:lvl1pPr algn="r">
+            <a:lvl1pPr algn="ctr">
               <a:lnSpc>
                 <a:spcPct val="100000"/>
               </a:lnSpc>
-              <a:buNone/>
-              <a:defRPr b="0" lang="ru-RU" sz="1050" spc="-1" strike="noStrike">
-                <a:solidFill>
-                  <a:srgbClr val="808080"/>
-                </a:solidFill>
-                <a:latin typeface="Century Schoolbook"/>
-              </a:defRPr>
-            </a:lvl1pPr>
-          </a:lstStyle>
-          <a:p>
-            <a:pPr algn="r">
-              <a:lnSpc>
-                <a:spcPct val="100000"/>
-              </a:lnSpc>
-              <a:buNone/>
-            </a:pPr>
-            <a:r>
-              <a:rPr b="0" lang="ru-RU" sz="1050" spc="-1" strike="noStrike">
-                <a:solidFill>
-                  <a:srgbClr val="808080"/>
-                </a:solidFill>
-                <a:latin typeface="Century Schoolbook"/>
-              </a:rPr>
-              <a:t>&lt;дата/время&gt;</a:t>
-            </a:r>
-            <a:endParaRPr b="0" lang="ru-RU" sz="1050" spc="-1" strike="noStrike">
-              <a:latin typeface="Times New Roman"/>
-            </a:endParaRPr>
-          </a:p>
-        </p:txBody>
-      </p:sp>
-      <p:sp>
-        <p:nvSpPr>
-          <p:cNvPr id="3" name="PlaceHolder 3"/>
-          <p:cNvSpPr>
-            <a:spLocks noGrp="1"/>
-          </p:cNvSpPr>
-          <p:nvPr>
-            <p:ph type="ftr" idx="2"/>
-          </p:nvPr>
-        </p:nvSpPr>
-        <p:spPr>
-          <a:xfrm rot="16200000">
-            <a:off x="9959400" y="4047120"/>
-            <a:ext cx="3580920" cy="364680"/>
-          </a:xfrm>
-          <a:prstGeom prst="rect">
-            <a:avLst/>
-          </a:prstGeom>
-          <a:noFill/>
-          <a:ln w="0">
-            <a:noFill/>
-          </a:ln>
-        </p:spPr>
-        <p:txBody>
-          <a:bodyPr anchor="ctr">
-            <a:noAutofit/>
-          </a:bodyPr>
-          <a:lstStyle>
-            <a:lvl1pPr algn="ctr">
               <a:buNone/>
               <a:defRPr b="0" lang="ru-RU" sz="1400" spc="-1" strike="noStrike">
                 <a:latin typeface="Times New Roman"/>
@@ -7874,6 +6974,9 @@
           </a:lstStyle>
           <a:p>
             <a:pPr algn="ctr">
+              <a:lnSpc>
+                <a:spcPct val="100000"/>
+              </a:lnSpc>
               <a:buNone/>
             </a:pPr>
             <a:r>
@@ -7890,29 +6993,29 @@
       </p:sp>
       <p:sp>
         <p:nvSpPr>
-          <p:cNvPr id="4" name="PlaceHolder 4"/>
-          <p:cNvSpPr>
-            <a:spLocks noGrp="1"/>
-          </p:cNvSpPr>
-          <p:nvPr>
-            <p:ph type="sldNum" idx="3"/>
+          <p:cNvPr id="4" name="PlaceHolder 3"/>
+          <p:cNvSpPr>
+            <a:spLocks noGrp="1"/>
+          </p:cNvSpPr>
+          <p:nvPr>
+            <p:ph type="sldNum" idx="2"/>
           </p:nvPr>
         </p:nvSpPr>
         <p:spPr>
           <a:xfrm>
             <a:off x="11292840" y="6172200"/>
-            <a:ext cx="914040" cy="593280"/>
-          </a:xfrm>
-          <a:prstGeom prst="rect">
-            <a:avLst/>
-          </a:prstGeom>
-          <a:noFill/>
-          <a:ln w="0">
-            <a:noFill/>
-          </a:ln>
-        </p:spPr>
-        <p:txBody>
-          <a:bodyPr lIns="45720" rIns="45720" anchor="ctr">
+            <a:ext cx="913680" cy="592920"/>
+          </a:xfrm>
+          <a:prstGeom prst="rect">
+            <a:avLst/>
+          </a:prstGeom>
+          <a:noFill/>
+          <a:ln w="0">
+            <a:noFill/>
+          </a:ln>
+        </p:spPr>
+        <p:txBody>
+          <a:bodyPr lIns="45720" rIns="45720" tIns="45000" bIns="45000" anchor="ctr">
             <a:noAutofit/>
           </a:bodyPr>
           <a:lstStyle>
@@ -7936,7 +7039,7 @@
               </a:lnSpc>
               <a:buNone/>
             </a:pPr>
-            <a:fld id="{5E06944A-5A54-43A8-A164-4F5BC804EEF4}" type="slidenum">
+            <a:fld id="{2553BC36-DD5B-43EE-AB83-61386BAD83C8}" type="slidenum">
               <a:rPr b="0" lang="ru-RU" sz="3600" spc="-1" strike="noStrike">
                 <a:solidFill>
                   <a:srgbClr val="a6a6a6"/>
@@ -7953,39 +7056,50 @@
       </p:sp>
       <p:sp>
         <p:nvSpPr>
-          <p:cNvPr id="5" name="Rectangle 6"/>
-          <p:cNvSpPr/>
-          <p:nvPr/>
-        </p:nvSpPr>
-        <p:spPr>
-          <a:xfrm>
-            <a:off x="0" y="0"/>
-            <a:ext cx="456840" cy="6857640"/>
-          </a:xfrm>
-          <a:prstGeom prst="rect">
-            <a:avLst/>
-          </a:prstGeom>
-          <a:solidFill>
-            <a:schemeClr val="accent1"/>
-          </a:solidFill>
-          <a:ln>
-            <a:noFill/>
-          </a:ln>
-        </p:spPr>
-        <p:style>
-          <a:lnRef idx="2">
-            <a:schemeClr val="accent1">
-              <a:shade val="50000"/>
-            </a:schemeClr>
-          </a:lnRef>
-          <a:fillRef idx="1">
-            <a:schemeClr val="accent1"/>
-          </a:fillRef>
-          <a:effectRef idx="0">
-            <a:schemeClr val="accent1"/>
-          </a:effectRef>
-          <a:fontRef idx="minor"/>
-        </p:style>
+          <p:cNvPr id="5" name="PlaceHolder 4"/>
+          <p:cNvSpPr>
+            <a:spLocks noGrp="1"/>
+          </p:cNvSpPr>
+          <p:nvPr>
+            <p:ph type="dt" idx="3"/>
+          </p:nvPr>
+        </p:nvSpPr>
+        <p:spPr>
+          <a:xfrm rot="16200000">
+            <a:off x="10797480" y="999360"/>
+            <a:ext cx="1904400" cy="364320"/>
+          </a:xfrm>
+          <a:prstGeom prst="rect">
+            <a:avLst/>
+          </a:prstGeom>
+          <a:noFill/>
+          <a:ln w="0">
+            <a:noFill/>
+          </a:ln>
+        </p:spPr>
+        <p:txBody>
+          <a:bodyPr lIns="90000" rIns="90000" tIns="45000" bIns="45000" anchor="ctr">
+            <a:noAutofit/>
+          </a:bodyPr>
+          <a:lstStyle>
+            <a:lvl1pPr>
+              <a:defRPr b="0" lang="ru-RU" sz="1400" spc="-1" strike="noStrike">
+                <a:latin typeface="Times New Roman"/>
+              </a:defRPr>
+            </a:lvl1pPr>
+          </a:lstStyle>
+          <a:p>
+            <a:r>
+              <a:rPr b="0" lang="ru-RU" sz="1400" spc="-1" strike="noStrike">
+                <a:latin typeface="Times New Roman"/>
+              </a:rPr>
+              <a:t>&lt;дата/время&gt;</a:t>
+            </a:r>
+            <a:endParaRPr b="0" lang="ru-RU" sz="1400" spc="-1" strike="noStrike">
+              <a:latin typeface="Times New Roman"/>
+            </a:endParaRPr>
+          </a:p>
+        </p:txBody>
       </p:sp>
       <p:sp>
         <p:nvSpPr>
@@ -8016,9 +7130,6 @@
           </a:bodyPr>
           <a:p>
             <a:pPr marL="432000" indent="-324000">
-              <a:lnSpc>
-                <a:spcPct val="95000"/>
-              </a:lnSpc>
               <a:spcBef>
                 <a:spcPts val="1417"/>
               </a:spcBef>
@@ -8030,26 +7141,17 @@
               <a:buChar char=""/>
             </a:pPr>
             <a:r>
-              <a:rPr b="0" lang="en-US" sz="1800" spc="9" strike="noStrike">
-                <a:solidFill>
-                  <a:srgbClr val="ffffff"/>
-                </a:solidFill>
-                <a:latin typeface="Century Schoolbook"/>
+              <a:rPr b="0" lang="ru-RU" sz="3200" spc="-1" strike="noStrike">
+                <a:latin typeface="Arial"/>
               </a:rPr>
               <a:t>Для правки структуры щёлкните мышью</a:t>
             </a:r>
-            <a:endParaRPr b="0" lang="en-US" sz="1800" spc="9" strike="noStrike">
-              <a:solidFill>
-                <a:srgbClr val="ffffff"/>
-              </a:solidFill>
-              <a:latin typeface="Century Schoolbook"/>
+            <a:endParaRPr b="0" lang="ru-RU" sz="3200" spc="-1" strike="noStrike">
+              <a:latin typeface="Arial"/>
             </a:endParaRPr>
           </a:p>
           <a:p>
             <a:pPr lvl="1" marL="864000" indent="-324000">
-              <a:lnSpc>
-                <a:spcPct val="90000"/>
-              </a:lnSpc>
               <a:spcBef>
                 <a:spcPts val="1134"/>
               </a:spcBef>
@@ -8061,26 +7163,17 @@
               <a:buChar char=""/>
             </a:pPr>
             <a:r>
-              <a:rPr b="0" lang="en-US" sz="1400" spc="-1" strike="noStrike">
-                <a:solidFill>
-                  <a:srgbClr val="ffffff"/>
-                </a:solidFill>
-                <a:latin typeface="Century Schoolbook"/>
+              <a:rPr b="0" lang="ru-RU" sz="2800" spc="-1" strike="noStrike">
+                <a:latin typeface="Arial"/>
               </a:rPr>
               <a:t>Второй уровень структуры</a:t>
             </a:r>
-            <a:endParaRPr b="0" lang="en-US" sz="1400" spc="-1" strike="noStrike">
-              <a:solidFill>
-                <a:srgbClr val="ffffff"/>
-              </a:solidFill>
-              <a:latin typeface="Century Schoolbook"/>
+            <a:endParaRPr b="0" lang="ru-RU" sz="2800" spc="-1" strike="noStrike">
+              <a:latin typeface="Arial"/>
             </a:endParaRPr>
           </a:p>
           <a:p>
             <a:pPr lvl="2" marL="1296000" indent="-288000">
-              <a:lnSpc>
-                <a:spcPct val="90000"/>
-              </a:lnSpc>
               <a:spcBef>
                 <a:spcPts val="850"/>
               </a:spcBef>
@@ -8092,26 +7185,17 @@
               <a:buChar char=""/>
             </a:pPr>
             <a:r>
-              <a:rPr b="0" lang="en-US" sz="1400" spc="-1" strike="noStrike">
-                <a:solidFill>
-                  <a:srgbClr val="ffffff"/>
-                </a:solidFill>
-                <a:latin typeface="Century Schoolbook"/>
+              <a:rPr b="0" lang="ru-RU" sz="2400" spc="-1" strike="noStrike">
+                <a:latin typeface="Arial"/>
               </a:rPr>
               <a:t>Третий уровень структуры</a:t>
             </a:r>
-            <a:endParaRPr b="0" lang="en-US" sz="1400" spc="-1" strike="noStrike">
-              <a:solidFill>
-                <a:srgbClr val="ffffff"/>
-              </a:solidFill>
-              <a:latin typeface="Century Schoolbook"/>
+            <a:endParaRPr b="0" lang="ru-RU" sz="2400" spc="-1" strike="noStrike">
+              <a:latin typeface="Arial"/>
             </a:endParaRPr>
           </a:p>
           <a:p>
             <a:pPr lvl="3" marL="1728000" indent="-216000">
-              <a:lnSpc>
-                <a:spcPct val="90000"/>
-              </a:lnSpc>
               <a:spcBef>
                 <a:spcPts val="567"/>
               </a:spcBef>
@@ -8123,26 +7207,17 @@
               <a:buChar char=""/>
             </a:pPr>
             <a:r>
-              <a:rPr b="0" lang="en-US" sz="1400" spc="-1" strike="noStrike">
-                <a:solidFill>
-                  <a:srgbClr val="ffffff"/>
-                </a:solidFill>
-                <a:latin typeface="Century Schoolbook"/>
+              <a:rPr b="0" lang="ru-RU" sz="2000" spc="-1" strike="noStrike">
+                <a:latin typeface="Arial"/>
               </a:rPr>
               <a:t>Четвёртый уровень структуры</a:t>
             </a:r>
-            <a:endParaRPr b="0" lang="en-US" sz="1400" spc="-1" strike="noStrike">
-              <a:solidFill>
-                <a:srgbClr val="ffffff"/>
-              </a:solidFill>
-              <a:latin typeface="Century Schoolbook"/>
+            <a:endParaRPr b="0" lang="ru-RU" sz="2000" spc="-1" strike="noStrike">
+              <a:latin typeface="Arial"/>
             </a:endParaRPr>
           </a:p>
           <a:p>
             <a:pPr lvl="4" marL="2160000" indent="-216000">
-              <a:lnSpc>
-                <a:spcPct val="90000"/>
-              </a:lnSpc>
               <a:spcBef>
                 <a:spcPts val="283"/>
               </a:spcBef>
@@ -8154,26 +7229,17 @@
               <a:buChar char=""/>
             </a:pPr>
             <a:r>
-              <a:rPr b="0" lang="en-US" sz="2000" spc="-1" strike="noStrike">
-                <a:solidFill>
-                  <a:srgbClr val="ffffff"/>
-                </a:solidFill>
-                <a:latin typeface="Century Schoolbook"/>
+              <a:rPr b="0" lang="ru-RU" sz="2000" spc="-1" strike="noStrike">
+                <a:latin typeface="Arial"/>
               </a:rPr>
               <a:t>Пятый уровень структуры</a:t>
             </a:r>
-            <a:endParaRPr b="0" lang="en-US" sz="2000" spc="-1" strike="noStrike">
-              <a:solidFill>
-                <a:srgbClr val="ffffff"/>
-              </a:solidFill>
-              <a:latin typeface="Century Schoolbook"/>
+            <a:endParaRPr b="0" lang="ru-RU" sz="2000" spc="-1" strike="noStrike">
+              <a:latin typeface="Arial"/>
             </a:endParaRPr>
           </a:p>
           <a:p>
             <a:pPr lvl="5" marL="2592000" indent="-216000">
-              <a:lnSpc>
-                <a:spcPct val="90000"/>
-              </a:lnSpc>
               <a:spcBef>
                 <a:spcPts val="283"/>
               </a:spcBef>
@@ -8185,26 +7251,17 @@
               <a:buChar char=""/>
             </a:pPr>
             <a:r>
-              <a:rPr b="0" lang="en-US" sz="2000" spc="-1" strike="noStrike">
-                <a:solidFill>
-                  <a:srgbClr val="ffffff"/>
-                </a:solidFill>
-                <a:latin typeface="Century Schoolbook"/>
+              <a:rPr b="0" lang="ru-RU" sz="2000" spc="-1" strike="noStrike">
+                <a:latin typeface="Arial"/>
               </a:rPr>
               <a:t>Шестой уровень структуры</a:t>
             </a:r>
-            <a:endParaRPr b="0" lang="en-US" sz="2000" spc="-1" strike="noStrike">
-              <a:solidFill>
-                <a:srgbClr val="ffffff"/>
-              </a:solidFill>
-              <a:latin typeface="Century Schoolbook"/>
+            <a:endParaRPr b="0" lang="ru-RU" sz="2000" spc="-1" strike="noStrike">
+              <a:latin typeface="Arial"/>
             </a:endParaRPr>
           </a:p>
           <a:p>
             <a:pPr lvl="6" marL="3024000" indent="-216000">
-              <a:lnSpc>
-                <a:spcPct val="90000"/>
-              </a:lnSpc>
               <a:spcBef>
                 <a:spcPts val="283"/>
               </a:spcBef>
@@ -8216,19 +7273,13 @@
               <a:buChar char=""/>
             </a:pPr>
             <a:r>
-              <a:rPr b="0" lang="en-US" sz="2000" spc="-1" strike="noStrike">
-                <a:solidFill>
-                  <a:srgbClr val="ffffff"/>
-                </a:solidFill>
-                <a:latin typeface="Century Schoolbook"/>
+              <a:rPr b="0" lang="ru-RU" sz="2000" spc="-1" strike="noStrike">
+                <a:latin typeface="Arial"/>
               </a:rPr>
               <a:t>Седьмой уровень структуры</a:t>
             </a:r>
-            <a:endParaRPr b="0" lang="en-US" sz="2000" spc="-1" strike="noStrike">
-              <a:solidFill>
-                <a:srgbClr val="ffffff"/>
-              </a:solidFill>
-              <a:latin typeface="Century Schoolbook"/>
+            <a:endParaRPr b="0" lang="ru-RU" sz="2000" spc="-1" strike="noStrike">
+              <a:latin typeface="Arial"/>
             </a:endParaRPr>
           </a:p>
         </p:txBody>
@@ -8286,7 +7337,7 @@
         <p:spPr>
           <a:xfrm>
             <a:off x="11292840" y="0"/>
-            <a:ext cx="914040" cy="6857640"/>
+            <a:ext cx="913680" cy="6857280"/>
           </a:xfrm>
           <a:prstGeom prst="rect">
             <a:avLst/>
@@ -8327,42 +7378,30 @@
         </p:nvSpPr>
         <p:spPr>
           <a:xfrm>
-            <a:off x="1261800" y="365760"/>
-            <a:ext cx="9692280" cy="1325160"/>
-          </a:xfrm>
-          <a:prstGeom prst="rect">
-            <a:avLst/>
-          </a:prstGeom>
-          <a:noFill/>
-          <a:ln w="0">
-            <a:noFill/>
-          </a:ln>
-        </p:spPr>
-        <p:txBody>
-          <a:bodyPr anchor="b">
+            <a:off x="609480" y="273600"/>
+            <a:ext cx="10972080" cy="1144440"/>
+          </a:xfrm>
+          <a:prstGeom prst="rect">
+            <a:avLst/>
+          </a:prstGeom>
+          <a:noFill/>
+          <a:ln w="0">
+            <a:noFill/>
+          </a:ln>
+        </p:spPr>
+        <p:txBody>
+          <a:bodyPr lIns="0" rIns="0" tIns="0" bIns="0" anchor="ctr">
             <a:noAutofit/>
           </a:bodyPr>
           <a:p>
-            <a:pPr>
-              <a:lnSpc>
-                <a:spcPct val="90000"/>
-              </a:lnSpc>
-              <a:buNone/>
-            </a:pPr>
-            <a:r>
-              <a:rPr b="0" lang="ru-RU" sz="4400" spc="-52" strike="noStrike">
-                <a:solidFill>
-                  <a:srgbClr val="000000"/>
-                </a:solidFill>
-                <a:latin typeface="Century Schoolbook"/>
+            <a:r>
+              <a:rPr b="0" lang="ru-RU" sz="1800" spc="-1" strike="noStrike">
+                <a:latin typeface="Arial"/>
               </a:rPr>
-              <a:t>Образец заголовка</a:t>
-            </a:r>
-            <a:endParaRPr b="0" lang="en-US" sz="4400" spc="-1" strike="noStrike">
-              <a:solidFill>
-                <a:srgbClr val="000000"/>
-              </a:solidFill>
-              <a:latin typeface="Century Schoolbook"/>
+              <a:t>Для правки текста заглавия щёлкните мышью</a:t>
+            </a:r>
+            <a:endParaRPr b="0" lang="ru-RU" sz="1800" spc="-1" strike="noStrike">
+              <a:latin typeface="Arial"/>
             </a:endParaRPr>
           </a:p>
         </p:txBody>
@@ -8374,91 +7413,31 @@
             <a:spLocks noGrp="1"/>
           </p:cNvSpPr>
           <p:nvPr>
-            <p:ph type="dt" idx="4"/>
+            <p:ph type="ftr" idx="4"/>
           </p:nvPr>
         </p:nvSpPr>
         <p:spPr>
           <a:xfrm rot="16200000">
-            <a:off x="10797480" y="999000"/>
-            <a:ext cx="1904760" cy="364680"/>
-          </a:xfrm>
-          <a:prstGeom prst="rect">
-            <a:avLst/>
-          </a:prstGeom>
-          <a:noFill/>
-          <a:ln w="0">
-            <a:noFill/>
-          </a:ln>
-        </p:spPr>
-        <p:txBody>
-          <a:bodyPr anchor="ctr">
+            <a:off x="9959400" y="4047480"/>
+            <a:ext cx="3580560" cy="364320"/>
+          </a:xfrm>
+          <a:prstGeom prst="rect">
+            <a:avLst/>
+          </a:prstGeom>
+          <a:noFill/>
+          <a:ln w="0">
+            <a:noFill/>
+          </a:ln>
+        </p:spPr>
+        <p:txBody>
+          <a:bodyPr lIns="90000" rIns="90000" tIns="45000" bIns="45000" anchor="ctr">
             <a:noAutofit/>
           </a:bodyPr>
           <a:lstStyle>
-            <a:lvl1pPr algn="r">
+            <a:lvl1pPr algn="ctr">
               <a:lnSpc>
                 <a:spcPct val="100000"/>
               </a:lnSpc>
-              <a:buNone/>
-              <a:defRPr b="0" lang="ru-RU" sz="1050" spc="-1" strike="noStrike">
-                <a:solidFill>
-                  <a:srgbClr val="d9d9db"/>
-                </a:solidFill>
-                <a:latin typeface="Century Schoolbook"/>
-              </a:defRPr>
-            </a:lvl1pPr>
-          </a:lstStyle>
-          <a:p>
-            <a:pPr algn="r">
-              <a:lnSpc>
-                <a:spcPct val="100000"/>
-              </a:lnSpc>
-              <a:buNone/>
-            </a:pPr>
-            <a:r>
-              <a:rPr b="0" lang="ru-RU" sz="1050" spc="-1" strike="noStrike">
-                <a:solidFill>
-                  <a:srgbClr val="d9d9db"/>
-                </a:solidFill>
-                <a:latin typeface="Century Schoolbook"/>
-              </a:rPr>
-              <a:t>&lt;дата/время&gt;</a:t>
-            </a:r>
-            <a:endParaRPr b="0" lang="ru-RU" sz="1050" spc="-1" strike="noStrike">
-              <a:latin typeface="Times New Roman"/>
-            </a:endParaRPr>
-          </a:p>
-        </p:txBody>
-      </p:sp>
-      <p:sp>
-        <p:nvSpPr>
-          <p:cNvPr id="46" name="PlaceHolder 3"/>
-          <p:cNvSpPr>
-            <a:spLocks noGrp="1"/>
-          </p:cNvSpPr>
-          <p:nvPr>
-            <p:ph type="ftr" idx="5"/>
-          </p:nvPr>
-        </p:nvSpPr>
-        <p:spPr>
-          <a:xfrm rot="16200000">
-            <a:off x="9959400" y="4047120"/>
-            <a:ext cx="3580920" cy="364680"/>
-          </a:xfrm>
-          <a:prstGeom prst="rect">
-            <a:avLst/>
-          </a:prstGeom>
-          <a:noFill/>
-          <a:ln w="0">
-            <a:noFill/>
-          </a:ln>
-        </p:spPr>
-        <p:txBody>
-          <a:bodyPr anchor="ctr">
-            <a:noAutofit/>
-          </a:bodyPr>
-          <a:lstStyle>
-            <a:lvl1pPr algn="ctr">
               <a:buNone/>
               <a:defRPr b="0" lang="ru-RU" sz="1400" spc="-1" strike="noStrike">
                 <a:latin typeface="Times New Roman"/>
@@ -8467,6 +7446,9 @@
           </a:lstStyle>
           <a:p>
             <a:pPr algn="ctr">
+              <a:lnSpc>
+                <a:spcPct val="100000"/>
+              </a:lnSpc>
               <a:buNone/>
             </a:pPr>
             <a:r>
@@ -8483,29 +7465,29 @@
       </p:sp>
       <p:sp>
         <p:nvSpPr>
-          <p:cNvPr id="47" name="PlaceHolder 4"/>
-          <p:cNvSpPr>
-            <a:spLocks noGrp="1"/>
-          </p:cNvSpPr>
-          <p:nvPr>
-            <p:ph type="sldNum" idx="6"/>
+          <p:cNvPr id="46" name="PlaceHolder 3"/>
+          <p:cNvSpPr>
+            <a:spLocks noGrp="1"/>
+          </p:cNvSpPr>
+          <p:nvPr>
+            <p:ph type="sldNum" idx="5"/>
           </p:nvPr>
         </p:nvSpPr>
         <p:spPr>
           <a:xfrm>
             <a:off x="11292840" y="6172200"/>
-            <a:ext cx="914040" cy="593280"/>
-          </a:xfrm>
-          <a:prstGeom prst="rect">
-            <a:avLst/>
-          </a:prstGeom>
-          <a:noFill/>
-          <a:ln w="0">
-            <a:noFill/>
-          </a:ln>
-        </p:spPr>
-        <p:txBody>
-          <a:bodyPr lIns="45720" rIns="45720" anchor="ctr">
+            <a:ext cx="913680" cy="592920"/>
+          </a:xfrm>
+          <a:prstGeom prst="rect">
+            <a:avLst/>
+          </a:prstGeom>
+          <a:noFill/>
+          <a:ln w="0">
+            <a:noFill/>
+          </a:ln>
+        </p:spPr>
+        <p:txBody>
+          <a:bodyPr lIns="45720" rIns="45720" tIns="45000" bIns="45000" anchor="ctr">
             <a:noAutofit/>
           </a:bodyPr>
           <a:lstStyle>
@@ -8529,7 +7511,7 @@
               </a:lnSpc>
               <a:buNone/>
             </a:pPr>
-            <a:fld id="{7017DB2D-96ED-4ED3-9BCF-0A68F86A64E2}" type="slidenum">
+            <a:fld id="{B6E765F7-B3DF-4CF9-A0CA-BABBEBE00BFB}" type="slidenum">
               <a:rPr b="0" lang="ru-RU" sz="3600" spc="-1" strike="noStrike">
                 <a:solidFill>
                   <a:srgbClr val="8e8e94"/>
@@ -8546,6 +7528,53 @@
       </p:sp>
       <p:sp>
         <p:nvSpPr>
+          <p:cNvPr id="47" name="PlaceHolder 4"/>
+          <p:cNvSpPr>
+            <a:spLocks noGrp="1"/>
+          </p:cNvSpPr>
+          <p:nvPr>
+            <p:ph type="dt" idx="6"/>
+          </p:nvPr>
+        </p:nvSpPr>
+        <p:spPr>
+          <a:xfrm rot="16200000">
+            <a:off x="10797480" y="999360"/>
+            <a:ext cx="1904400" cy="364320"/>
+          </a:xfrm>
+          <a:prstGeom prst="rect">
+            <a:avLst/>
+          </a:prstGeom>
+          <a:noFill/>
+          <a:ln w="0">
+            <a:noFill/>
+          </a:ln>
+        </p:spPr>
+        <p:txBody>
+          <a:bodyPr lIns="90000" rIns="90000" tIns="45000" bIns="45000" anchor="ctr">
+            <a:noAutofit/>
+          </a:bodyPr>
+          <a:lstStyle>
+            <a:lvl1pPr>
+              <a:defRPr b="0" lang="ru-RU" sz="1400" spc="-1" strike="noStrike">
+                <a:latin typeface="Times New Roman"/>
+              </a:defRPr>
+            </a:lvl1pPr>
+          </a:lstStyle>
+          <a:p>
+            <a:r>
+              <a:rPr b="0" lang="ru-RU" sz="1400" spc="-1" strike="noStrike">
+                <a:latin typeface="Times New Roman"/>
+              </a:rPr>
+              <a:t>&lt;дата/время&gt;</a:t>
+            </a:r>
+            <a:endParaRPr b="0" lang="ru-RU" sz="1400" spc="-1" strike="noStrike">
+              <a:latin typeface="Times New Roman"/>
+            </a:endParaRPr>
+          </a:p>
+        </p:txBody>
+      </p:sp>
+      <p:sp>
+        <p:nvSpPr>
           <p:cNvPr id="48" name="PlaceHolder 5"/>
           <p:cNvSpPr>
             <a:spLocks noGrp="1"/>
@@ -8573,9 +7602,6 @@
           </a:bodyPr>
           <a:p>
             <a:pPr marL="432000" indent="-324000">
-              <a:lnSpc>
-                <a:spcPct val="95000"/>
-              </a:lnSpc>
               <a:spcBef>
                 <a:spcPts val="1417"/>
               </a:spcBef>
@@ -8587,26 +7613,17 @@
               <a:buChar char=""/>
             </a:pPr>
             <a:r>
-              <a:rPr b="0" lang="en-US" sz="1800" spc="9" strike="noStrike">
-                <a:solidFill>
-                  <a:srgbClr val="000000"/>
-                </a:solidFill>
-                <a:latin typeface="Century Schoolbook"/>
+              <a:rPr b="0" lang="ru-RU" sz="3200" spc="-1" strike="noStrike">
+                <a:latin typeface="Arial"/>
               </a:rPr>
               <a:t>Для правки структуры щёлкните мышью</a:t>
             </a:r>
-            <a:endParaRPr b="0" lang="en-US" sz="1800" spc="9" strike="noStrike">
-              <a:solidFill>
-                <a:srgbClr val="000000"/>
-              </a:solidFill>
-              <a:latin typeface="Century Schoolbook"/>
+            <a:endParaRPr b="0" lang="ru-RU" sz="3200" spc="-1" strike="noStrike">
+              <a:latin typeface="Arial"/>
             </a:endParaRPr>
           </a:p>
           <a:p>
             <a:pPr lvl="1" marL="864000" indent="-324000">
-              <a:lnSpc>
-                <a:spcPct val="90000"/>
-              </a:lnSpc>
               <a:spcBef>
                 <a:spcPts val="1134"/>
               </a:spcBef>
@@ -8618,26 +7635,17 @@
               <a:buChar char=""/>
             </a:pPr>
             <a:r>
-              <a:rPr b="0" lang="en-US" sz="1400" spc="-1" strike="noStrike">
-                <a:solidFill>
-                  <a:srgbClr val="262626"/>
-                </a:solidFill>
-                <a:latin typeface="Century Schoolbook"/>
+              <a:rPr b="0" lang="ru-RU" sz="2800" spc="-1" strike="noStrike">
+                <a:latin typeface="Arial"/>
               </a:rPr>
               <a:t>Второй уровень структуры</a:t>
             </a:r>
-            <a:endParaRPr b="0" lang="en-US" sz="1400" spc="-1" strike="noStrike">
-              <a:solidFill>
-                <a:srgbClr val="262626"/>
-              </a:solidFill>
-              <a:latin typeface="Century Schoolbook"/>
+            <a:endParaRPr b="0" lang="ru-RU" sz="2800" spc="-1" strike="noStrike">
+              <a:latin typeface="Arial"/>
             </a:endParaRPr>
           </a:p>
           <a:p>
             <a:pPr lvl="2" marL="1296000" indent="-288000">
-              <a:lnSpc>
-                <a:spcPct val="90000"/>
-              </a:lnSpc>
               <a:spcBef>
                 <a:spcPts val="850"/>
               </a:spcBef>
@@ -8649,26 +7657,17 @@
               <a:buChar char=""/>
             </a:pPr>
             <a:r>
-              <a:rPr b="0" lang="en-US" sz="1400" spc="-1" strike="noStrike">
-                <a:solidFill>
-                  <a:srgbClr val="262626"/>
-                </a:solidFill>
-                <a:latin typeface="Century Schoolbook"/>
+              <a:rPr b="0" lang="ru-RU" sz="2400" spc="-1" strike="noStrike">
+                <a:latin typeface="Arial"/>
               </a:rPr>
               <a:t>Третий уровень структуры</a:t>
             </a:r>
-            <a:endParaRPr b="0" lang="en-US" sz="1400" spc="-1" strike="noStrike">
-              <a:solidFill>
-                <a:srgbClr val="262626"/>
-              </a:solidFill>
-              <a:latin typeface="Century Schoolbook"/>
+            <a:endParaRPr b="0" lang="ru-RU" sz="2400" spc="-1" strike="noStrike">
+              <a:latin typeface="Arial"/>
             </a:endParaRPr>
           </a:p>
           <a:p>
             <a:pPr lvl="3" marL="1728000" indent="-216000">
-              <a:lnSpc>
-                <a:spcPct val="90000"/>
-              </a:lnSpc>
               <a:spcBef>
                 <a:spcPts val="567"/>
               </a:spcBef>
@@ -8680,26 +7679,17 @@
               <a:buChar char=""/>
             </a:pPr>
             <a:r>
-              <a:rPr b="0" lang="en-US" sz="1400" spc="-1" strike="noStrike">
-                <a:solidFill>
-                  <a:srgbClr val="262626"/>
-                </a:solidFill>
-                <a:latin typeface="Century Schoolbook"/>
+              <a:rPr b="0" lang="ru-RU" sz="2000" spc="-1" strike="noStrike">
+                <a:latin typeface="Arial"/>
               </a:rPr>
               <a:t>Четвёртый уровень структуры</a:t>
             </a:r>
-            <a:endParaRPr b="0" lang="en-US" sz="1400" spc="-1" strike="noStrike">
-              <a:solidFill>
-                <a:srgbClr val="262626"/>
-              </a:solidFill>
-              <a:latin typeface="Century Schoolbook"/>
+            <a:endParaRPr b="0" lang="ru-RU" sz="2000" spc="-1" strike="noStrike">
+              <a:latin typeface="Arial"/>
             </a:endParaRPr>
           </a:p>
           <a:p>
             <a:pPr lvl="4" marL="2160000" indent="-216000">
-              <a:lnSpc>
-                <a:spcPct val="90000"/>
-              </a:lnSpc>
               <a:spcBef>
                 <a:spcPts val="283"/>
               </a:spcBef>
@@ -8711,26 +7701,17 @@
               <a:buChar char=""/>
             </a:pPr>
             <a:r>
-              <a:rPr b="0" lang="en-US" sz="2000" spc="-1" strike="noStrike">
-                <a:solidFill>
-                  <a:srgbClr val="262626"/>
-                </a:solidFill>
-                <a:latin typeface="Century Schoolbook"/>
+              <a:rPr b="0" lang="ru-RU" sz="2000" spc="-1" strike="noStrike">
+                <a:latin typeface="Arial"/>
               </a:rPr>
               <a:t>Пятый уровень структуры</a:t>
             </a:r>
-            <a:endParaRPr b="0" lang="en-US" sz="2000" spc="-1" strike="noStrike">
-              <a:solidFill>
-                <a:srgbClr val="262626"/>
-              </a:solidFill>
-              <a:latin typeface="Century Schoolbook"/>
+            <a:endParaRPr b="0" lang="ru-RU" sz="2000" spc="-1" strike="noStrike">
+              <a:latin typeface="Arial"/>
             </a:endParaRPr>
           </a:p>
           <a:p>
             <a:pPr lvl="5" marL="2592000" indent="-216000">
-              <a:lnSpc>
-                <a:spcPct val="90000"/>
-              </a:lnSpc>
               <a:spcBef>
                 <a:spcPts val="283"/>
               </a:spcBef>
@@ -8742,26 +7723,17 @@
               <a:buChar char=""/>
             </a:pPr>
             <a:r>
-              <a:rPr b="0" lang="en-US" sz="2000" spc="-1" strike="noStrike">
-                <a:solidFill>
-                  <a:srgbClr val="262626"/>
-                </a:solidFill>
-                <a:latin typeface="Century Schoolbook"/>
+              <a:rPr b="0" lang="ru-RU" sz="2000" spc="-1" strike="noStrike">
+                <a:latin typeface="Arial"/>
               </a:rPr>
               <a:t>Шестой уровень структуры</a:t>
             </a:r>
-            <a:endParaRPr b="0" lang="en-US" sz="2000" spc="-1" strike="noStrike">
-              <a:solidFill>
-                <a:srgbClr val="262626"/>
-              </a:solidFill>
-              <a:latin typeface="Century Schoolbook"/>
+            <a:endParaRPr b="0" lang="ru-RU" sz="2000" spc="-1" strike="noStrike">
+              <a:latin typeface="Arial"/>
             </a:endParaRPr>
           </a:p>
           <a:p>
             <a:pPr lvl="6" marL="3024000" indent="-216000">
-              <a:lnSpc>
-                <a:spcPct val="90000"/>
-              </a:lnSpc>
               <a:spcBef>
                 <a:spcPts val="283"/>
               </a:spcBef>
@@ -8773,19 +7745,13 @@
               <a:buChar char=""/>
             </a:pPr>
             <a:r>
-              <a:rPr b="0" lang="en-US" sz="2000" spc="-1" strike="noStrike">
-                <a:solidFill>
-                  <a:srgbClr val="262626"/>
-                </a:solidFill>
-                <a:latin typeface="Century Schoolbook"/>
+              <a:rPr b="0" lang="ru-RU" sz="2000" spc="-1" strike="noStrike">
+                <a:latin typeface="Arial"/>
               </a:rPr>
               <a:t>Седьмой уровень структуры</a:t>
             </a:r>
-            <a:endParaRPr b="0" lang="en-US" sz="2000" spc="-1" strike="noStrike">
-              <a:solidFill>
-                <a:srgbClr val="262626"/>
-              </a:solidFill>
-              <a:latin typeface="Century Schoolbook"/>
+            <a:endParaRPr b="0" lang="ru-RU" sz="2000" spc="-1" strike="noStrike">
+              <a:latin typeface="Arial"/>
             </a:endParaRPr>
           </a:p>
         </p:txBody>
@@ -8843,7 +7809,7 @@
         <p:spPr>
           <a:xfrm>
             <a:off x="11292840" y="0"/>
-            <a:ext cx="914040" cy="6857640"/>
+            <a:ext cx="913680" cy="6857280"/>
           </a:xfrm>
           <a:prstGeom prst="rect">
             <a:avLst/>
@@ -8879,91 +7845,31 @@
             <a:spLocks noGrp="1"/>
           </p:cNvSpPr>
           <p:nvPr>
-            <p:ph type="dt" idx="7"/>
+            <p:ph type="ftr" idx="7"/>
           </p:nvPr>
         </p:nvSpPr>
         <p:spPr>
           <a:xfrm rot="16200000">
-            <a:off x="10797480" y="999000"/>
-            <a:ext cx="1904760" cy="364680"/>
-          </a:xfrm>
-          <a:prstGeom prst="rect">
-            <a:avLst/>
-          </a:prstGeom>
-          <a:noFill/>
-          <a:ln w="0">
-            <a:noFill/>
-          </a:ln>
-        </p:spPr>
-        <p:txBody>
-          <a:bodyPr anchor="ctr">
+            <a:off x="9959400" y="4047480"/>
+            <a:ext cx="3580560" cy="364320"/>
+          </a:xfrm>
+          <a:prstGeom prst="rect">
+            <a:avLst/>
+          </a:prstGeom>
+          <a:noFill/>
+          <a:ln w="0">
+            <a:noFill/>
+          </a:ln>
+        </p:spPr>
+        <p:txBody>
+          <a:bodyPr lIns="90000" rIns="90000" tIns="45000" bIns="45000" anchor="ctr">
             <a:noAutofit/>
           </a:bodyPr>
           <a:lstStyle>
-            <a:lvl1pPr algn="r">
+            <a:lvl1pPr algn="ctr">
               <a:lnSpc>
                 <a:spcPct val="100000"/>
               </a:lnSpc>
-              <a:buNone/>
-              <a:defRPr b="0" lang="ru-RU" sz="1050" spc="-1" strike="noStrike">
-                <a:solidFill>
-                  <a:srgbClr val="d9d9db"/>
-                </a:solidFill>
-                <a:latin typeface="Century Schoolbook"/>
-              </a:defRPr>
-            </a:lvl1pPr>
-          </a:lstStyle>
-          <a:p>
-            <a:pPr algn="r">
-              <a:lnSpc>
-                <a:spcPct val="100000"/>
-              </a:lnSpc>
-              <a:buNone/>
-            </a:pPr>
-            <a:r>
-              <a:rPr b="0" lang="ru-RU" sz="1050" spc="-1" strike="noStrike">
-                <a:solidFill>
-                  <a:srgbClr val="d9d9db"/>
-                </a:solidFill>
-                <a:latin typeface="Century Schoolbook"/>
-              </a:rPr>
-              <a:t>&lt;дата/время&gt;</a:t>
-            </a:r>
-            <a:endParaRPr b="0" lang="ru-RU" sz="1050" spc="-1" strike="noStrike">
-              <a:latin typeface="Times New Roman"/>
-            </a:endParaRPr>
-          </a:p>
-        </p:txBody>
-      </p:sp>
-      <p:sp>
-        <p:nvSpPr>
-          <p:cNvPr id="87" name="PlaceHolder 2"/>
-          <p:cNvSpPr>
-            <a:spLocks noGrp="1"/>
-          </p:cNvSpPr>
-          <p:nvPr>
-            <p:ph type="ftr" idx="8"/>
-          </p:nvPr>
-        </p:nvSpPr>
-        <p:spPr>
-          <a:xfrm rot="16200000">
-            <a:off x="9959400" y="4047120"/>
-            <a:ext cx="3580920" cy="364680"/>
-          </a:xfrm>
-          <a:prstGeom prst="rect">
-            <a:avLst/>
-          </a:prstGeom>
-          <a:noFill/>
-          <a:ln w="0">
-            <a:noFill/>
-          </a:ln>
-        </p:spPr>
-        <p:txBody>
-          <a:bodyPr anchor="ctr">
-            <a:noAutofit/>
-          </a:bodyPr>
-          <a:lstStyle>
-            <a:lvl1pPr algn="ctr">
               <a:buNone/>
               <a:defRPr b="0" lang="ru-RU" sz="1400" spc="-1" strike="noStrike">
                 <a:latin typeface="Times New Roman"/>
@@ -8972,6 +7878,9 @@
           </a:lstStyle>
           <a:p>
             <a:pPr algn="ctr">
+              <a:lnSpc>
+                <a:spcPct val="100000"/>
+              </a:lnSpc>
               <a:buNone/>
             </a:pPr>
             <a:r>
@@ -8988,29 +7897,29 @@
       </p:sp>
       <p:sp>
         <p:nvSpPr>
-          <p:cNvPr id="88" name="PlaceHolder 3"/>
-          <p:cNvSpPr>
-            <a:spLocks noGrp="1"/>
-          </p:cNvSpPr>
-          <p:nvPr>
-            <p:ph type="sldNum" idx="9"/>
+          <p:cNvPr id="87" name="PlaceHolder 2"/>
+          <p:cNvSpPr>
+            <a:spLocks noGrp="1"/>
+          </p:cNvSpPr>
+          <p:nvPr>
+            <p:ph type="sldNum" idx="8"/>
           </p:nvPr>
         </p:nvSpPr>
         <p:spPr>
           <a:xfrm>
             <a:off x="11292840" y="6172200"/>
-            <a:ext cx="914040" cy="593280"/>
-          </a:xfrm>
-          <a:prstGeom prst="rect">
-            <a:avLst/>
-          </a:prstGeom>
-          <a:noFill/>
-          <a:ln w="0">
-            <a:noFill/>
-          </a:ln>
-        </p:spPr>
-        <p:txBody>
-          <a:bodyPr lIns="45720" rIns="45720" anchor="ctr">
+            <a:ext cx="913680" cy="592920"/>
+          </a:xfrm>
+          <a:prstGeom prst="rect">
+            <a:avLst/>
+          </a:prstGeom>
+          <a:noFill/>
+          <a:ln w="0">
+            <a:noFill/>
+          </a:ln>
+        </p:spPr>
+        <p:txBody>
+          <a:bodyPr lIns="45720" rIns="45720" tIns="45000" bIns="45000" anchor="ctr">
             <a:noAutofit/>
           </a:bodyPr>
           <a:lstStyle>
@@ -9034,7 +7943,7 @@
               </a:lnSpc>
               <a:buNone/>
             </a:pPr>
-            <a:fld id="{809EC387-7C56-4661-8FAF-F5851B4ECEDA}" type="slidenum">
+            <a:fld id="{D34791EE-1230-48FA-A9F9-E1381BEE0450}" type="slidenum">
               <a:rPr b="0" lang="ru-RU" sz="3600" spc="-1" strike="noStrike">
                 <a:solidFill>
                   <a:srgbClr val="8e8e94"/>
@@ -9051,6 +7960,53 @@
       </p:sp>
       <p:sp>
         <p:nvSpPr>
+          <p:cNvPr id="88" name="PlaceHolder 3"/>
+          <p:cNvSpPr>
+            <a:spLocks noGrp="1"/>
+          </p:cNvSpPr>
+          <p:nvPr>
+            <p:ph type="dt" idx="9"/>
+          </p:nvPr>
+        </p:nvSpPr>
+        <p:spPr>
+          <a:xfrm rot="16200000">
+            <a:off x="10797480" y="999360"/>
+            <a:ext cx="1904400" cy="364320"/>
+          </a:xfrm>
+          <a:prstGeom prst="rect">
+            <a:avLst/>
+          </a:prstGeom>
+          <a:noFill/>
+          <a:ln w="0">
+            <a:noFill/>
+          </a:ln>
+        </p:spPr>
+        <p:txBody>
+          <a:bodyPr lIns="90000" rIns="90000" tIns="45000" bIns="45000" anchor="ctr">
+            <a:noAutofit/>
+          </a:bodyPr>
+          <a:lstStyle>
+            <a:lvl1pPr>
+              <a:defRPr b="0" lang="ru-RU" sz="1400" spc="-1" strike="noStrike">
+                <a:latin typeface="Times New Roman"/>
+              </a:defRPr>
+            </a:lvl1pPr>
+          </a:lstStyle>
+          <a:p>
+            <a:r>
+              <a:rPr b="0" lang="ru-RU" sz="1400" spc="-1" strike="noStrike">
+                <a:latin typeface="Times New Roman"/>
+              </a:rPr>
+              <a:t>&lt;дата/время&gt;</a:t>
+            </a:r>
+            <a:endParaRPr b="0" lang="ru-RU" sz="1400" spc="-1" strike="noStrike">
+              <a:latin typeface="Times New Roman"/>
+            </a:endParaRPr>
+          </a:p>
+        </p:txBody>
+      </p:sp>
+      <p:sp>
+        <p:nvSpPr>
           <p:cNvPr id="89" name="PlaceHolder 4"/>
           <p:cNvSpPr>
             <a:spLocks noGrp="1"/>
@@ -9077,20 +8033,17 @@
             <a:noAutofit/>
           </a:bodyPr>
           <a:p>
-            <a:r>
-              <a:rPr b="0" lang="en-US" sz="1800" spc="-1" strike="noStrike">
-                <a:solidFill>
-                  <a:srgbClr val="000000"/>
-                </a:solidFill>
-                <a:latin typeface="Century Schoolbook"/>
+            <a:pPr algn="ctr">
+              <a:buNone/>
+            </a:pPr>
+            <a:r>
+              <a:rPr b="0" lang="ru-RU" sz="4400" spc="-1" strike="noStrike">
+                <a:latin typeface="Arial"/>
               </a:rPr>
               <a:t>Для правки текста заглавия щёлкните мышью</a:t>
             </a:r>
-            <a:endParaRPr b="0" lang="en-US" sz="1800" spc="-1" strike="noStrike">
-              <a:solidFill>
-                <a:srgbClr val="000000"/>
-              </a:solidFill>
-              <a:latin typeface="Century Schoolbook"/>
+            <a:endParaRPr b="0" lang="ru-RU" sz="4400" spc="-1" strike="noStrike">
+              <a:latin typeface="Arial"/>
             </a:endParaRPr>
           </a:p>
         </p:txBody>
@@ -9124,9 +8077,6 @@
           </a:bodyPr>
           <a:p>
             <a:pPr marL="432000" indent="-324000">
-              <a:lnSpc>
-                <a:spcPct val="95000"/>
-              </a:lnSpc>
               <a:spcBef>
                 <a:spcPts val="1417"/>
               </a:spcBef>
@@ -9138,26 +8088,17 @@
               <a:buChar char=""/>
             </a:pPr>
             <a:r>
-              <a:rPr b="0" lang="en-US" sz="1800" spc="9" strike="noStrike">
-                <a:solidFill>
-                  <a:srgbClr val="000000"/>
-                </a:solidFill>
-                <a:latin typeface="Century Schoolbook"/>
+              <a:rPr b="0" lang="ru-RU" sz="3200" spc="-1" strike="noStrike">
+                <a:latin typeface="Arial"/>
               </a:rPr>
               <a:t>Для правки структуры щёлкните мышью</a:t>
             </a:r>
-            <a:endParaRPr b="0" lang="en-US" sz="1800" spc="9" strike="noStrike">
-              <a:solidFill>
-                <a:srgbClr val="000000"/>
-              </a:solidFill>
-              <a:latin typeface="Century Schoolbook"/>
+            <a:endParaRPr b="0" lang="ru-RU" sz="3200" spc="-1" strike="noStrike">
+              <a:latin typeface="Arial"/>
             </a:endParaRPr>
           </a:p>
           <a:p>
             <a:pPr lvl="1" marL="864000" indent="-324000">
-              <a:lnSpc>
-                <a:spcPct val="90000"/>
-              </a:lnSpc>
               <a:spcBef>
                 <a:spcPts val="1134"/>
               </a:spcBef>
@@ -9169,26 +8110,17 @@
               <a:buChar char=""/>
             </a:pPr>
             <a:r>
-              <a:rPr b="0" lang="en-US" sz="1400" spc="-1" strike="noStrike">
-                <a:solidFill>
-                  <a:srgbClr val="262626"/>
-                </a:solidFill>
-                <a:latin typeface="Century Schoolbook"/>
+              <a:rPr b="0" lang="ru-RU" sz="2800" spc="-1" strike="noStrike">
+                <a:latin typeface="Arial"/>
               </a:rPr>
               <a:t>Второй уровень структуры</a:t>
             </a:r>
-            <a:endParaRPr b="0" lang="en-US" sz="1400" spc="-1" strike="noStrike">
-              <a:solidFill>
-                <a:srgbClr val="262626"/>
-              </a:solidFill>
-              <a:latin typeface="Century Schoolbook"/>
+            <a:endParaRPr b="0" lang="ru-RU" sz="2800" spc="-1" strike="noStrike">
+              <a:latin typeface="Arial"/>
             </a:endParaRPr>
           </a:p>
           <a:p>
             <a:pPr lvl="2" marL="1296000" indent="-288000">
-              <a:lnSpc>
-                <a:spcPct val="90000"/>
-              </a:lnSpc>
               <a:spcBef>
                 <a:spcPts val="850"/>
               </a:spcBef>
@@ -9200,26 +8132,17 @@
               <a:buChar char=""/>
             </a:pPr>
             <a:r>
-              <a:rPr b="0" lang="en-US" sz="1400" spc="-1" strike="noStrike">
-                <a:solidFill>
-                  <a:srgbClr val="262626"/>
-                </a:solidFill>
-                <a:latin typeface="Century Schoolbook"/>
+              <a:rPr b="0" lang="ru-RU" sz="2400" spc="-1" strike="noStrike">
+                <a:latin typeface="Arial"/>
               </a:rPr>
               <a:t>Третий уровень структуры</a:t>
             </a:r>
-            <a:endParaRPr b="0" lang="en-US" sz="1400" spc="-1" strike="noStrike">
-              <a:solidFill>
-                <a:srgbClr val="262626"/>
-              </a:solidFill>
-              <a:latin typeface="Century Schoolbook"/>
+            <a:endParaRPr b="0" lang="ru-RU" sz="2400" spc="-1" strike="noStrike">
+              <a:latin typeface="Arial"/>
             </a:endParaRPr>
           </a:p>
           <a:p>
             <a:pPr lvl="3" marL="1728000" indent="-216000">
-              <a:lnSpc>
-                <a:spcPct val="90000"/>
-              </a:lnSpc>
               <a:spcBef>
                 <a:spcPts val="567"/>
               </a:spcBef>
@@ -9231,26 +8154,17 @@
               <a:buChar char=""/>
             </a:pPr>
             <a:r>
-              <a:rPr b="0" lang="en-US" sz="1400" spc="-1" strike="noStrike">
-                <a:solidFill>
-                  <a:srgbClr val="262626"/>
-                </a:solidFill>
-                <a:latin typeface="Century Schoolbook"/>
+              <a:rPr b="0" lang="ru-RU" sz="2000" spc="-1" strike="noStrike">
+                <a:latin typeface="Arial"/>
               </a:rPr>
               <a:t>Четвёртый уровень структуры</a:t>
             </a:r>
-            <a:endParaRPr b="0" lang="en-US" sz="1400" spc="-1" strike="noStrike">
-              <a:solidFill>
-                <a:srgbClr val="262626"/>
-              </a:solidFill>
-              <a:latin typeface="Century Schoolbook"/>
+            <a:endParaRPr b="0" lang="ru-RU" sz="2000" spc="-1" strike="noStrike">
+              <a:latin typeface="Arial"/>
             </a:endParaRPr>
           </a:p>
           <a:p>
             <a:pPr lvl="4" marL="2160000" indent="-216000">
-              <a:lnSpc>
-                <a:spcPct val="90000"/>
-              </a:lnSpc>
               <a:spcBef>
                 <a:spcPts val="283"/>
               </a:spcBef>
@@ -9262,26 +8176,17 @@
               <a:buChar char=""/>
             </a:pPr>
             <a:r>
-              <a:rPr b="0" lang="en-US" sz="2000" spc="-1" strike="noStrike">
-                <a:solidFill>
-                  <a:srgbClr val="262626"/>
-                </a:solidFill>
-                <a:latin typeface="Century Schoolbook"/>
+              <a:rPr b="0" lang="ru-RU" sz="2000" spc="-1" strike="noStrike">
+                <a:latin typeface="Arial"/>
               </a:rPr>
               <a:t>Пятый уровень структуры</a:t>
             </a:r>
-            <a:endParaRPr b="0" lang="en-US" sz="2000" spc="-1" strike="noStrike">
-              <a:solidFill>
-                <a:srgbClr val="262626"/>
-              </a:solidFill>
-              <a:latin typeface="Century Schoolbook"/>
+            <a:endParaRPr b="0" lang="ru-RU" sz="2000" spc="-1" strike="noStrike">
+              <a:latin typeface="Arial"/>
             </a:endParaRPr>
           </a:p>
           <a:p>
             <a:pPr lvl="5" marL="2592000" indent="-216000">
-              <a:lnSpc>
-                <a:spcPct val="90000"/>
-              </a:lnSpc>
               <a:spcBef>
                 <a:spcPts val="283"/>
               </a:spcBef>
@@ -9293,26 +8198,17 @@
               <a:buChar char=""/>
             </a:pPr>
             <a:r>
-              <a:rPr b="0" lang="en-US" sz="2000" spc="-1" strike="noStrike">
-                <a:solidFill>
-                  <a:srgbClr val="262626"/>
-                </a:solidFill>
-                <a:latin typeface="Century Schoolbook"/>
+              <a:rPr b="0" lang="ru-RU" sz="2000" spc="-1" strike="noStrike">
+                <a:latin typeface="Arial"/>
               </a:rPr>
               <a:t>Шестой уровень структуры</a:t>
             </a:r>
-            <a:endParaRPr b="0" lang="en-US" sz="2000" spc="-1" strike="noStrike">
-              <a:solidFill>
-                <a:srgbClr val="262626"/>
-              </a:solidFill>
-              <a:latin typeface="Century Schoolbook"/>
+            <a:endParaRPr b="0" lang="ru-RU" sz="2000" spc="-1" strike="noStrike">
+              <a:latin typeface="Arial"/>
             </a:endParaRPr>
           </a:p>
           <a:p>
             <a:pPr lvl="6" marL="3024000" indent="-216000">
-              <a:lnSpc>
-                <a:spcPct val="90000"/>
-              </a:lnSpc>
               <a:spcBef>
                 <a:spcPts val="283"/>
               </a:spcBef>
@@ -9324,19 +8220,13 @@
               <a:buChar char=""/>
             </a:pPr>
             <a:r>
-              <a:rPr b="0" lang="en-US" sz="2000" spc="-1" strike="noStrike">
-                <a:solidFill>
-                  <a:srgbClr val="262626"/>
-                </a:solidFill>
-                <a:latin typeface="Century Schoolbook"/>
+              <a:rPr b="0" lang="ru-RU" sz="2000" spc="-1" strike="noStrike">
+                <a:latin typeface="Arial"/>
               </a:rPr>
               <a:t>Седьмой уровень структуры</a:t>
             </a:r>
-            <a:endParaRPr b="0" lang="en-US" sz="2000" spc="-1" strike="noStrike">
-              <a:solidFill>
-                <a:srgbClr val="262626"/>
-              </a:solidFill>
-              <a:latin typeface="Century Schoolbook"/>
+            <a:endParaRPr b="0" lang="ru-RU" sz="2000" spc="-1" strike="noStrike">
+              <a:latin typeface="Arial"/>
             </a:endParaRPr>
           </a:p>
         </p:txBody>
@@ -9391,18 +8281,18 @@
         <p:spPr>
           <a:xfrm>
             <a:off x="2209680" y="2311560"/>
-            <a:ext cx="7772040" cy="1469520"/>
-          </a:xfrm>
-          <a:prstGeom prst="rect">
-            <a:avLst/>
-          </a:prstGeom>
-          <a:noFill/>
-          <a:ln w="0">
-            <a:noFill/>
-          </a:ln>
-        </p:spPr>
-        <p:txBody>
-          <a:bodyPr anchor="ctr">
+            <a:ext cx="7771680" cy="1469160"/>
+          </a:xfrm>
+          <a:prstGeom prst="rect">
+            <a:avLst/>
+          </a:prstGeom>
+          <a:noFill/>
+          <a:ln w="0">
+            <a:noFill/>
+          </a:ln>
+        </p:spPr>
+        <p:txBody>
+          <a:bodyPr lIns="0" rIns="0" tIns="0" bIns="0" anchor="ctr">
             <a:noAutofit/>
           </a:bodyPr>
           <a:p>
@@ -9421,11 +8311,8 @@
               </a:rPr>
               <a:t>Курсовая работа по теме: Разработка базы данных для центра по продаже автомобилей</a:t>
             </a:r>
-            <a:endParaRPr b="0" lang="en-US" sz="4000" spc="-1" strike="noStrike">
-              <a:solidFill>
-                <a:srgbClr val="ffffff"/>
-              </a:solidFill>
-              <a:latin typeface="Century Schoolbook"/>
+            <a:endParaRPr b="0" lang="ru-RU" sz="4000" spc="-1" strike="noStrike">
+              <a:latin typeface="Arial"/>
             </a:endParaRPr>
           </a:p>
         </p:txBody>
@@ -9439,7 +8326,7 @@
         <p:spPr>
           <a:xfrm>
             <a:off x="2209680" y="277920"/>
-            <a:ext cx="7772040" cy="637920"/>
+            <a:ext cx="7771680" cy="637920"/>
           </a:xfrm>
           <a:prstGeom prst="rect">
             <a:avLst/>
@@ -9472,6 +8359,7 @@
                   <a:srgbClr val="ffffff"/>
                 </a:solidFill>
                 <a:latin typeface="Times New Roman"/>
+                <a:ea typeface="DejaVu Sans"/>
               </a:rPr>
               <a:t>Министерство образования, науки и молодежной политики Республики Коми</a:t>
             </a:r>
@@ -9492,6 +8380,7 @@
                   <a:srgbClr val="ffffff"/>
                 </a:solidFill>
                 <a:latin typeface="Times New Roman"/>
+                <a:ea typeface="DejaVu Sans"/>
               </a:rPr>
               <a:t>ГПОУ «Сыктывкарский политехнический техникум»</a:t>
             </a:r>
@@ -9510,7 +8399,7 @@
         <p:spPr>
           <a:xfrm>
             <a:off x="7562880" y="4857840"/>
-            <a:ext cx="4314600" cy="1461240"/>
+            <a:ext cx="4314240" cy="1461240"/>
           </a:xfrm>
           <a:prstGeom prst="rect">
             <a:avLst/>
@@ -9543,6 +8432,7 @@
                   <a:srgbClr val="ffffff"/>
                 </a:solidFill>
                 <a:latin typeface="Times New Roman"/>
+                <a:ea typeface="DejaVu Sans"/>
               </a:rPr>
               <a:t>Выполнила студент 4 курса 414 группы:</a:t>
             </a:r>
@@ -9563,6 +8453,7 @@
                   <a:srgbClr val="ffffff"/>
                 </a:solidFill>
                 <a:latin typeface="Times New Roman"/>
+                <a:ea typeface="DejaVu Sans"/>
               </a:rPr>
               <a:t>Черных Эльвира Николаевна</a:t>
             </a:r>
@@ -9594,6 +8485,7 @@
                   <a:srgbClr val="ffffff"/>
                 </a:solidFill>
                 <a:latin typeface="Times New Roman"/>
+                <a:ea typeface="DejaVu Sans"/>
               </a:rPr>
               <a:t>Проверил преподаватель:</a:t>
             </a:r>
@@ -9614,6 +8506,7 @@
                   <a:srgbClr val="ffffff"/>
                 </a:solidFill>
                 <a:latin typeface="Times New Roman"/>
+                <a:ea typeface="DejaVu Sans"/>
               </a:rPr>
               <a:t>Пунгин И.В.</a:t>
             </a:r>
@@ -9653,58 +8546,29 @@
           <a:chExt cx="0" cy="0"/>
         </a:xfrm>
       </p:grpSpPr>
-      <p:sp>
-        <p:nvSpPr>
-          <p:cNvPr id="146" name="PlaceHolder 1"/>
-          <p:cNvSpPr>
-            <a:spLocks noGrp="1"/>
-          </p:cNvSpPr>
-          <p:nvPr>
-            <p:ph type="title"/>
-          </p:nvPr>
-        </p:nvSpPr>
-        <p:spPr>
-          <a:xfrm>
-            <a:off x="664200" y="296640"/>
-            <a:ext cx="10863000" cy="701280"/>
-          </a:xfrm>
-          <a:prstGeom prst="rect">
-            <a:avLst/>
-          </a:prstGeom>
-          <a:noFill/>
-          <a:ln w="0">
-            <a:noFill/>
-          </a:ln>
-        </p:spPr>
-        <p:txBody>
-          <a:bodyPr anchor="b">
-            <a:noAutofit/>
-          </a:bodyPr>
-          <a:p>
-            <a:pPr>
-              <a:lnSpc>
-                <a:spcPct val="90000"/>
-              </a:lnSpc>
-              <a:buNone/>
-            </a:pPr>
-            <a:r>
-              <a:rPr b="1" lang="ru-RU" sz="3600" spc="-52" strike="noStrike">
-                <a:solidFill>
-                  <a:srgbClr val="000000"/>
-                </a:solidFill>
-                <a:latin typeface="Times New Roman"/>
-              </a:rPr>
-              <a:t>Демонстрация интерфейса</a:t>
-            </a:r>
-            <a:endParaRPr b="0" lang="en-US" sz="3600" spc="-1" strike="noStrike">
-              <a:solidFill>
-                <a:srgbClr val="000000"/>
-              </a:solidFill>
-              <a:latin typeface="Century Schoolbook"/>
-            </a:endParaRPr>
-          </a:p>
-        </p:txBody>
-      </p:sp>
+      <p:pic>
+        <p:nvPicPr>
+          <p:cNvPr id="146" name="" descr=""/>
+          <p:cNvPicPr/>
+          <p:nvPr/>
+        </p:nvPicPr>
+        <p:blipFill>
+          <a:blip r:embed="rId1"/>
+          <a:stretch/>
+        </p:blipFill>
+        <p:spPr>
+          <a:xfrm>
+            <a:off x="345600" y="1080000"/>
+            <a:ext cx="3614040" cy="4499640"/>
+          </a:xfrm>
+          <a:prstGeom prst="rect">
+            <a:avLst/>
+          </a:prstGeom>
+          <a:ln w="0">
+            <a:noFill/>
+          </a:ln>
+        </p:spPr>
+      </p:pic>
       <p:pic>
         <p:nvPicPr>
           <p:cNvPr id="147" name="" descr=""/>
@@ -9712,13 +8576,13 @@
           <p:nvPr/>
         </p:nvPicPr>
         <p:blipFill>
-          <a:blip r:embed="rId1"/>
+          <a:blip r:embed="rId2"/>
           <a:stretch/>
         </p:blipFill>
         <p:spPr>
           <a:xfrm>
-            <a:off x="720000" y="1080000"/>
-            <a:ext cx="9721440" cy="5179680"/>
+            <a:off x="4140000" y="1620000"/>
+            <a:ext cx="7003080" cy="3725640"/>
           </a:xfrm>
           <a:prstGeom prst="rect">
             <a:avLst/>
@@ -9770,8 +8634,8 @@
         </p:blipFill>
         <p:spPr>
           <a:xfrm>
-            <a:off x="345600" y="1080000"/>
-            <a:ext cx="3614400" cy="4500000"/>
+            <a:off x="356040" y="296280"/>
+            <a:ext cx="7203600" cy="3843360"/>
           </a:xfrm>
           <a:prstGeom prst="rect">
             <a:avLst/>
@@ -9793,8 +8657,8 @@
         </p:blipFill>
         <p:spPr>
           <a:xfrm>
-            <a:off x="4140000" y="1620000"/>
-            <a:ext cx="7003440" cy="3726000"/>
+            <a:off x="4012200" y="2700000"/>
+            <a:ext cx="7147440" cy="3808080"/>
           </a:xfrm>
           <a:prstGeom prst="rect">
             <a:avLst/>
@@ -9846,8 +8710,8 @@
         </p:blipFill>
         <p:spPr>
           <a:xfrm>
-            <a:off x="356040" y="296280"/>
-            <a:ext cx="7203960" cy="3843720"/>
+            <a:off x="360000" y="360000"/>
+            <a:ext cx="5241240" cy="5965920"/>
           </a:xfrm>
           <a:prstGeom prst="rect">
             <a:avLst/>
@@ -9869,8 +8733,8 @@
         </p:blipFill>
         <p:spPr>
           <a:xfrm>
-            <a:off x="4012200" y="2700000"/>
-            <a:ext cx="7147800" cy="3808440"/>
+            <a:off x="5865120" y="360000"/>
+            <a:ext cx="5114520" cy="5939640"/>
           </a:xfrm>
           <a:prstGeom prst="rect">
             <a:avLst/>
@@ -9922,31 +8786,8 @@
         </p:blipFill>
         <p:spPr>
           <a:xfrm>
-            <a:off x="360000" y="360000"/>
-            <a:ext cx="5241600" cy="5966280"/>
-          </a:xfrm>
-          <a:prstGeom prst="rect">
-            <a:avLst/>
-          </a:prstGeom>
-          <a:ln w="0">
-            <a:noFill/>
-          </a:ln>
-        </p:spPr>
-      </p:pic>
-      <p:pic>
-        <p:nvPicPr>
-          <p:cNvPr id="153" name="" descr=""/>
-          <p:cNvPicPr/>
-          <p:nvPr/>
-        </p:nvPicPr>
-        <p:blipFill>
-          <a:blip r:embed="rId2"/>
-          <a:stretch/>
-        </p:blipFill>
-        <p:spPr>
-          <a:xfrm>
-            <a:off x="5865120" y="360000"/>
-            <a:ext cx="5114880" cy="5940000"/>
+            <a:off x="356040" y="360000"/>
+            <a:ext cx="10803600" cy="5747400"/>
           </a:xfrm>
           <a:prstGeom prst="rect">
             <a:avLst/>
@@ -9986,29 +8827,302 @@
           <a:chExt cx="0" cy="0"/>
         </a:xfrm>
       </p:grpSpPr>
-      <p:pic>
-        <p:nvPicPr>
-          <p:cNvPr id="154" name="" descr=""/>
-          <p:cNvPicPr/>
+      <p:sp>
+        <p:nvSpPr>
+          <p:cNvPr id="153" name="PlaceHolder 1"/>
+          <p:cNvSpPr>
+            <a:spLocks noGrp="1"/>
+          </p:cNvSpPr>
+          <p:nvPr>
+            <p:ph type="title"/>
+          </p:nvPr>
+        </p:nvSpPr>
+        <p:spPr>
+          <a:xfrm>
+            <a:off x="664200" y="296640"/>
+            <a:ext cx="10862640" cy="700920"/>
+          </a:xfrm>
+          <a:prstGeom prst="rect">
+            <a:avLst/>
+          </a:prstGeom>
+          <a:noFill/>
+          <a:ln w="0">
+            <a:noFill/>
+          </a:ln>
+        </p:spPr>
+        <p:txBody>
+          <a:bodyPr lIns="0" rIns="0" tIns="0" bIns="0" anchor="b">
+            <a:noAutofit/>
+          </a:bodyPr>
+          <a:p>
+            <a:pPr>
+              <a:lnSpc>
+                <a:spcPct val="90000"/>
+              </a:lnSpc>
+              <a:buNone/>
+            </a:pPr>
+            <a:r>
+              <a:rPr b="1" lang="ru-RU" sz="3600" spc="-52" strike="noStrike">
+                <a:solidFill>
+                  <a:srgbClr val="000000"/>
+                </a:solidFill>
+                <a:latin typeface="Times New Roman"/>
+              </a:rPr>
+              <a:t>Выводы по работе</a:t>
+            </a:r>
+            <a:endParaRPr b="0" lang="ru-RU" sz="3600" spc="-1" strike="noStrike">
+              <a:latin typeface="Arial"/>
+            </a:endParaRPr>
+          </a:p>
+        </p:txBody>
+      </p:sp>
+      <p:sp>
+        <p:nvSpPr>
+          <p:cNvPr id="154" name="TextBox 1"/>
+          <p:cNvSpPr/>
           <p:nvPr/>
-        </p:nvPicPr>
-        <p:blipFill>
-          <a:blip r:embed="rId1"/>
-          <a:stretch/>
-        </p:blipFill>
-        <p:spPr>
-          <a:xfrm>
-            <a:off x="356040" y="360000"/>
-            <a:ext cx="10803960" cy="5747760"/>
-          </a:xfrm>
-          <a:prstGeom prst="rect">
-            <a:avLst/>
-          </a:prstGeom>
-          <a:ln w="0">
-            <a:noFill/>
-          </a:ln>
-        </p:spPr>
-      </p:pic>
+        </p:nvSpPr>
+        <p:spPr>
+          <a:xfrm>
+            <a:off x="664200" y="1554480"/>
+            <a:ext cx="10422000" cy="3748320"/>
+          </a:xfrm>
+          <a:prstGeom prst="rect">
+            <a:avLst/>
+          </a:prstGeom>
+          <a:noFill/>
+          <a:ln w="0">
+            <a:noFill/>
+          </a:ln>
+        </p:spPr>
+        <p:style>
+          <a:lnRef idx="0"/>
+          <a:fillRef idx="0"/>
+          <a:effectRef idx="0"/>
+          <a:fontRef idx="minor"/>
+        </p:style>
+        <p:txBody>
+          <a:bodyPr lIns="90000" rIns="90000" tIns="45000" bIns="45000" anchor="ctr">
+            <a:spAutoFit/>
+          </a:bodyPr>
+          <a:p>
+            <a:pPr>
+              <a:lnSpc>
+                <a:spcPct val="100000"/>
+              </a:lnSpc>
+              <a:buNone/>
+            </a:pPr>
+            <a:r>
+              <a:rPr b="1" lang="ru-RU" sz="2000" spc="-1" strike="noStrike">
+                <a:solidFill>
+                  <a:srgbClr val="000000"/>
+                </a:solidFill>
+                <a:latin typeface="Times New Roman"/>
+                <a:ea typeface="DejaVu Sans"/>
+              </a:rPr>
+              <a:t>Цель работы достигнута:</a:t>
+            </a:r>
+            <a:r>
+              <a:rPr b="0" lang="ru-RU" sz="2000" spc="-1" strike="noStrike">
+                <a:solidFill>
+                  <a:srgbClr val="000000"/>
+                </a:solidFill>
+                <a:latin typeface="Times New Roman"/>
+                <a:ea typeface="DejaVu Sans"/>
+              </a:rPr>
+              <a:t> Спроектирована и реализована реляционная БД для автомобильного центра.</a:t>
+            </a:r>
+            <a:endParaRPr b="0" lang="ru-RU" sz="2000" spc="-1" strike="noStrike">
+              <a:latin typeface="Arial"/>
+            </a:endParaRPr>
+          </a:p>
+          <a:p>
+            <a:pPr>
+              <a:lnSpc>
+                <a:spcPct val="100000"/>
+              </a:lnSpc>
+              <a:buNone/>
+            </a:pPr>
+            <a:endParaRPr b="0" lang="ru-RU" sz="2000" spc="-1" strike="noStrike">
+              <a:latin typeface="Arial"/>
+            </a:endParaRPr>
+          </a:p>
+          <a:p>
+            <a:pPr>
+              <a:lnSpc>
+                <a:spcPct val="100000"/>
+              </a:lnSpc>
+              <a:buNone/>
+            </a:pPr>
+            <a:r>
+              <a:rPr b="1" lang="ru-RU" sz="2000" spc="-1" strike="noStrike">
+                <a:solidFill>
+                  <a:srgbClr val="000000"/>
+                </a:solidFill>
+                <a:latin typeface="Times New Roman"/>
+                <a:ea typeface="DejaVu Sans"/>
+              </a:rPr>
+              <a:t>Результаты:</a:t>
+            </a:r>
+            <a:endParaRPr b="0" lang="ru-RU" sz="2000" spc="-1" strike="noStrike">
+              <a:latin typeface="Arial"/>
+            </a:endParaRPr>
+          </a:p>
+          <a:p>
+            <a:pPr>
+              <a:lnSpc>
+                <a:spcPct val="100000"/>
+              </a:lnSpc>
+              <a:buNone/>
+            </a:pPr>
+            <a:endParaRPr b="0" lang="ru-RU" sz="2000" spc="-1" strike="noStrike">
+              <a:latin typeface="Arial"/>
+            </a:endParaRPr>
+          </a:p>
+          <a:p>
+            <a:pPr marL="343080" indent="-343080">
+              <a:lnSpc>
+                <a:spcPct val="100000"/>
+              </a:lnSpc>
+              <a:buClr>
+                <a:srgbClr val="000000"/>
+              </a:buClr>
+              <a:buFont typeface="Arial"/>
+              <a:buChar char="•"/>
+            </a:pPr>
+            <a:r>
+              <a:rPr b="0" lang="ru-RU" sz="2000" spc="-1" strike="noStrike">
+                <a:solidFill>
+                  <a:srgbClr val="000000"/>
+                </a:solidFill>
+                <a:latin typeface="Times New Roman"/>
+                <a:ea typeface="DejaVu Sans"/>
+              </a:rPr>
+              <a:t>Создана нормализованная структура данных (6 таблиц).</a:t>
+            </a:r>
+            <a:endParaRPr b="0" lang="ru-RU" sz="2000" spc="-1" strike="noStrike">
+              <a:latin typeface="Arial"/>
+            </a:endParaRPr>
+          </a:p>
+          <a:p>
+            <a:pPr marL="343080" indent="-343080">
+              <a:lnSpc>
+                <a:spcPct val="100000"/>
+              </a:lnSpc>
+              <a:buClr>
+                <a:srgbClr val="000000"/>
+              </a:buClr>
+              <a:buFont typeface="Arial"/>
+              <a:buChar char="•"/>
+            </a:pPr>
+            <a:r>
+              <a:rPr b="0" lang="ru-RU" sz="2000" spc="-1" strike="noStrike">
+                <a:solidFill>
+                  <a:srgbClr val="000000"/>
+                </a:solidFill>
+                <a:latin typeface="Times New Roman"/>
+                <a:ea typeface="DejaVu Sans"/>
+              </a:rPr>
+              <a:t>Реализована бизнес-логика через ограничения целостности.</a:t>
+            </a:r>
+            <a:endParaRPr b="0" lang="ru-RU" sz="2000" spc="-1" strike="noStrike">
+              <a:latin typeface="Arial"/>
+            </a:endParaRPr>
+          </a:p>
+          <a:p>
+            <a:pPr marL="343080" indent="-343080">
+              <a:lnSpc>
+                <a:spcPct val="100000"/>
+              </a:lnSpc>
+              <a:buClr>
+                <a:srgbClr val="000000"/>
+              </a:buClr>
+              <a:buFont typeface="Arial"/>
+              <a:buChar char="•"/>
+            </a:pPr>
+            <a:r>
+              <a:rPr b="0" lang="ru-RU" sz="2000" spc="-1" strike="noStrike">
+                <a:solidFill>
+                  <a:srgbClr val="000000"/>
+                </a:solidFill>
+                <a:latin typeface="Times New Roman"/>
+                <a:ea typeface="DejaVu Sans"/>
+              </a:rPr>
+              <a:t>Обеспечен удобный доступ через представления и запросы.</a:t>
+            </a:r>
+            <a:endParaRPr b="0" lang="ru-RU" sz="2000" spc="-1" strike="noStrike">
+              <a:latin typeface="Arial"/>
+            </a:endParaRPr>
+          </a:p>
+          <a:p>
+            <a:pPr marL="343080" indent="-343080">
+              <a:lnSpc>
+                <a:spcPct val="100000"/>
+              </a:lnSpc>
+              <a:buClr>
+                <a:srgbClr val="000000"/>
+              </a:buClr>
+              <a:buFont typeface="Arial"/>
+              <a:buChar char="•"/>
+            </a:pPr>
+            <a:r>
+              <a:rPr b="0" lang="ru-RU" sz="2000" spc="-1" strike="noStrike">
+                <a:solidFill>
+                  <a:srgbClr val="000000"/>
+                </a:solidFill>
+                <a:latin typeface="Times New Roman"/>
+                <a:ea typeface="DejaVu Sans"/>
+              </a:rPr>
+              <a:t>Внедрены механизмы безопасности и отказоустойчивости.</a:t>
+            </a:r>
+            <a:endParaRPr b="0" lang="ru-RU" sz="2000" spc="-1" strike="noStrike">
+              <a:latin typeface="Arial"/>
+            </a:endParaRPr>
+          </a:p>
+          <a:p>
+            <a:pPr>
+              <a:lnSpc>
+                <a:spcPct val="100000"/>
+              </a:lnSpc>
+              <a:buNone/>
+            </a:pPr>
+            <a:endParaRPr b="0" lang="ru-RU" sz="2000" spc="-1" strike="noStrike">
+              <a:latin typeface="Arial"/>
+            </a:endParaRPr>
+          </a:p>
+          <a:p>
+            <a:pPr>
+              <a:lnSpc>
+                <a:spcPct val="100000"/>
+              </a:lnSpc>
+              <a:buNone/>
+            </a:pPr>
+            <a:r>
+              <a:rPr b="1" lang="ru-RU" sz="2000" spc="-1" strike="noStrike">
+                <a:solidFill>
+                  <a:srgbClr val="000000"/>
+                </a:solidFill>
+                <a:latin typeface="Times New Roman"/>
+                <a:ea typeface="DejaVu Sans"/>
+              </a:rPr>
+              <a:t>Заключение:</a:t>
+            </a:r>
+            <a:r>
+              <a:rPr b="0" lang="ru-RU" sz="2000" spc="-1" strike="noStrike">
+                <a:solidFill>
+                  <a:srgbClr val="000000"/>
+                </a:solidFill>
+                <a:latin typeface="Times New Roman"/>
+                <a:ea typeface="DejaVu Sans"/>
+              </a:rPr>
+              <a:t> Разработанная база данных является готовым прототипом информационной системы, которая может быть внедрена в реальный бизнес-процесс и масштабирована.</a:t>
+            </a:r>
+            <a:endParaRPr b="0" lang="ru-RU" sz="2000" spc="-1" strike="noStrike">
+              <a:latin typeface="Arial"/>
+            </a:endParaRPr>
+          </a:p>
+        </p:txBody>
+      </p:sp>
     </p:spTree>
   </p:cSld>
   <mc:AlternateContent>
@@ -10052,7 +9166,7 @@
         <p:spPr>
           <a:xfrm>
             <a:off x="3695760" y="1952640"/>
-            <a:ext cx="4800240" cy="4800240"/>
+            <a:ext cx="4799880" cy="4799880"/>
           </a:xfrm>
           <a:prstGeom prst="rect">
             <a:avLst/>
@@ -10071,7 +9185,7 @@
         <p:spPr>
           <a:xfrm>
             <a:off x="1928880" y="968400"/>
-            <a:ext cx="8334000" cy="699120"/>
+            <a:ext cx="8333640" cy="699120"/>
           </a:xfrm>
           <a:prstGeom prst="rect">
             <a:avLst/>
@@ -10104,6 +9218,7 @@
                   <a:srgbClr val="000000"/>
                 </a:solidFill>
                 <a:latin typeface="Century Schoolbook"/>
+                <a:ea typeface="DejaVu Sans"/>
               </a:rPr>
               <a:t>СПАСИБО ЗА ВНИМАНИЕ!</a:t>
             </a:r>
@@ -10156,18 +9271,18 @@
         <p:spPr>
           <a:xfrm>
             <a:off x="664200" y="203040"/>
-            <a:ext cx="9981720" cy="701280"/>
-          </a:xfrm>
-          <a:prstGeom prst="rect">
-            <a:avLst/>
-          </a:prstGeom>
-          <a:noFill/>
-          <a:ln w="0">
-            <a:noFill/>
-          </a:ln>
-        </p:spPr>
-        <p:txBody>
-          <a:bodyPr anchor="b">
+            <a:ext cx="9981360" cy="700920"/>
+          </a:xfrm>
+          <a:prstGeom prst="rect">
+            <a:avLst/>
+          </a:prstGeom>
+          <a:noFill/>
+          <a:ln w="0">
+            <a:noFill/>
+          </a:ln>
+        </p:spPr>
+        <p:txBody>
+          <a:bodyPr lIns="0" rIns="0" tIns="0" bIns="0" anchor="b">
             <a:normAutofit/>
           </a:bodyPr>
           <a:p>
@@ -10186,11 +9301,8 @@
               </a:rPr>
               <a:t>Цели, задачи, объект, предмет, методы</a:t>
             </a:r>
-            <a:endParaRPr b="0" lang="en-US" sz="3600" spc="-1" strike="noStrike">
-              <a:solidFill>
-                <a:srgbClr val="000000"/>
-              </a:solidFill>
-              <a:latin typeface="Century Schoolbook"/>
+            <a:endParaRPr b="0" lang="ru-RU" sz="3600" spc="-1" strike="noStrike">
+              <a:latin typeface="Arial"/>
             </a:endParaRPr>
           </a:p>
         </p:txBody>
@@ -10204,7 +9316,7 @@
         <p:spPr>
           <a:xfrm>
             <a:off x="664200" y="930240"/>
-            <a:ext cx="10469880" cy="5272920"/>
+            <a:ext cx="10469520" cy="5272920"/>
           </a:xfrm>
           <a:prstGeom prst="rect">
             <a:avLst/>
@@ -10237,6 +9349,7 @@
                   <a:srgbClr val="000000"/>
                 </a:solidFill>
                 <a:latin typeface="Times New Roman"/>
+                <a:ea typeface="DejaVu Sans"/>
               </a:rPr>
               <a:t>Цель: </a:t>
             </a:r>
@@ -10246,6 +9359,7 @@
                   <a:srgbClr val="000000"/>
                 </a:solidFill>
                 <a:latin typeface="Times New Roman"/>
+                <a:ea typeface="DejaVu Sans"/>
               </a:rPr>
               <a:t>Проектирование и реализация реляционной БД для учета всех бизнес-процессов автомобильного центра в среде PostgreSQL.</a:t>
             </a:r>
@@ -10277,6 +9391,7 @@
                   <a:srgbClr val="000000"/>
                 </a:solidFill>
                 <a:latin typeface="Times New Roman"/>
+                <a:ea typeface="DejaVu Sans"/>
               </a:rPr>
               <a:t>Задачи:</a:t>
             </a:r>
@@ -10301,6 +9416,7 @@
                   <a:srgbClr val="000000"/>
                 </a:solidFill>
                 <a:latin typeface="Times New Roman"/>
+                <a:ea typeface="DejaVu Sans"/>
               </a:rPr>
               <a:t>Анализ предметной области.</a:t>
             </a:r>
@@ -10325,6 +9441,7 @@
                   <a:srgbClr val="000000"/>
                 </a:solidFill>
                 <a:latin typeface="Times New Roman"/>
+                <a:ea typeface="DejaVu Sans"/>
               </a:rPr>
               <a:t>Проектирование концептуальной (ER) модели.</a:t>
             </a:r>
@@ -10349,6 +9466,7 @@
                   <a:srgbClr val="000000"/>
                 </a:solidFill>
                 <a:latin typeface="Times New Roman"/>
+                <a:ea typeface="DejaVu Sans"/>
               </a:rPr>
               <a:t>Разработка логической и физической структуры БД.</a:t>
             </a:r>
@@ -10373,6 +9491,7 @@
                   <a:srgbClr val="000000"/>
                 </a:solidFill>
                 <a:latin typeface="Times New Roman"/>
+                <a:ea typeface="DejaVu Sans"/>
               </a:rPr>
               <a:t>Реализация проекта в СУБД PostgreSQL (таблицы, запросы, интерфейс).</a:t>
             </a:r>
@@ -10397,6 +9516,7 @@
                   <a:srgbClr val="000000"/>
                 </a:solidFill>
                 <a:latin typeface="Times New Roman"/>
+                <a:ea typeface="DejaVu Sans"/>
               </a:rPr>
               <a:t>Обеспечение безопасности и надежности (права доступа, резервное копирование).</a:t>
             </a:r>
@@ -10428,6 +9548,7 @@
                   <a:srgbClr val="000000"/>
                 </a:solidFill>
                 <a:latin typeface="Times New Roman"/>
+                <a:ea typeface="DejaVu Sans"/>
               </a:rPr>
               <a:t>Объект: </a:t>
             </a:r>
@@ -10437,6 +9558,7 @@
                   <a:srgbClr val="000000"/>
                 </a:solidFill>
                 <a:latin typeface="Times New Roman"/>
+                <a:ea typeface="DejaVu Sans"/>
               </a:rPr>
               <a:t>Процесс управления данными в автомобильном дилерском центре.</a:t>
             </a:r>
@@ -10468,6 +9590,7 @@
                   <a:srgbClr val="000000"/>
                 </a:solidFill>
                 <a:latin typeface="Times New Roman"/>
+                <a:ea typeface="DejaVu Sans"/>
               </a:rPr>
               <a:t>Предмет: </a:t>
             </a:r>
@@ -10477,6 +9600,7 @@
                   <a:srgbClr val="000000"/>
                 </a:solidFill>
                 <a:latin typeface="Times New Roman"/>
+                <a:ea typeface="DejaVu Sans"/>
               </a:rPr>
               <a:t>Информационная система в виде реляционной базы данных.</a:t>
             </a:r>
@@ -10508,6 +9632,7 @@
                   <a:srgbClr val="000000"/>
                 </a:solidFill>
                 <a:latin typeface="Times New Roman"/>
+                <a:ea typeface="DejaVu Sans"/>
               </a:rPr>
               <a:t>Методы: </a:t>
             </a:r>
@@ -10517,6 +9642,7 @@
                   <a:srgbClr val="000000"/>
                 </a:solidFill>
                 <a:latin typeface="Times New Roman"/>
+                <a:ea typeface="DejaVu Sans"/>
               </a:rPr>
               <a:t>Анализ, моделирование (ER-диаграммы), проектирование БД, SQL-программирование.</a:t>
             </a:r>
@@ -10580,18 +9706,18 @@
         <p:spPr>
           <a:xfrm>
             <a:off x="664200" y="537120"/>
-            <a:ext cx="9981720" cy="701280"/>
-          </a:xfrm>
-          <a:prstGeom prst="rect">
-            <a:avLst/>
-          </a:prstGeom>
-          <a:noFill/>
-          <a:ln w="0">
-            <a:noFill/>
-          </a:ln>
-        </p:spPr>
-        <p:txBody>
-          <a:bodyPr anchor="b">
+            <a:ext cx="9981360" cy="700920"/>
+          </a:xfrm>
+          <a:prstGeom prst="rect">
+            <a:avLst/>
+          </a:prstGeom>
+          <a:noFill/>
+          <a:ln w="0">
+            <a:noFill/>
+          </a:ln>
+        </p:spPr>
+        <p:txBody>
+          <a:bodyPr lIns="0" rIns="0" tIns="0" bIns="0" anchor="b">
             <a:normAutofit/>
           </a:bodyPr>
           <a:p>
@@ -10610,11 +9736,8 @@
               </a:rPr>
               <a:t>Актуальность работы</a:t>
             </a:r>
-            <a:endParaRPr b="0" lang="en-US" sz="3600" spc="-1" strike="noStrike">
-              <a:solidFill>
-                <a:srgbClr val="000000"/>
-              </a:solidFill>
-              <a:latin typeface="Century Schoolbook"/>
+            <a:endParaRPr b="0" lang="ru-RU" sz="3600" spc="-1" strike="noStrike">
+              <a:latin typeface="Arial"/>
             </a:endParaRPr>
           </a:p>
         </p:txBody>
@@ -10628,7 +9751,7 @@
         <p:spPr>
           <a:xfrm>
             <a:off x="664200" y="1383120"/>
-            <a:ext cx="10450800" cy="3138480"/>
+            <a:ext cx="10450440" cy="3138480"/>
           </a:xfrm>
           <a:prstGeom prst="rect">
             <a:avLst/>
@@ -10661,6 +9784,7 @@
                   <a:srgbClr val="000000"/>
                 </a:solidFill>
                 <a:latin typeface="Times New Roman"/>
+                <a:ea typeface="DejaVu Sans"/>
               </a:rPr>
               <a:t>Автоматизация — ключевой фактор успеха в конкурентной среде.</a:t>
             </a:r>
@@ -10692,6 +9816,7 @@
                   <a:srgbClr val="000000"/>
                 </a:solidFill>
                 <a:latin typeface="Times New Roman"/>
+                <a:ea typeface="DejaVu Sans"/>
               </a:rPr>
               <a:t>Ручной учет ведет к ошибкам, потерям данных и низкой скорости работы.</a:t>
             </a:r>
@@ -10723,6 +9848,7 @@
                   <a:srgbClr val="000000"/>
                 </a:solidFill>
                 <a:latin typeface="Times New Roman"/>
+                <a:ea typeface="DejaVu Sans"/>
               </a:rPr>
               <a:t>Цель БД:</a:t>
             </a:r>
@@ -10758,6 +9884,7 @@
                   <a:srgbClr val="000000"/>
                 </a:solidFill>
                 <a:latin typeface="Times New Roman"/>
+                <a:ea typeface="DejaVu Sans"/>
               </a:rPr>
               <a:t>Создать единое информационное пространство.</a:t>
             </a:r>
@@ -10782,6 +9909,7 @@
                   <a:srgbClr val="000000"/>
                 </a:solidFill>
                 <a:latin typeface="Times New Roman"/>
+                <a:ea typeface="DejaVu Sans"/>
               </a:rPr>
               <a:t>Устранить дублирование и повысить целостность данных.</a:t>
             </a:r>
@@ -10806,6 +9934,7 @@
                   <a:srgbClr val="000000"/>
                 </a:solidFill>
                 <a:latin typeface="Times New Roman"/>
+                <a:ea typeface="DejaVu Sans"/>
               </a:rPr>
               <a:t>Ускорить процессы продаж и формирование отчетности.</a:t>
             </a:r>
@@ -10830,6 +9959,7 @@
                   <a:srgbClr val="000000"/>
                 </a:solidFill>
                 <a:latin typeface="Times New Roman"/>
+                <a:ea typeface="DejaVu Sans"/>
               </a:rPr>
               <a:t>Повысить качество обслуживания клиентов и управляемость бизнеса.</a:t>
             </a:r>
@@ -10882,18 +10012,18 @@
         <p:spPr>
           <a:xfrm>
             <a:off x="664200" y="521280"/>
-            <a:ext cx="9981720" cy="701280"/>
-          </a:xfrm>
-          <a:prstGeom prst="rect">
-            <a:avLst/>
-          </a:prstGeom>
-          <a:noFill/>
-          <a:ln w="0">
-            <a:noFill/>
-          </a:ln>
-        </p:spPr>
-        <p:txBody>
-          <a:bodyPr anchor="b">
+            <a:ext cx="9981360" cy="700920"/>
+          </a:xfrm>
+          <a:prstGeom prst="rect">
+            <a:avLst/>
+          </a:prstGeom>
+          <a:noFill/>
+          <a:ln w="0">
+            <a:noFill/>
+          </a:ln>
+        </p:spPr>
+        <p:txBody>
+          <a:bodyPr lIns="0" rIns="0" tIns="0" bIns="0" anchor="b">
             <a:normAutofit/>
           </a:bodyPr>
           <a:p>
@@ -10912,11 +10042,8 @@
               </a:rPr>
               <a:t>Задача 1 — Анализ предметной области</a:t>
             </a:r>
-            <a:endParaRPr b="0" lang="en-US" sz="3600" spc="-1" strike="noStrike">
-              <a:solidFill>
-                <a:srgbClr val="000000"/>
-              </a:solidFill>
-              <a:latin typeface="Century Schoolbook"/>
+            <a:endParaRPr b="0" lang="ru-RU" sz="3600" spc="-1" strike="noStrike">
+              <a:latin typeface="Arial"/>
             </a:endParaRPr>
           </a:p>
         </p:txBody>
@@ -10930,7 +10057,7 @@
         <p:spPr>
           <a:xfrm>
             <a:off x="664200" y="1707120"/>
-            <a:ext cx="10460520" cy="3443400"/>
+            <a:ext cx="10460160" cy="3443400"/>
           </a:xfrm>
           <a:prstGeom prst="rect">
             <a:avLst/>
@@ -10963,6 +10090,7 @@
                   <a:srgbClr val="000000"/>
                 </a:solidFill>
                 <a:latin typeface="Times New Roman"/>
+                <a:ea typeface="DejaVu Sans"/>
               </a:rPr>
               <a:t>Задача: </a:t>
             </a:r>
@@ -10972,6 +10100,7 @@
                   <a:srgbClr val="000000"/>
                 </a:solidFill>
                 <a:latin typeface="Times New Roman"/>
+                <a:ea typeface="DejaVu Sans"/>
               </a:rPr>
               <a:t>Провести анализ предметной области "Продажа автомобилей", выявить ключевые сущности, процессы и требования.</a:t>
             </a:r>
@@ -11003,6 +10132,7 @@
                   <a:srgbClr val="000000"/>
                 </a:solidFill>
                 <a:latin typeface="Times New Roman"/>
+                <a:ea typeface="DejaVu Sans"/>
               </a:rPr>
               <a:t>Результат (Что сделано):</a:t>
             </a:r>
@@ -11038,6 +10168,7 @@
                   <a:srgbClr val="000000"/>
                 </a:solidFill>
                 <a:latin typeface="Times New Roman"/>
+                <a:ea typeface="DejaVu Sans"/>
               </a:rPr>
               <a:t>Определены ключевые сущности: Автомобиль, Клиент, Сделка, Поставщик, Сотрудник.</a:t>
             </a:r>
@@ -11062,6 +10193,7 @@
                   <a:srgbClr val="000000"/>
                 </a:solidFill>
                 <a:latin typeface="Times New Roman"/>
+                <a:ea typeface="DejaVu Sans"/>
               </a:rPr>
               <a:t>Описаны бизнес-процессы: учет авто, управление складом, работа с клиентами, оформление сделок.</a:t>
             </a:r>
@@ -11086,6 +10218,7 @@
                   <a:srgbClr val="000000"/>
                 </a:solidFill>
                 <a:latin typeface="Times New Roman"/>
+                <a:ea typeface="DejaVu Sans"/>
               </a:rPr>
               <a:t>Составлен перечень входных/выходных данных (характеристики авто, данные клиентов, отчеты по продажам).</a:t>
             </a:r>
@@ -11110,6 +10243,7 @@
                   <a:srgbClr val="000000"/>
                 </a:solidFill>
                 <a:latin typeface="Times New Roman"/>
+                <a:ea typeface="DejaVu Sans"/>
               </a:rPr>
               <a:t>Сформулированы ограничения целостности (например, цена продажи ≥ цены закупки).</a:t>
             </a:r>
@@ -11162,18 +10296,18 @@
         <p:spPr>
           <a:xfrm>
             <a:off x="664200" y="710640"/>
-            <a:ext cx="10488960" cy="701280"/>
-          </a:xfrm>
-          <a:prstGeom prst="rect">
-            <a:avLst/>
-          </a:prstGeom>
-          <a:noFill/>
-          <a:ln w="0">
-            <a:noFill/>
-          </a:ln>
-        </p:spPr>
-        <p:txBody>
-          <a:bodyPr anchor="b">
+            <a:ext cx="10488600" cy="700920"/>
+          </a:xfrm>
+          <a:prstGeom prst="rect">
+            <a:avLst/>
+          </a:prstGeom>
+          <a:noFill/>
+          <a:ln w="0">
+            <a:noFill/>
+          </a:ln>
+        </p:spPr>
+        <p:txBody>
+          <a:bodyPr lIns="0" rIns="0" tIns="0" bIns="0" anchor="b">
             <a:noAutofit/>
           </a:bodyPr>
           <a:p>
@@ -11192,11 +10326,8 @@
               </a:rPr>
               <a:t>Задача 2 — Проектирование концептуальной модели</a:t>
             </a:r>
-            <a:endParaRPr b="0" lang="en-US" sz="3600" spc="-1" strike="noStrike">
-              <a:solidFill>
-                <a:srgbClr val="000000"/>
-              </a:solidFill>
-              <a:latin typeface="Century Schoolbook"/>
+            <a:endParaRPr b="0" lang="ru-RU" sz="3600" spc="-1" strike="noStrike">
+              <a:latin typeface="Arial"/>
             </a:endParaRPr>
           </a:p>
         </p:txBody>
@@ -11210,7 +10341,7 @@
         <p:spPr>
           <a:xfrm>
             <a:off x="664200" y="2012040"/>
-            <a:ext cx="10488960" cy="2833560"/>
+            <a:ext cx="10488600" cy="2833560"/>
           </a:xfrm>
           <a:prstGeom prst="rect">
             <a:avLst/>
@@ -11243,6 +10374,7 @@
                   <a:srgbClr val="000000"/>
                 </a:solidFill>
                 <a:latin typeface="Times New Roman"/>
+                <a:ea typeface="DejaVu Sans"/>
               </a:rPr>
               <a:t>Задача:</a:t>
             </a:r>
@@ -11252,6 +10384,7 @@
                   <a:srgbClr val="000000"/>
                 </a:solidFill>
                 <a:latin typeface="Times New Roman"/>
+                <a:ea typeface="DejaVu Sans"/>
               </a:rPr>
               <a:t> Спроектировать инфологическую (ER) модель данных.</a:t>
             </a:r>
@@ -11283,6 +10416,7 @@
                   <a:srgbClr val="000000"/>
                 </a:solidFill>
                 <a:latin typeface="Times New Roman"/>
+                <a:ea typeface="DejaVu Sans"/>
               </a:rPr>
               <a:t>Результат (Что сделано):</a:t>
             </a:r>
@@ -11318,6 +10452,7 @@
                   <a:srgbClr val="000000"/>
                 </a:solidFill>
                 <a:latin typeface="Times New Roman"/>
+                <a:ea typeface="DejaVu Sans"/>
               </a:rPr>
               <a:t>Определены атрибуты для каждой сущности (поля таблиц).</a:t>
             </a:r>
@@ -11342,6 +10477,7 @@
                   <a:srgbClr val="000000"/>
                 </a:solidFill>
                 <a:latin typeface="Times New Roman"/>
+                <a:ea typeface="DejaVu Sans"/>
               </a:rPr>
               <a:t>Установлены типы связей между сущностями (1-к-1, 1-ко-многим).</a:t>
             </a:r>
@@ -11366,6 +10502,7 @@
                   <a:srgbClr val="000000"/>
                 </a:solidFill>
                 <a:latin typeface="Times New Roman"/>
+                <a:ea typeface="DejaVu Sans"/>
               </a:rPr>
               <a:t>Построена ER-диаграмма (см. Приложение А), которая наглядно отображает структуру будущей БД.</a:t>
             </a:r>
@@ -11390,6 +10527,7 @@
                   <a:srgbClr val="000000"/>
                 </a:solidFill>
                 <a:latin typeface="Times New Roman"/>
+                <a:ea typeface="DejaVu Sans"/>
               </a:rPr>
               <a:t>Модель является основой для перехода к реляционной схеме.</a:t>
             </a:r>
@@ -11442,18 +10580,18 @@
         <p:spPr>
           <a:xfrm>
             <a:off x="664200" y="696600"/>
-            <a:ext cx="10863000" cy="701280"/>
-          </a:xfrm>
-          <a:prstGeom prst="rect">
-            <a:avLst/>
-          </a:prstGeom>
-          <a:noFill/>
-          <a:ln w="0">
-            <a:noFill/>
-          </a:ln>
-        </p:spPr>
-        <p:txBody>
-          <a:bodyPr anchor="b">
+            <a:ext cx="10862640" cy="700920"/>
+          </a:xfrm>
+          <a:prstGeom prst="rect">
+            <a:avLst/>
+          </a:prstGeom>
+          <a:noFill/>
+          <a:ln w="0">
+            <a:noFill/>
+          </a:ln>
+        </p:spPr>
+        <p:txBody>
+          <a:bodyPr lIns="0" rIns="0" tIns="0" bIns="0" anchor="b">
             <a:noAutofit/>
           </a:bodyPr>
           <a:p>
@@ -11472,11 +10610,8 @@
               </a:rPr>
               <a:t>Задача 3 — Разработка логической и физической структуры</a:t>
             </a:r>
-            <a:endParaRPr b="0" lang="en-US" sz="3600" spc="-1" strike="noStrike">
-              <a:solidFill>
-                <a:srgbClr val="000000"/>
-              </a:solidFill>
-              <a:latin typeface="Century Schoolbook"/>
+            <a:endParaRPr b="0" lang="ru-RU" sz="3600" spc="-1" strike="noStrike">
+              <a:latin typeface="Arial"/>
             </a:endParaRPr>
           </a:p>
         </p:txBody>
@@ -11490,7 +10625,7 @@
         <p:spPr>
           <a:xfrm>
             <a:off x="664200" y="1707120"/>
-            <a:ext cx="10393920" cy="3443400"/>
+            <a:ext cx="10393560" cy="3443400"/>
           </a:xfrm>
           <a:prstGeom prst="rect">
             <a:avLst/>
@@ -11523,6 +10658,7 @@
                   <a:srgbClr val="000000"/>
                 </a:solidFill>
                 <a:latin typeface="Times New Roman"/>
+                <a:ea typeface="DejaVu Sans"/>
               </a:rPr>
               <a:t>Задача:</a:t>
             </a:r>
@@ -11532,6 +10668,7 @@
                   <a:srgbClr val="000000"/>
                 </a:solidFill>
                 <a:latin typeface="Times New Roman"/>
+                <a:ea typeface="DejaVu Sans"/>
               </a:rPr>
               <a:t> Преобразовать концептуальную модель в реляционную схему и определить физические параметры.</a:t>
             </a:r>
@@ -11563,6 +10700,7 @@
                   <a:srgbClr val="000000"/>
                 </a:solidFill>
                 <a:latin typeface="Times New Roman"/>
+                <a:ea typeface="DejaVu Sans"/>
               </a:rPr>
               <a:t>Результат (Что сделано):</a:t>
             </a:r>
@@ -11598,6 +10736,7 @@
                   <a:srgbClr val="000000"/>
                 </a:solidFill>
                 <a:latin typeface="Times New Roman"/>
+                <a:ea typeface="DejaVu Sans"/>
               </a:rPr>
               <a:t>Логическая структура: Создана схема из 6 таблиц (cars, clients, deals, suppliers, employees, positions) с указанием связей по внешним ключам.</a:t>
             </a:r>
@@ -11622,6 +10761,7 @@
                   <a:srgbClr val="000000"/>
                 </a:solidFill>
                 <a:latin typeface="Times New Roman"/>
+                <a:ea typeface="DejaVu Sans"/>
               </a:rPr>
               <a:t>Физическая структура:</a:t>
             </a:r>
@@ -11642,6 +10782,7 @@
                   <a:srgbClr val="000000"/>
                 </a:solidFill>
                 <a:latin typeface="Times New Roman"/>
+                <a:ea typeface="DejaVu Sans"/>
               </a:rPr>
               <a:t>	</a:t>
             </a:r>
@@ -11651,6 +10792,7 @@
                   <a:srgbClr val="000000"/>
                 </a:solidFill>
                 <a:latin typeface="Times New Roman"/>
+                <a:ea typeface="DejaVu Sans"/>
               </a:rPr>
               <a:t>Выбраны типы данных в PostgreSQL (SERIAL, VARCHAR, NUMERIC, DATE, ENUM).</a:t>
             </a:r>
@@ -11671,6 +10813,7 @@
                   <a:srgbClr val="000000"/>
                 </a:solidFill>
                 <a:latin typeface="Times New Roman"/>
+                <a:ea typeface="DejaVu Sans"/>
               </a:rPr>
               <a:t>	</a:t>
             </a:r>
@@ -11680,6 +10823,7 @@
                   <a:srgbClr val="000000"/>
                 </a:solidFill>
                 <a:latin typeface="Times New Roman"/>
+                <a:ea typeface="DejaVu Sans"/>
               </a:rPr>
               <a:t>Запланированы индексы для ускорения поиска (по VIN, статусу авто, дате сделки).</a:t>
             </a:r>
@@ -11732,18 +10876,18 @@
         <p:spPr>
           <a:xfrm>
             <a:off x="664200" y="296640"/>
-            <a:ext cx="10863000" cy="701280"/>
-          </a:xfrm>
-          <a:prstGeom prst="rect">
-            <a:avLst/>
-          </a:prstGeom>
-          <a:noFill/>
-          <a:ln w="0">
-            <a:noFill/>
-          </a:ln>
-        </p:spPr>
-        <p:txBody>
-          <a:bodyPr anchor="b">
+            <a:ext cx="10862640" cy="700920"/>
+          </a:xfrm>
+          <a:prstGeom prst="rect">
+            <a:avLst/>
+          </a:prstGeom>
+          <a:noFill/>
+          <a:ln w="0">
+            <a:noFill/>
+          </a:ln>
+        </p:spPr>
+        <p:txBody>
+          <a:bodyPr lIns="0" rIns="0" tIns="0" bIns="0" anchor="b">
             <a:noAutofit/>
           </a:bodyPr>
           <a:p>
@@ -11762,11 +10906,8 @@
               </a:rPr>
               <a:t>Задача 4 — Реализация проекта в СУБД (Часть 1)</a:t>
             </a:r>
-            <a:endParaRPr b="0" lang="en-US" sz="3600" spc="-1" strike="noStrike">
-              <a:solidFill>
-                <a:srgbClr val="000000"/>
-              </a:solidFill>
-              <a:latin typeface="Century Schoolbook"/>
+            <a:endParaRPr b="0" lang="ru-RU" sz="3600" spc="-1" strike="noStrike">
+              <a:latin typeface="Arial"/>
             </a:endParaRPr>
           </a:p>
         </p:txBody>
@@ -11780,7 +10921,7 @@
         <p:spPr>
           <a:xfrm>
             <a:off x="664200" y="1707120"/>
-            <a:ext cx="10393920" cy="3443400"/>
+            <a:ext cx="10393560" cy="3443400"/>
           </a:xfrm>
           <a:prstGeom prst="rect">
             <a:avLst/>
@@ -11813,6 +10954,7 @@
                   <a:srgbClr val="000000"/>
                 </a:solidFill>
                 <a:latin typeface="Times New Roman"/>
+                <a:ea typeface="DejaVu Sans"/>
               </a:rPr>
               <a:t>Задача:</a:t>
             </a:r>
@@ -11822,6 +10964,7 @@
                   <a:srgbClr val="000000"/>
                 </a:solidFill>
                 <a:latin typeface="Times New Roman"/>
+                <a:ea typeface="DejaVu Sans"/>
               </a:rPr>
               <a:t> Реализовать проект в pgAdmin 4 (PostgreSQL).</a:t>
             </a:r>
@@ -11853,6 +10996,7 @@
                   <a:srgbClr val="000000"/>
                 </a:solidFill>
                 <a:latin typeface="Times New Roman"/>
+                <a:ea typeface="DejaVu Sans"/>
               </a:rPr>
               <a:t>Результат (Что сделано):</a:t>
             </a:r>
@@ -11888,6 +11032,7 @@
                   <a:srgbClr val="000000"/>
                 </a:solidFill>
                 <a:latin typeface="Times New Roman"/>
+                <a:ea typeface="DejaVu Sans"/>
               </a:rPr>
               <a:t>Написаны и выполнены SQL-скрипты создания всех таблиц с ограничениями (PRIMARY KEY, FOREIGN KEY, CHECK).</a:t>
             </a:r>
@@ -11912,6 +11057,7 @@
                   <a:srgbClr val="000000"/>
                 </a:solidFill>
                 <a:latin typeface="Times New Roman"/>
+                <a:ea typeface="DejaVu Sans"/>
               </a:rPr>
               <a:t>Созданы базовые и аналитические SQL-запросы:</a:t>
             </a:r>
@@ -11932,6 +11078,7 @@
                   <a:srgbClr val="000000"/>
                 </a:solidFill>
                 <a:latin typeface="Times New Roman"/>
+                <a:ea typeface="DejaVu Sans"/>
               </a:rPr>
               <a:t>	</a:t>
             </a:r>
@@ -11941,6 +11088,7 @@
                   <a:srgbClr val="000000"/>
                 </a:solidFill>
                 <a:latin typeface="Times New Roman"/>
+                <a:ea typeface="DejaVu Sans"/>
               </a:rPr>
               <a:t>Поиск автомобилей по параметрам.</a:t>
             </a:r>
@@ -11961,6 +11109,7 @@
                   <a:srgbClr val="000000"/>
                 </a:solidFill>
                 <a:latin typeface="Times New Roman"/>
+                <a:ea typeface="DejaVu Sans"/>
               </a:rPr>
               <a:t>	</a:t>
             </a:r>
@@ -11970,6 +11119,7 @@
                   <a:srgbClr val="000000"/>
                 </a:solidFill>
                 <a:latin typeface="Times New Roman"/>
+                <a:ea typeface="DejaVu Sans"/>
               </a:rPr>
               <a:t>Отчеты по продажам и прибыли (JOIN, агрегатные функции).</a:t>
             </a:r>
@@ -11994,6 +11144,7 @@
                   <a:srgbClr val="000000"/>
                 </a:solidFill>
                 <a:latin typeface="Times New Roman"/>
+                <a:ea typeface="DejaVu Sans"/>
               </a:rPr>
               <a:t>Разработан интерфейс в виде SQL-представлений (VIEW) для удобства пользователей (каталог авто, отчет по продажам).</a:t>
             </a:r>
@@ -12046,18 +11197,18 @@
         <p:spPr>
           <a:xfrm>
             <a:off x="664200" y="296640"/>
-            <a:ext cx="10863000" cy="701280"/>
-          </a:xfrm>
-          <a:prstGeom prst="rect">
-            <a:avLst/>
-          </a:prstGeom>
-          <a:noFill/>
-          <a:ln w="0">
-            <a:noFill/>
-          </a:ln>
-        </p:spPr>
-        <p:txBody>
-          <a:bodyPr anchor="b">
+            <a:ext cx="10862640" cy="700920"/>
+          </a:xfrm>
+          <a:prstGeom prst="rect">
+            <a:avLst/>
+          </a:prstGeom>
+          <a:noFill/>
+          <a:ln w="0">
+            <a:noFill/>
+          </a:ln>
+        </p:spPr>
+        <p:txBody>
+          <a:bodyPr lIns="0" rIns="0" tIns="0" bIns="0" anchor="b">
             <a:noAutofit/>
           </a:bodyPr>
           <a:p>
@@ -12076,11 +11227,8 @@
               </a:rPr>
               <a:t>Задача 5 — Реализация проекта в СУБД (Часть 2)</a:t>
             </a:r>
-            <a:endParaRPr b="0" lang="en-US" sz="3600" spc="-1" strike="noStrike">
-              <a:solidFill>
-                <a:srgbClr val="000000"/>
-              </a:solidFill>
-              <a:latin typeface="Century Schoolbook"/>
+            <a:endParaRPr b="0" lang="ru-RU" sz="3600" spc="-1" strike="noStrike">
+              <a:latin typeface="Arial"/>
             </a:endParaRPr>
           </a:p>
         </p:txBody>
@@ -12094,7 +11242,7 @@
         <p:spPr>
           <a:xfrm>
             <a:off x="664200" y="2012040"/>
-            <a:ext cx="10270080" cy="2833560"/>
+            <a:ext cx="10269720" cy="2833560"/>
           </a:xfrm>
           <a:prstGeom prst="rect">
             <a:avLst/>
@@ -12127,6 +11275,7 @@
                   <a:srgbClr val="000000"/>
                 </a:solidFill>
                 <a:latin typeface="Times New Roman"/>
+                <a:ea typeface="DejaVu Sans"/>
               </a:rPr>
               <a:t>Задача:</a:t>
             </a:r>
@@ -12136,6 +11285,7 @@
                   <a:srgbClr val="000000"/>
                 </a:solidFill>
                 <a:latin typeface="Times New Roman"/>
+                <a:ea typeface="DejaVu Sans"/>
               </a:rPr>
               <a:t> Обеспечить безопасность и надежность системы.</a:t>
             </a:r>
@@ -12167,6 +11317,7 @@
                   <a:srgbClr val="000000"/>
                 </a:solidFill>
                 <a:latin typeface="Times New Roman"/>
+                <a:ea typeface="DejaVu Sans"/>
               </a:rPr>
               <a:t>Результат (Что сделано):</a:t>
             </a:r>
@@ -12202,6 +11353,7 @@
                   <a:srgbClr val="000000"/>
                 </a:solidFill>
                 <a:latin typeface="Times New Roman"/>
+                <a:ea typeface="DejaVu Sans"/>
               </a:rPr>
               <a:t>Безопасность: Внедрена ролевая модель доступа. Созданы роли car_admin, car_manager, car_warehouse с разными правами (например, менеджер не видит закупочные цены).</a:t>
             </a:r>
@@ -12226,6 +11378,7 @@
                   <a:srgbClr val="000000"/>
                 </a:solidFill>
                 <a:latin typeface="Times New Roman"/>
+                <a:ea typeface="DejaVu Sans"/>
               </a:rPr>
               <a:t>Производительность: Созданы индексы на ключевых полях для оптимизации работы.</a:t>
             </a:r>
@@ -12250,6 +11403,7 @@
                   <a:srgbClr val="000000"/>
                 </a:solidFill>
                 <a:latin typeface="Times New Roman"/>
+                <a:ea typeface="DejaVu Sans"/>
               </a:rPr>
               <a:t>Надежность: Разработана стратегия резервного копирования (ежедневные полные бэкапы + архив WAL-логов для восстановления на момент сбоя).</a:t>
             </a:r>
@@ -12302,18 +11456,18 @@
         <p:spPr>
           <a:xfrm>
             <a:off x="664200" y="296640"/>
-            <a:ext cx="10863000" cy="701280"/>
-          </a:xfrm>
-          <a:prstGeom prst="rect">
-            <a:avLst/>
-          </a:prstGeom>
-          <a:noFill/>
-          <a:ln w="0">
-            <a:noFill/>
-          </a:ln>
-        </p:spPr>
-        <p:txBody>
-          <a:bodyPr anchor="b">
+            <a:ext cx="10862640" cy="700920"/>
+          </a:xfrm>
+          <a:prstGeom prst="rect">
+            <a:avLst/>
+          </a:prstGeom>
+          <a:noFill/>
+          <a:ln w="0">
+            <a:noFill/>
+          </a:ln>
+        </p:spPr>
+        <p:txBody>
+          <a:bodyPr lIns="0" rIns="0" tIns="0" bIns="0" anchor="b">
             <a:noAutofit/>
           </a:bodyPr>
           <a:p>
@@ -12330,255 +11484,37 @@
                 </a:solidFill>
                 <a:latin typeface="Times New Roman"/>
               </a:rPr>
-              <a:t>Выводы по работе</a:t>
-            </a:r>
-            <a:endParaRPr b="0" lang="en-US" sz="3600" spc="-1" strike="noStrike">
-              <a:solidFill>
-                <a:srgbClr val="000000"/>
-              </a:solidFill>
-              <a:latin typeface="Century Schoolbook"/>
-            </a:endParaRPr>
-          </a:p>
-        </p:txBody>
-      </p:sp>
-      <p:sp>
-        <p:nvSpPr>
-          <p:cNvPr id="145" name="TextBox 5"/>
-          <p:cNvSpPr/>
+              <a:t>Демонстрация интерфейса</a:t>
+            </a:r>
+            <a:endParaRPr b="0" lang="ru-RU" sz="3600" spc="-1" strike="noStrike">
+              <a:latin typeface="Arial"/>
+            </a:endParaRPr>
+          </a:p>
+        </p:txBody>
+      </p:sp>
+      <p:pic>
+        <p:nvPicPr>
+          <p:cNvPr id="145" name="" descr=""/>
+          <p:cNvPicPr/>
           <p:nvPr/>
-        </p:nvSpPr>
-        <p:spPr>
-          <a:xfrm>
-            <a:off x="664200" y="1554480"/>
-            <a:ext cx="10422360" cy="3748320"/>
-          </a:xfrm>
-          <a:prstGeom prst="rect">
-            <a:avLst/>
-          </a:prstGeom>
-          <a:noFill/>
-          <a:ln w="0">
-            <a:noFill/>
-          </a:ln>
-        </p:spPr>
-        <p:style>
-          <a:lnRef idx="0"/>
-          <a:fillRef idx="0"/>
-          <a:effectRef idx="0"/>
-          <a:fontRef idx="minor"/>
-        </p:style>
-        <p:txBody>
-          <a:bodyPr lIns="90000" rIns="90000" tIns="45000" bIns="45000" anchor="ctr">
-            <a:spAutoFit/>
-          </a:bodyPr>
-          <a:p>
-            <a:pPr>
-              <a:lnSpc>
-                <a:spcPct val="100000"/>
-              </a:lnSpc>
-              <a:buNone/>
-            </a:pPr>
-            <a:r>
-              <a:rPr b="1" lang="ru-RU" sz="2000" spc="-1" strike="noStrike">
-                <a:solidFill>
-                  <a:srgbClr val="000000"/>
-                </a:solidFill>
-                <a:latin typeface="Times New Roman"/>
-              </a:rPr>
-              <a:t>Цель работы достигнута:</a:t>
-            </a:r>
-            <a:r>
-              <a:rPr b="0" lang="ru-RU" sz="2000" spc="-1" strike="noStrike">
-                <a:solidFill>
-                  <a:srgbClr val="000000"/>
-                </a:solidFill>
-                <a:latin typeface="Times New Roman"/>
-              </a:rPr>
-              <a:t> Спроектирована и реализована реляционная БД для автомобильного центра.</a:t>
-            </a:r>
-            <a:endParaRPr b="0" lang="ru-RU" sz="2000" spc="-1" strike="noStrike">
-              <a:latin typeface="Arial"/>
-            </a:endParaRPr>
-          </a:p>
-          <a:p>
-            <a:pPr>
-              <a:lnSpc>
-                <a:spcPct val="100000"/>
-              </a:lnSpc>
-              <a:buNone/>
-            </a:pPr>
-            <a:endParaRPr b="0" lang="ru-RU" sz="2000" spc="-1" strike="noStrike">
-              <a:latin typeface="Arial"/>
-            </a:endParaRPr>
-          </a:p>
-          <a:p>
-            <a:pPr>
-              <a:lnSpc>
-                <a:spcPct val="100000"/>
-              </a:lnSpc>
-              <a:buNone/>
-            </a:pPr>
-            <a:r>
-              <a:rPr b="1" lang="ru-RU" sz="2000" spc="-1" strike="noStrike">
-                <a:solidFill>
-                  <a:srgbClr val="000000"/>
-                </a:solidFill>
-                <a:latin typeface="Times New Roman"/>
-              </a:rPr>
-              <a:t>Результаты:</a:t>
-            </a:r>
-            <a:endParaRPr b="0" lang="ru-RU" sz="2000" spc="-1" strike="noStrike">
-              <a:latin typeface="Arial"/>
-            </a:endParaRPr>
-          </a:p>
-          <a:p>
-            <a:pPr>
-              <a:lnSpc>
-                <a:spcPct val="100000"/>
-              </a:lnSpc>
-              <a:buNone/>
-            </a:pPr>
-            <a:endParaRPr b="0" lang="ru-RU" sz="2000" spc="-1" strike="noStrike">
-              <a:latin typeface="Arial"/>
-            </a:endParaRPr>
-          </a:p>
-          <a:p>
-            <a:pPr marL="343080" indent="-343080">
-              <a:lnSpc>
-                <a:spcPct val="100000"/>
-              </a:lnSpc>
-              <a:buClr>
-                <a:srgbClr val="000000"/>
-              </a:buClr>
-              <a:buFont typeface="Arial"/>
-              <a:buChar char="•"/>
-            </a:pPr>
-            <a:r>
-              <a:rPr b="0" lang="ru-RU" sz="2000" spc="-1" strike="noStrike">
-                <a:solidFill>
-                  <a:srgbClr val="000000"/>
-                </a:solidFill>
-                <a:latin typeface="Times New Roman"/>
-              </a:rPr>
-              <a:t>Создана нормализованная структура данных (6 таблиц).</a:t>
-            </a:r>
-            <a:endParaRPr b="0" lang="ru-RU" sz="2000" spc="-1" strike="noStrike">
-              <a:latin typeface="Arial"/>
-            </a:endParaRPr>
-          </a:p>
-          <a:p>
-            <a:pPr marL="343080" indent="-343080">
-              <a:lnSpc>
-                <a:spcPct val="100000"/>
-              </a:lnSpc>
-              <a:buClr>
-                <a:srgbClr val="000000"/>
-              </a:buClr>
-              <a:buFont typeface="Arial"/>
-              <a:buChar char="•"/>
-            </a:pPr>
-            <a:r>
-              <a:rPr b="0" lang="ru-RU" sz="2000" spc="-1" strike="noStrike">
-                <a:solidFill>
-                  <a:srgbClr val="000000"/>
-                </a:solidFill>
-                <a:latin typeface="Times New Roman"/>
-              </a:rPr>
-              <a:t>Реализована бизнес-логика через ограничения целостности.</a:t>
-            </a:r>
-            <a:endParaRPr b="0" lang="ru-RU" sz="2000" spc="-1" strike="noStrike">
-              <a:latin typeface="Arial"/>
-            </a:endParaRPr>
-          </a:p>
-          <a:p>
-            <a:pPr marL="343080" indent="-343080">
-              <a:lnSpc>
-                <a:spcPct val="100000"/>
-              </a:lnSpc>
-              <a:buClr>
-                <a:srgbClr val="000000"/>
-              </a:buClr>
-              <a:buFont typeface="Arial"/>
-              <a:buChar char="•"/>
-            </a:pPr>
-            <a:r>
-              <a:rPr b="0" lang="ru-RU" sz="2000" spc="-1" strike="noStrike">
-                <a:solidFill>
-                  <a:srgbClr val="000000"/>
-                </a:solidFill>
-                <a:latin typeface="Times New Roman"/>
-              </a:rPr>
-              <a:t>Обеспечен удобный доступ через представления и запросы.</a:t>
-            </a:r>
-            <a:endParaRPr b="0" lang="ru-RU" sz="2000" spc="-1" strike="noStrike">
-              <a:latin typeface="Arial"/>
-            </a:endParaRPr>
-          </a:p>
-          <a:p>
-            <a:pPr marL="343080" indent="-343080">
-              <a:lnSpc>
-                <a:spcPct val="100000"/>
-              </a:lnSpc>
-              <a:buClr>
-                <a:srgbClr val="000000"/>
-              </a:buClr>
-              <a:buFont typeface="Arial"/>
-              <a:buChar char="•"/>
-            </a:pPr>
-            <a:r>
-              <a:rPr b="0" lang="ru-RU" sz="2000" spc="-1" strike="noStrike">
-                <a:solidFill>
-                  <a:srgbClr val="000000"/>
-                </a:solidFill>
-                <a:latin typeface="Times New Roman"/>
-              </a:rPr>
-              <a:t>Внедрены механизмы безопасности и отказоустойчивости.</a:t>
-            </a:r>
-            <a:endParaRPr b="0" lang="ru-RU" sz="2000" spc="-1" strike="noStrike">
-              <a:latin typeface="Arial"/>
-            </a:endParaRPr>
-          </a:p>
-          <a:p>
-            <a:pPr>
-              <a:lnSpc>
-                <a:spcPct val="100000"/>
-              </a:lnSpc>
-              <a:buNone/>
-            </a:pPr>
-            <a:endParaRPr b="0" lang="ru-RU" sz="2000" spc="-1" strike="noStrike">
-              <a:latin typeface="Arial"/>
-            </a:endParaRPr>
-          </a:p>
-          <a:p>
-            <a:pPr>
-              <a:lnSpc>
-                <a:spcPct val="100000"/>
-              </a:lnSpc>
-              <a:buNone/>
-            </a:pPr>
-            <a:r>
-              <a:rPr b="1" lang="ru-RU" sz="2000" spc="-1" strike="noStrike">
-                <a:solidFill>
-                  <a:srgbClr val="000000"/>
-                </a:solidFill>
-                <a:latin typeface="Times New Roman"/>
-              </a:rPr>
-              <a:t>Заключение:</a:t>
-            </a:r>
-            <a:r>
-              <a:rPr b="0" lang="ru-RU" sz="2000" spc="-1" strike="noStrike">
-                <a:solidFill>
-                  <a:srgbClr val="000000"/>
-                </a:solidFill>
-                <a:latin typeface="Times New Roman"/>
-              </a:rPr>
-              <a:t> Разработанная база данных является готовым прототипом информационной системы, которая может быть внедрена в реальный бизнес-процесс и масштабирована.</a:t>
-            </a:r>
-            <a:endParaRPr b="0" lang="ru-RU" sz="2000" spc="-1" strike="noStrike">
-              <a:latin typeface="Arial"/>
-            </a:endParaRPr>
-          </a:p>
-        </p:txBody>
-      </p:sp>
+        </p:nvPicPr>
+        <p:blipFill>
+          <a:blip r:embed="rId1"/>
+          <a:stretch/>
+        </p:blipFill>
+        <p:spPr>
+          <a:xfrm>
+            <a:off x="720000" y="1080000"/>
+            <a:ext cx="9721080" cy="5179320"/>
+          </a:xfrm>
+          <a:prstGeom prst="rect">
+            <a:avLst/>
+          </a:prstGeom>
+          <a:ln w="0">
+            <a:noFill/>
+          </a:ln>
+        </p:spPr>
+      </p:pic>
     </p:spTree>
   </p:cSld>
   <mc:AlternateContent>
